--- a/course/高校实验室安全/课件/第3章_通用安全与个人防护.pptx
+++ b/course/高校实验室安全/课件/第3章_通用安全与个人防护.pptx
@@ -92,6 +92,21 @@
     <p:sldId id="340" r:id="rId92"/>
     <p:sldId id="341" r:id="rId93"/>
     <p:sldId id="342" r:id="rId94"/>
+    <p:sldId id="343" r:id="rId95"/>
+    <p:sldId id="344" r:id="rId96"/>
+    <p:sldId id="345" r:id="rId97"/>
+    <p:sldId id="346" r:id="rId98"/>
+    <p:sldId id="347" r:id="rId99"/>
+    <p:sldId id="348" r:id="rId100"/>
+    <p:sldId id="349" r:id="rId101"/>
+    <p:sldId id="350" r:id="rId102"/>
+    <p:sldId id="351" r:id="rId103"/>
+    <p:sldId id="352" r:id="rId104"/>
+    <p:sldId id="353" r:id="rId105"/>
+    <p:sldId id="354" r:id="rId106"/>
+    <p:sldId id="355" r:id="rId107"/>
+    <p:sldId id="356" r:id="rId108"/>
+    <p:sldId id="357" r:id="rId109"/>
   </p:sldIdLst>
   <p:sldSz cx="12191695" cy="6858000" type="screen4x3"/>
   <p:notesSz cx="6858000" cy="9144000"/>
@@ -5703,6 +5718,606 @@
 </p:notes>
 </file>
 
+<file path=ppt/notesSlides/notesSlide72.xml><?xml version="1.0" encoding="utf-8"?>
+<p:notes xmlns:a="http://schemas.openxmlformats.org/drawingml/2006/main" xmlns:p="http://schemas.openxmlformats.org/presentationml/2006/main" xmlns:r="http://schemas.openxmlformats.org/officeDocument/2006/relationships">
+  <p:cSld>
+    <p:spTree>
+      <p:nvGrpSpPr>
+        <p:cNvPr id="1" name=""/>
+        <p:cNvGrpSpPr/>
+        <p:nvPr/>
+      </p:nvGrpSpPr>
+      <p:grpSpPr>
+        <a:xfrm>
+          <a:off x="0" y="0"/>
+          <a:ext cx="0" cy="0"/>
+          <a:chOff x="0" y="0"/>
+          <a:chExt cx="0" cy="0"/>
+        </a:xfrm>
+      </p:grpSpPr>
+      <p:sp>
+        <p:nvSpPr>
+          <p:cNvPr id="2" name="Slide Image Placeholder 1"/>
+          <p:cNvSpPr>
+            <a:spLocks noGrp="1"/>
+          </p:cNvSpPr>
+          <p:nvPr>
+            <p:ph type="sldImg" idx="2"/>
+          </p:nvPr>
+        </p:nvSpPr>
+        <p:spPr/>
+      </p:sp>
+      <p:sp>
+        <p:nvSpPr>
+          <p:cNvPr id="3" name="Notes Placeholder 2"/>
+          <p:cNvSpPr>
+            <a:spLocks noGrp="1"/>
+          </p:cNvSpPr>
+          <p:nvPr>
+            <p:ph type="body" idx="3" sz="quarter"/>
+          </p:nvPr>
+        </p:nvSpPr>
+        <p:spPr/>
+        <p:txBody>
+          <a:bodyPr/>
+          <a:lstStyle/>
+          <a:p>
+            <a:r>
+              <a:t>实验服不是“工作制服”，而是个人防护用品：意外溅洒时，液滴、粉末先落在实验服上，而不是直接接触皮肤和自己的衣服，为脱下、冲洗争取时间。</a:t>
+            </a:r>
+          </a:p>
+          <a:p>
+            <a:r>
+              <a:t>进入实验室开始工作前就要穿好实验服，离开时再脱下（着装要求见第 020 课）。实验服成本不高，却能大大降低化学品沾染和灼伤的风险，不要因为“只做一会儿”“只是看看”而不穿。</a:t>
+            </a:r>
+          </a:p>
+        </p:txBody>
+      </p:sp>
+      <p:sp>
+        <p:nvSpPr>
+          <p:cNvPr id="4" name="Slide Number Placeholder 3"/>
+          <p:cNvSpPr>
+            <a:spLocks noGrp="1"/>
+          </p:cNvSpPr>
+          <p:nvPr>
+            <p:ph type="sldNum" idx="5" sz="quarter"/>
+          </p:nvPr>
+        </p:nvSpPr>
+        <p:spPr/>
+      </p:sp>
+    </p:spTree>
+  </p:cSld>
+  <p:clrMapOvr>
+    <a:masterClrMapping/>
+  </p:clrMapOvr>
+</p:notes>
+</file>
+
+<file path=ppt/notesSlides/notesSlide73.xml><?xml version="1.0" encoding="utf-8"?>
+<p:notes xmlns:a="http://schemas.openxmlformats.org/drawingml/2006/main" xmlns:p="http://schemas.openxmlformats.org/presentationml/2006/main" xmlns:r="http://schemas.openxmlformats.org/officeDocument/2006/relationships">
+  <p:cSld>
+    <p:spTree>
+      <p:nvGrpSpPr>
+        <p:cNvPr id="1" name=""/>
+        <p:cNvGrpSpPr/>
+        <p:nvPr/>
+      </p:nvGrpSpPr>
+      <p:grpSpPr>
+        <a:xfrm>
+          <a:off x="0" y="0"/>
+          <a:ext cx="0" cy="0"/>
+          <a:chOff x="0" y="0"/>
+          <a:chExt cx="0" cy="0"/>
+        </a:xfrm>
+      </p:grpSpPr>
+      <p:sp>
+        <p:nvSpPr>
+          <p:cNvPr id="2" name="Slide Image Placeholder 1"/>
+          <p:cNvSpPr>
+            <a:spLocks noGrp="1"/>
+          </p:cNvSpPr>
+          <p:nvPr>
+            <p:ph type="sldImg" idx="2"/>
+          </p:nvPr>
+        </p:nvSpPr>
+        <p:spPr/>
+      </p:sp>
+      <p:sp>
+        <p:nvSpPr>
+          <p:cNvPr id="3" name="Notes Placeholder 2"/>
+          <p:cNvSpPr>
+            <a:spLocks noGrp="1"/>
+          </p:cNvSpPr>
+          <p:nvPr>
+            <p:ph type="body" idx="3" sz="quarter"/>
+          </p:nvPr>
+        </p:nvSpPr>
+        <p:spPr/>
+        <p:txBody>
+          <a:bodyPr/>
+          <a:lstStyle/>
+          <a:p>
+            <a:r>
+              <a:t>实验服宜选棉质或阻燃材质。涤纶等化纤面料遇火、遇高温会熔化、滴落，粘在皮肤上造成严重烧伤，所以化学实验室不宜穿化纤实验服；实验服里面也尽量穿棉质衣服，不穿化纤毛衣、紧身化纤运动服。</a:t>
+            </a:r>
+          </a:p>
+          <a:p>
+            <a:r>
+              <a:t>实验服要合身：长度一般过膝，长袖盖住手腕，太大易勾挂，太小遮不住。具体材质和款式按实验风险评估和本校规定选择。</a:t>
+            </a:r>
+          </a:p>
+        </p:txBody>
+      </p:sp>
+      <p:sp>
+        <p:nvSpPr>
+          <p:cNvPr id="4" name="Slide Number Placeholder 3"/>
+          <p:cNvSpPr>
+            <a:spLocks noGrp="1"/>
+          </p:cNvSpPr>
+          <p:nvPr>
+            <p:ph type="sldNum" idx="5" sz="quarter"/>
+          </p:nvPr>
+        </p:nvSpPr>
+        <p:spPr/>
+      </p:sp>
+    </p:spTree>
+  </p:cSld>
+  <p:clrMapOvr>
+    <a:masterClrMapping/>
+  </p:clrMapOvr>
+</p:notes>
+</file>
+
+<file path=ppt/notesSlides/notesSlide74.xml><?xml version="1.0" encoding="utf-8"?>
+<p:notes xmlns:a="http://schemas.openxmlformats.org/drawingml/2006/main" xmlns:p="http://schemas.openxmlformats.org/presentationml/2006/main" xmlns:r="http://schemas.openxmlformats.org/officeDocument/2006/relationships">
+  <p:cSld>
+    <p:spTree>
+      <p:nvGrpSpPr>
+        <p:cNvPr id="1" name=""/>
+        <p:cNvGrpSpPr/>
+        <p:nvPr/>
+      </p:nvGrpSpPr>
+      <p:grpSpPr>
+        <a:xfrm>
+          <a:off x="0" y="0"/>
+          <a:ext cx="0" cy="0"/>
+          <a:chOff x="0" y="0"/>
+          <a:chExt cx="0" cy="0"/>
+        </a:xfrm>
+      </p:grpSpPr>
+      <p:sp>
+        <p:nvSpPr>
+          <p:cNvPr id="2" name="Slide Image Placeholder 1"/>
+          <p:cNvSpPr>
+            <a:spLocks noGrp="1"/>
+          </p:cNvSpPr>
+          <p:nvPr>
+            <p:ph type="sldImg" idx="2"/>
+          </p:nvPr>
+        </p:nvSpPr>
+        <p:spPr/>
+      </p:sp>
+      <p:sp>
+        <p:nvSpPr>
+          <p:cNvPr id="3" name="Notes Placeholder 2"/>
+          <p:cNvSpPr>
+            <a:spLocks noGrp="1"/>
+          </p:cNvSpPr>
+          <p:nvPr>
+            <p:ph type="body" idx="3" sz="quarter"/>
+          </p:nvPr>
+        </p:nvSpPr>
+        <p:spPr/>
+        <p:txBody>
+          <a:bodyPr/>
+          <a:lstStyle/>
+          <a:p>
+            <a:r>
+              <a:t>棉质实验服不会熔化，但一旦着火仍会持续燃烧。阻燃实验服离开火源后能自行熄灭，为脱下、灭火争取时间。使用自燃试剂（如遇空气自燃的金属有机试剂）、大量易燃溶剂、明火或进行高能反应时，必须穿阻燃实验服。曾有研究人员处理自燃试剂时起火，因穿着化纤衣服、没有穿阻燃服而严重烧伤致死，这类工作从此把阻燃服作为必备。</a:t>
+            </a:r>
+          </a:p>
+          <a:p>
+            <a:r>
+              <a:t>焊接、切割会溅出火花，要穿阻燃或纯棉工作服并扣好领口（焊接防护见第 128 课）。阻燃防护服应符合 GB 8965.1-2020（以现行文本为准）等国家标准；需要阻燃服的工作写进风险评估。衣物着火的处置见第 034 课。</a:t>
+            </a:r>
+          </a:p>
+        </p:txBody>
+      </p:sp>
+      <p:sp>
+        <p:nvSpPr>
+          <p:cNvPr id="4" name="Slide Number Placeholder 3"/>
+          <p:cNvSpPr>
+            <a:spLocks noGrp="1"/>
+          </p:cNvSpPr>
+          <p:nvPr>
+            <p:ph type="sldNum" idx="5" sz="quarter"/>
+          </p:nvPr>
+        </p:nvSpPr>
+        <p:spPr/>
+      </p:sp>
+    </p:spTree>
+  </p:cSld>
+  <p:clrMapOvr>
+    <a:masterClrMapping/>
+  </p:clrMapOvr>
+</p:notes>
+</file>
+
+<file path=ppt/notesSlides/notesSlide75.xml><?xml version="1.0" encoding="utf-8"?>
+<p:notes xmlns:a="http://schemas.openxmlformats.org/drawingml/2006/main" xmlns:p="http://schemas.openxmlformats.org/presentationml/2006/main" xmlns:r="http://schemas.openxmlformats.org/officeDocument/2006/relationships">
+  <p:cSld>
+    <p:spTree>
+      <p:nvGrpSpPr>
+        <p:cNvPr id="1" name=""/>
+        <p:cNvGrpSpPr/>
+        <p:nvPr/>
+      </p:nvGrpSpPr>
+      <p:grpSpPr>
+        <a:xfrm>
+          <a:off x="0" y="0"/>
+          <a:ext cx="0" cy="0"/>
+          <a:chOff x="0" y="0"/>
+          <a:chExt cx="0" cy="0"/>
+        </a:xfrm>
+      </p:grpSpPr>
+      <p:sp>
+        <p:nvSpPr>
+          <p:cNvPr id="2" name="Slide Image Placeholder 1"/>
+          <p:cNvSpPr>
+            <a:spLocks noGrp="1"/>
+          </p:cNvSpPr>
+          <p:nvPr>
+            <p:ph type="sldImg" idx="2"/>
+          </p:nvPr>
+        </p:nvSpPr>
+        <p:spPr/>
+      </p:sp>
+      <p:sp>
+        <p:nvSpPr>
+          <p:cNvPr id="3" name="Notes Placeholder 2"/>
+          <p:cNvSpPr>
+            <a:spLocks noGrp="1"/>
+          </p:cNvSpPr>
+          <p:nvPr>
+            <p:ph type="body" idx="3" sz="quarter"/>
+          </p:nvPr>
+        </p:nvSpPr>
+        <p:spPr/>
+        <p:txBody>
+          <a:bodyPr/>
+          <a:lstStyle/>
+          <a:p>
+            <a:r>
+              <a:t>敞开穿的实验服挡不住正面溅来的液体，等于没穿。穿实验服要把扣子从下到上全部扣好；袖口尽量塞进手套里（或手套口套住袖口），让手腕不外露。</a:t>
+            </a:r>
+          </a:p>
+          <a:p>
+            <a:r>
+              <a:t>不要把袖子卷起来露出手臂；袖口宽松、下摆飘动容易勾倒烧杯、碰到火焰或卷入设备，要选袖口收紧的款式。</a:t>
+            </a:r>
+          </a:p>
+        </p:txBody>
+      </p:sp>
+      <p:sp>
+        <p:nvSpPr>
+          <p:cNvPr id="4" name="Slide Number Placeholder 3"/>
+          <p:cNvSpPr>
+            <a:spLocks noGrp="1"/>
+          </p:cNvSpPr>
+          <p:nvPr>
+            <p:ph type="sldNum" idx="5" sz="quarter"/>
+          </p:nvPr>
+        </p:nvSpPr>
+        <p:spPr/>
+      </p:sp>
+    </p:spTree>
+  </p:cSld>
+  <p:clrMapOvr>
+    <a:masterClrMapping/>
+  </p:clrMapOvr>
+</p:notes>
+</file>
+
+<file path=ppt/notesSlides/notesSlide76.xml><?xml version="1.0" encoding="utf-8"?>
+<p:notes xmlns:a="http://schemas.openxmlformats.org/drawingml/2006/main" xmlns:p="http://schemas.openxmlformats.org/presentationml/2006/main" xmlns:r="http://schemas.openxmlformats.org/officeDocument/2006/relationships">
+  <p:cSld>
+    <p:spTree>
+      <p:nvGrpSpPr>
+        <p:cNvPr id="1" name=""/>
+        <p:cNvGrpSpPr/>
+        <p:nvPr/>
+      </p:nvGrpSpPr>
+      <p:grpSpPr>
+        <a:xfrm>
+          <a:off x="0" y="0"/>
+          <a:ext cx="0" cy="0"/>
+          <a:chOff x="0" y="0"/>
+          <a:chExt cx="0" cy="0"/>
+        </a:xfrm>
+      </p:grpSpPr>
+      <p:sp>
+        <p:nvSpPr>
+          <p:cNvPr id="2" name="Slide Image Placeholder 1"/>
+          <p:cNvSpPr>
+            <a:spLocks noGrp="1"/>
+          </p:cNvSpPr>
+          <p:nvPr>
+            <p:ph type="sldImg" idx="2"/>
+          </p:nvPr>
+        </p:nvSpPr>
+        <p:spPr/>
+      </p:sp>
+      <p:sp>
+        <p:nvSpPr>
+          <p:cNvPr id="3" name="Notes Placeholder 2"/>
+          <p:cNvSpPr>
+            <a:spLocks noGrp="1"/>
+          </p:cNvSpPr>
+          <p:nvPr>
+            <p:ph type="body" idx="3" sz="quarter"/>
+          </p:nvPr>
+        </p:nvSpPr>
+        <p:spPr/>
+        <p:txBody>
+          <a:bodyPr/>
+          <a:lstStyle/>
+          <a:p>
+            <a:r>
+              <a:t>腐蚀品溅到皮肤上会造成化学灼伤，而实验服面料会被浸透。处理浓酸浓碱、易挥发或活泼的溶液，或者有较大喷溅风险时（如大量转移、稀释），要在实验服外面再加一条耐化学品围裙。</a:t>
+            </a:r>
+          </a:p>
+          <a:p>
+            <a:r>
+              <a:t>围裙多了一层防护，而且溅上后解开带子就能迅速脱下，减少接触时间。围裙要和合适的手套、护目镜（必要时加面屏）一起使用（第 022、023 课）。围裙材质同样要按化学品安全技术说明书选择。</a:t>
+            </a:r>
+          </a:p>
+        </p:txBody>
+      </p:sp>
+      <p:sp>
+        <p:nvSpPr>
+          <p:cNvPr id="4" name="Slide Number Placeholder 3"/>
+          <p:cNvSpPr>
+            <a:spLocks noGrp="1"/>
+          </p:cNvSpPr>
+          <p:nvPr>
+            <p:ph type="sldNum" idx="5" sz="quarter"/>
+          </p:nvPr>
+        </p:nvSpPr>
+        <p:spPr/>
+      </p:sp>
+    </p:spTree>
+  </p:cSld>
+  <p:clrMapOvr>
+    <a:masterClrMapping/>
+  </p:clrMapOvr>
+</p:notes>
+</file>
+
+<file path=ppt/notesSlides/notesSlide77.xml><?xml version="1.0" encoding="utf-8"?>
+<p:notes xmlns:a="http://schemas.openxmlformats.org/drawingml/2006/main" xmlns:p="http://schemas.openxmlformats.org/presentationml/2006/main" xmlns:r="http://schemas.openxmlformats.org/officeDocument/2006/relationships">
+  <p:cSld>
+    <p:spTree>
+      <p:nvGrpSpPr>
+        <p:cNvPr id="1" name=""/>
+        <p:cNvGrpSpPr/>
+        <p:nvPr/>
+      </p:nvGrpSpPr>
+      <p:grpSpPr>
+        <a:xfrm>
+          <a:off x="0" y="0"/>
+          <a:ext cx="0" cy="0"/>
+          <a:chOff x="0" y="0"/>
+          <a:chExt cx="0" cy="0"/>
+        </a:xfrm>
+      </p:grpSpPr>
+      <p:sp>
+        <p:nvSpPr>
+          <p:cNvPr id="2" name="Slide Image Placeholder 1"/>
+          <p:cNvSpPr>
+            <a:spLocks noGrp="1"/>
+          </p:cNvSpPr>
+          <p:nvPr>
+            <p:ph type="sldImg" idx="2"/>
+          </p:nvPr>
+        </p:nvSpPr>
+        <p:spPr/>
+      </p:sp>
+      <p:sp>
+        <p:nvSpPr>
+          <p:cNvPr id="3" name="Notes Placeholder 2"/>
+          <p:cNvSpPr>
+            <a:spLocks noGrp="1"/>
+          </p:cNvSpPr>
+          <p:nvPr>
+            <p:ph type="body" idx="3" sz="quarter"/>
+          </p:nvPr>
+        </p:nvSpPr>
+        <p:spPr/>
+        <p:txBody>
+          <a:bodyPr/>
+          <a:lstStyle/>
+          <a:p>
+            <a:r>
+              <a:t>实验服之外，有些工作需要专门的防护服：用于阻挡化学品飞溅的防护服要能防水（防液体渗透），才能真正挡住；高温作业、化学品作业、近水作业各有对应的防护服，按风险评估和 GB 39800.1-2020（以现行文本为准）的配备要求选择。在车多、光线暗的道路旁采样或作业，要穿反光衣（野外采样见第 154 课）。</a:t>
+            </a:r>
+          </a:p>
+          <a:p>
+            <a:r>
+              <a:t>防护服沾污后，立即脱下放到指定地点，不能继续穿；换上干净的再回去工作。生物实验用的防护服和隔离衣见第 6 章（第 074、075 课）。</a:t>
+            </a:r>
+          </a:p>
+        </p:txBody>
+      </p:sp>
+      <p:sp>
+        <p:nvSpPr>
+          <p:cNvPr id="4" name="Slide Number Placeholder 3"/>
+          <p:cNvSpPr>
+            <a:spLocks noGrp="1"/>
+          </p:cNvSpPr>
+          <p:nvPr>
+            <p:ph type="sldNum" idx="5" sz="quarter"/>
+          </p:nvPr>
+        </p:nvSpPr>
+        <p:spPr/>
+      </p:sp>
+    </p:spTree>
+  </p:cSld>
+  <p:clrMapOvr>
+    <a:masterClrMapping/>
+  </p:clrMapOvr>
+</p:notes>
+</file>
+
+<file path=ppt/notesSlides/notesSlide78.xml><?xml version="1.0" encoding="utf-8"?>
+<p:notes xmlns:a="http://schemas.openxmlformats.org/drawingml/2006/main" xmlns:p="http://schemas.openxmlformats.org/presentationml/2006/main" xmlns:r="http://schemas.openxmlformats.org/officeDocument/2006/relationships">
+  <p:cSld>
+    <p:spTree>
+      <p:nvGrpSpPr>
+        <p:cNvPr id="1" name=""/>
+        <p:cNvGrpSpPr/>
+        <p:nvPr/>
+      </p:nvGrpSpPr>
+      <p:grpSpPr>
+        <a:xfrm>
+          <a:off x="0" y="0"/>
+          <a:ext cx="0" cy="0"/>
+          <a:chOff x="0" y="0"/>
+          <a:chExt cx="0" cy="0"/>
+        </a:xfrm>
+      </p:grpSpPr>
+      <p:sp>
+        <p:nvSpPr>
+          <p:cNvPr id="2" name="Slide Image Placeholder 1"/>
+          <p:cNvSpPr>
+            <a:spLocks noGrp="1"/>
+          </p:cNvSpPr>
+          <p:nvPr>
+            <p:ph type="sldImg" idx="2"/>
+          </p:nvPr>
+        </p:nvSpPr>
+        <p:spPr/>
+      </p:sp>
+      <p:sp>
+        <p:nvSpPr>
+          <p:cNvPr id="3" name="Notes Placeholder 2"/>
+          <p:cNvSpPr>
+            <a:spLocks noGrp="1"/>
+          </p:cNvSpPr>
+          <p:nvPr>
+            <p:ph type="body" idx="3" sz="quarter"/>
+          </p:nvPr>
+        </p:nvSpPr>
+        <p:spPr/>
+        <p:txBody>
+          <a:bodyPr/>
+          <a:lstStyle/>
+          <a:p>
+            <a:r>
+              <a:t>实验服上可能沾有化学品和微生物，穿出实验室会把污染带到食堂、宿舍、办公室和会议室。离开实验区时脱下实验服，挂在实验室的专用区域，不和便服混放。</a:t>
+            </a:r>
+          </a:p>
+          <a:p>
+            <a:r>
+              <a:t>实验服不要带回家或宿舍洗，以免污染家人和洗衣设备。脱下时外面朝里卷起，装进专用袋，按本校规定由单位统一清洗；生物实验室沾了菌液等感染性物质的，先消毒，再统一清洗（按 GB 19489-2008（以现行文本为准）和本校生物安全管理规定）。破损、无法洗净的实验服及时更换。</a:t>
+            </a:r>
+          </a:p>
+        </p:txBody>
+      </p:sp>
+      <p:sp>
+        <p:nvSpPr>
+          <p:cNvPr id="4" name="Slide Number Placeholder 3"/>
+          <p:cNvSpPr>
+            <a:spLocks noGrp="1"/>
+          </p:cNvSpPr>
+          <p:nvPr>
+            <p:ph type="sldNum" idx="5" sz="quarter"/>
+          </p:nvPr>
+        </p:nvSpPr>
+        <p:spPr/>
+      </p:sp>
+    </p:spTree>
+  </p:cSld>
+  <p:clrMapOvr>
+    <a:masterClrMapping/>
+  </p:clrMapOvr>
+</p:notes>
+</file>
+
+<file path=ppt/notesSlides/notesSlide79.xml><?xml version="1.0" encoding="utf-8"?>
+<p:notes xmlns:a="http://schemas.openxmlformats.org/drawingml/2006/main" xmlns:p="http://schemas.openxmlformats.org/presentationml/2006/main" xmlns:r="http://schemas.openxmlformats.org/officeDocument/2006/relationships">
+  <p:cSld>
+    <p:spTree>
+      <p:nvGrpSpPr>
+        <p:cNvPr id="1" name=""/>
+        <p:cNvGrpSpPr/>
+        <p:nvPr/>
+      </p:nvGrpSpPr>
+      <p:grpSpPr>
+        <a:xfrm>
+          <a:off x="0" y="0"/>
+          <a:ext cx="0" cy="0"/>
+          <a:chOff x="0" y="0"/>
+          <a:chExt cx="0" cy="0"/>
+        </a:xfrm>
+      </p:grpSpPr>
+      <p:sp>
+        <p:nvSpPr>
+          <p:cNvPr id="2" name="Slide Image Placeholder 1"/>
+          <p:cNvSpPr>
+            <a:spLocks noGrp="1"/>
+          </p:cNvSpPr>
+          <p:nvPr>
+            <p:ph type="sldImg" idx="2"/>
+          </p:nvPr>
+        </p:nvSpPr>
+        <p:spPr/>
+      </p:sp>
+      <p:sp>
+        <p:nvSpPr>
+          <p:cNvPr id="3" name="Notes Placeholder 2"/>
+          <p:cNvSpPr>
+            <a:spLocks noGrp="1"/>
+          </p:cNvSpPr>
+          <p:nvPr>
+            <p:ph type="body" idx="3" sz="quarter"/>
+          </p:nvPr>
+        </p:nvSpPr>
+        <p:spPr/>
+        <p:txBody>
+          <a:bodyPr/>
+          <a:lstStyle/>
+          <a:p>
+            <a:r>
+              <a:t>大量化学品泼到实验服上时，面料会很快被浸透，化学品接触皮肤。要立即脱下被污染的实验服和衣物（不要从头上套脱，避免沾到脸和眼睛），到紧急喷淋下持续冲洗，冲洗时间按本校应急规定和化学品安全技术说明书执行。</a:t>
+            </a:r>
+          </a:p>
+          <a:p>
+            <a:r>
+              <a:t>冲洗后报告实验室负责人，带上化学品信息及时就医，必要时拨打 120。被污染的衣物装袋，按危险废物或本校规定处理（紧急喷淋的位置和使用见第 027 课，化学灼伤急救见第 160 课）。</a:t>
+            </a:r>
+          </a:p>
+        </p:txBody>
+      </p:sp>
+      <p:sp>
+        <p:nvSpPr>
+          <p:cNvPr id="4" name="Slide Number Placeholder 3"/>
+          <p:cNvSpPr>
+            <a:spLocks noGrp="1"/>
+          </p:cNvSpPr>
+          <p:nvPr>
+            <p:ph type="sldNum" idx="5" sz="quarter"/>
+          </p:nvPr>
+        </p:nvSpPr>
+        <p:spPr/>
+      </p:sp>
+    </p:spTree>
+  </p:cSld>
+  <p:clrMapOvr>
+    <a:masterClrMapping/>
+  </p:clrMapOvr>
+</p:notes>
+</file>
+
 <file path=ppt/notesSlides/notesSlide8.xml><?xml version="1.0" encoding="utf-8"?>
 <p:notes xmlns:a="http://schemas.openxmlformats.org/drawingml/2006/main" xmlns:p="http://schemas.openxmlformats.org/presentationml/2006/main" xmlns:r="http://schemas.openxmlformats.org/officeDocument/2006/relationships">
   <p:cSld>
@@ -5754,6 +6369,226 @@
           <a:p>
             <a:r>
               <a:t>这些规定适用于各类教学和科研实验室，只做“简单”实验时也不例外。要吃东西、喝水，先摘手套、洗手，离开实验区再吃。</a:t>
+            </a:r>
+          </a:p>
+        </p:txBody>
+      </p:sp>
+      <p:sp>
+        <p:nvSpPr>
+          <p:cNvPr id="4" name="Slide Number Placeholder 3"/>
+          <p:cNvSpPr>
+            <a:spLocks noGrp="1"/>
+          </p:cNvSpPr>
+          <p:nvPr>
+            <p:ph type="sldNum" idx="5" sz="quarter"/>
+          </p:nvPr>
+        </p:nvSpPr>
+        <p:spPr/>
+      </p:sp>
+    </p:spTree>
+  </p:cSld>
+  <p:clrMapOvr>
+    <a:masterClrMapping/>
+  </p:clrMapOvr>
+</p:notes>
+</file>
+
+<file path=ppt/notesSlides/notesSlide80.xml><?xml version="1.0" encoding="utf-8"?>
+<p:notes xmlns:a="http://schemas.openxmlformats.org/drawingml/2006/main" xmlns:p="http://schemas.openxmlformats.org/presentationml/2006/main" xmlns:r="http://schemas.openxmlformats.org/officeDocument/2006/relationships">
+  <p:cSld>
+    <p:spTree>
+      <p:nvGrpSpPr>
+        <p:cNvPr id="1" name=""/>
+        <p:cNvGrpSpPr/>
+        <p:nvPr/>
+      </p:nvGrpSpPr>
+      <p:grpSpPr>
+        <a:xfrm>
+          <a:off x="0" y="0"/>
+          <a:ext cx="0" cy="0"/>
+          <a:chOff x="0" y="0"/>
+          <a:chExt cx="0" cy="0"/>
+        </a:xfrm>
+      </p:grpSpPr>
+      <p:sp>
+        <p:nvSpPr>
+          <p:cNvPr id="2" name="Slide Image Placeholder 1"/>
+          <p:cNvSpPr>
+            <a:spLocks noGrp="1"/>
+          </p:cNvSpPr>
+          <p:nvPr>
+            <p:ph type="sldImg" idx="2"/>
+          </p:nvPr>
+        </p:nvSpPr>
+        <p:spPr/>
+      </p:sp>
+      <p:sp>
+        <p:nvSpPr>
+          <p:cNvPr id="3" name="Notes Placeholder 2"/>
+          <p:cNvSpPr>
+            <a:spLocks noGrp="1"/>
+          </p:cNvSpPr>
+          <p:nvPr>
+            <p:ph type="body" idx="3" sz="quarter"/>
+          </p:nvPr>
+        </p:nvSpPr>
+        <p:spPr/>
+        <p:txBody>
+          <a:bodyPr/>
+          <a:lstStyle/>
+          <a:p>
+            <a:r>
+              <a:t>第 1 题 答案：C。解析：普通棉质实验服着火会持续燃烧，化纤会熔化粘在皮肤上，阻燃服离火能自熄。</a:t>
+            </a:r>
+          </a:p>
+          <a:p>
+            <a:r>
+              <a:t>第 2 题 答案：B。解析：实验服可能沾有化学品和微生物，应由单位统一清洗，不带回家或宿舍。</a:t>
+            </a:r>
+          </a:p>
+        </p:txBody>
+      </p:sp>
+      <p:sp>
+        <p:nvSpPr>
+          <p:cNvPr id="4" name="Slide Number Placeholder 3"/>
+          <p:cNvSpPr>
+            <a:spLocks noGrp="1"/>
+          </p:cNvSpPr>
+          <p:nvPr>
+            <p:ph type="sldNum" idx="5" sz="quarter"/>
+          </p:nvPr>
+        </p:nvSpPr>
+        <p:spPr/>
+      </p:sp>
+    </p:spTree>
+  </p:cSld>
+  <p:clrMapOvr>
+    <a:masterClrMapping/>
+  </p:clrMapOvr>
+</p:notes>
+</file>
+
+<file path=ppt/notesSlides/notesSlide81.xml><?xml version="1.0" encoding="utf-8"?>
+<p:notes xmlns:a="http://schemas.openxmlformats.org/drawingml/2006/main" xmlns:p="http://schemas.openxmlformats.org/presentationml/2006/main" xmlns:r="http://schemas.openxmlformats.org/officeDocument/2006/relationships">
+  <p:cSld>
+    <p:spTree>
+      <p:nvGrpSpPr>
+        <p:cNvPr id="1" name=""/>
+        <p:cNvGrpSpPr/>
+        <p:nvPr/>
+      </p:nvGrpSpPr>
+      <p:grpSpPr>
+        <a:xfrm>
+          <a:off x="0" y="0"/>
+          <a:ext cx="0" cy="0"/>
+          <a:chOff x="0" y="0"/>
+          <a:chExt cx="0" cy="0"/>
+        </a:xfrm>
+      </p:grpSpPr>
+      <p:sp>
+        <p:nvSpPr>
+          <p:cNvPr id="2" name="Slide Image Placeholder 1"/>
+          <p:cNvSpPr>
+            <a:spLocks noGrp="1"/>
+          </p:cNvSpPr>
+          <p:nvPr>
+            <p:ph type="sldImg" idx="2"/>
+          </p:nvPr>
+        </p:nvSpPr>
+        <p:spPr/>
+      </p:sp>
+      <p:sp>
+        <p:nvSpPr>
+          <p:cNvPr id="3" name="Notes Placeholder 2"/>
+          <p:cNvSpPr>
+            <a:spLocks noGrp="1"/>
+          </p:cNvSpPr>
+          <p:nvPr>
+            <p:ph type="body" idx="3" sz="quarter"/>
+          </p:nvPr>
+        </p:nvSpPr>
+        <p:spPr/>
+        <p:txBody>
+          <a:bodyPr/>
+          <a:lstStyle/>
+          <a:p>
+            <a:r>
+              <a:t>第 3 题 答案：C。解析：敞着怀挡不住溅洒，袖子卷起手臂外露，实验服不穿出实验室。</a:t>
+            </a:r>
+          </a:p>
+          <a:p>
+            <a:r>
+              <a:t>第 4 题 答案：A。解析：耐化学品围裙多一层防护，溅上后能迅速解下。</a:t>
+            </a:r>
+          </a:p>
+        </p:txBody>
+      </p:sp>
+      <p:sp>
+        <p:nvSpPr>
+          <p:cNvPr id="4" name="Slide Number Placeholder 3"/>
+          <p:cNvSpPr>
+            <a:spLocks noGrp="1"/>
+          </p:cNvSpPr>
+          <p:nvPr>
+            <p:ph type="sldNum" idx="5" sz="quarter"/>
+          </p:nvPr>
+        </p:nvSpPr>
+        <p:spPr/>
+      </p:sp>
+    </p:spTree>
+  </p:cSld>
+  <p:clrMapOvr>
+    <a:masterClrMapping/>
+  </p:clrMapOvr>
+</p:notes>
+</file>
+
+<file path=ppt/notesSlides/notesSlide82.xml><?xml version="1.0" encoding="utf-8"?>
+<p:notes xmlns:a="http://schemas.openxmlformats.org/drawingml/2006/main" xmlns:p="http://schemas.openxmlformats.org/presentationml/2006/main" xmlns:r="http://schemas.openxmlformats.org/officeDocument/2006/relationships">
+  <p:cSld>
+    <p:spTree>
+      <p:nvGrpSpPr>
+        <p:cNvPr id="1" name=""/>
+        <p:cNvGrpSpPr/>
+        <p:nvPr/>
+      </p:nvGrpSpPr>
+      <p:grpSpPr>
+        <a:xfrm>
+          <a:off x="0" y="0"/>
+          <a:ext cx="0" cy="0"/>
+          <a:chOff x="0" y="0"/>
+          <a:chExt cx="0" cy="0"/>
+        </a:xfrm>
+      </p:grpSpPr>
+      <p:sp>
+        <p:nvSpPr>
+          <p:cNvPr id="2" name="Slide Image Placeholder 1"/>
+          <p:cNvSpPr>
+            <a:spLocks noGrp="1"/>
+          </p:cNvSpPr>
+          <p:nvPr>
+            <p:ph type="sldImg" idx="2"/>
+          </p:nvPr>
+        </p:nvSpPr>
+        <p:spPr/>
+      </p:sp>
+      <p:sp>
+        <p:nvSpPr>
+          <p:cNvPr id="3" name="Notes Placeholder 2"/>
+          <p:cNvSpPr>
+            <a:spLocks noGrp="1"/>
+          </p:cNvSpPr>
+          <p:nvPr>
+            <p:ph type="body" idx="3" sz="quarter"/>
+          </p:nvPr>
+        </p:nvSpPr>
+        <p:spPr/>
+        <p:txBody>
+          <a:bodyPr/>
+          <a:lstStyle/>
+          <a:p>
+            <a:r>
+              <a:t>第 5 题 答案：A。解析：面料会被浸透，要尽快脱下、冲洗，并报告实验室负责人、及时就医。</a:t>
             </a:r>
           </a:p>
         </p:txBody>
@@ -9680,6 +10515,1094 @@
 </p:sld>
 </file>
 
+<file path=ppt/slides/slide100.xml><?xml version="1.0" encoding="utf-8"?>
+<p:sld xmlns:a="http://schemas.openxmlformats.org/drawingml/2006/main" xmlns:p="http://schemas.openxmlformats.org/presentationml/2006/main" xmlns:r="http://schemas.openxmlformats.org/officeDocument/2006/relationships">
+  <p:cSld>
+    <p:bg>
+      <p:bgPr>
+        <a:solidFill>
+          <a:srgbClr val="FFFFFF"/>
+        </a:solidFill>
+        <a:effectLst/>
+      </p:bgPr>
+    </p:bg>
+    <p:spTree>
+      <p:nvGrpSpPr>
+        <p:cNvPr id="1" name=""/>
+        <p:cNvGrpSpPr/>
+        <p:nvPr/>
+      </p:nvGrpSpPr>
+      <p:grpSpPr/>
+      <p:sp>
+        <p:nvSpPr>
+          <p:cNvPr id="2" name="TextBox 1"/>
+          <p:cNvSpPr txBox="1"/>
+          <p:nvPr/>
+        </p:nvSpPr>
+        <p:spPr>
+          <a:xfrm>
+            <a:off x="548640" y="320040"/>
+            <a:ext cx="8229600" cy="320040"/>
+          </a:xfrm>
+          <a:prstGeom prst="rect">
+            <a:avLst/>
+          </a:prstGeom>
+          <a:noFill/>
+        </p:spPr>
+        <p:txBody>
+          <a:bodyPr wrap="square" anchor="t" lIns="0" rIns="0" tIns="0" bIns="0">
+            <a:spAutoFit/>
+          </a:bodyPr>
+          <a:lstStyle/>
+          <a:p>
+            <a:pPr algn="l"/>
+            <a:r>
+              <a:rPr sz="1200" b="1">
+                <a:solidFill>
+                  <a:srgbClr val="1D7A8C"/>
+                </a:solidFill>
+                <a:latin typeface="Microsoft YaHei"/>
+              </a:rPr>
+              <a:t>024 · 实验服与防护服</a:t>
+            </a:r>
+          </a:p>
+        </p:txBody>
+      </p:sp>
+      <p:sp>
+        <p:nvSpPr>
+          <p:cNvPr id="3" name="TextBox 2"/>
+          <p:cNvSpPr txBox="1"/>
+          <p:nvPr/>
+        </p:nvSpPr>
+        <p:spPr>
+          <a:xfrm>
+            <a:off x="548640" y="640080"/>
+            <a:ext cx="11094415" cy="731520"/>
+          </a:xfrm>
+          <a:prstGeom prst="rect">
+            <a:avLst/>
+          </a:prstGeom>
+          <a:noFill/>
+        </p:spPr>
+        <p:txBody>
+          <a:bodyPr wrap="square" anchor="t" lIns="0" rIns="0" tIns="0" bIns="0">
+            <a:spAutoFit/>
+          </a:bodyPr>
+          <a:lstStyle/>
+          <a:p>
+            <a:pPr algn="l"/>
+            <a:r>
+              <a:rPr sz="3000" b="1">
+                <a:solidFill>
+                  <a:srgbClr val="0B3C5D"/>
+                </a:solidFill>
+                <a:latin typeface="Microsoft YaHei"/>
+              </a:rPr>
+              <a:t>课后练习</a:t>
+            </a:r>
+          </a:p>
+        </p:txBody>
+      </p:sp>
+      <p:sp>
+        <p:nvSpPr>
+          <p:cNvPr id="4" name="TextBox 3"/>
+          <p:cNvSpPr txBox="1"/>
+          <p:nvPr/>
+        </p:nvSpPr>
+        <p:spPr>
+          <a:xfrm>
+            <a:off x="548640" y="6446520"/>
+            <a:ext cx="7315200" cy="274320"/>
+          </a:xfrm>
+          <a:prstGeom prst="rect">
+            <a:avLst/>
+          </a:prstGeom>
+          <a:noFill/>
+        </p:spPr>
+        <p:txBody>
+          <a:bodyPr wrap="square" anchor="t" lIns="0" rIns="0" tIns="0" bIns="0">
+            <a:spAutoFit/>
+          </a:bodyPr>
+          <a:lstStyle/>
+          <a:p>
+            <a:pPr algn="l"/>
+            <a:r>
+              <a:rPr sz="1000" b="0">
+                <a:solidFill>
+                  <a:srgbClr val="5F6B75"/>
+                </a:solidFill>
+                <a:latin typeface="Microsoft YaHei"/>
+              </a:rPr>
+              <a:t>《高校实验室安全》 024 实验服与防护服</a:t>
+            </a:r>
+          </a:p>
+        </p:txBody>
+      </p:sp>
+      <p:sp>
+        <p:nvSpPr>
+          <p:cNvPr id="5" name="Rounded Rectangle 4"/>
+          <p:cNvSpPr/>
+          <p:nvPr/>
+        </p:nvSpPr>
+        <p:spPr>
+          <a:xfrm>
+            <a:off x="548640" y="1645920"/>
+            <a:ext cx="5364327" cy="4389120"/>
+          </a:xfrm>
+          <a:prstGeom prst="roundRect">
+            <a:avLst>
+              <a:gd name="adj" fmla="val 8000"/>
+            </a:avLst>
+          </a:prstGeom>
+          <a:solidFill>
+            <a:srgbClr val="EEF4F7"/>
+          </a:solidFill>
+          <a:ln>
+            <a:noFill/>
+          </a:ln>
+          <a:effectLst/>
+        </p:spPr>
+        <p:style>
+          <a:lnRef idx="1">
+            <a:schemeClr val="accent1"/>
+          </a:lnRef>
+          <a:fillRef idx="3">
+            <a:schemeClr val="accent1"/>
+          </a:fillRef>
+          <a:effectRef idx="2">
+            <a:schemeClr val="accent1"/>
+          </a:effectRef>
+          <a:fontRef idx="minor">
+            <a:schemeClr val="lt1"/>
+          </a:fontRef>
+        </p:style>
+        <p:txBody>
+          <a:bodyPr rtlCol="0" anchor="ctr"/>
+          <a:lstStyle/>
+          <a:p>
+            <a:pPr algn="ctr"/>
+          </a:p>
+        </p:txBody>
+      </p:sp>
+      <p:sp>
+        <p:nvSpPr>
+          <p:cNvPr id="6" name="Oval 5"/>
+          <p:cNvSpPr/>
+          <p:nvPr/>
+        </p:nvSpPr>
+        <p:spPr>
+          <a:xfrm>
+            <a:off x="868680" y="1874519"/>
+            <a:ext cx="548640" cy="548640"/>
+          </a:xfrm>
+          <a:prstGeom prst="ellipse">
+            <a:avLst/>
+          </a:prstGeom>
+          <a:solidFill>
+            <a:srgbClr val="0B3C5D"/>
+          </a:solidFill>
+          <a:ln>
+            <a:noFill/>
+          </a:ln>
+          <a:effectLst/>
+        </p:spPr>
+        <p:style>
+          <a:lnRef idx="1">
+            <a:schemeClr val="accent1"/>
+          </a:lnRef>
+          <a:fillRef idx="3">
+            <a:schemeClr val="accent1"/>
+          </a:fillRef>
+          <a:effectRef idx="2">
+            <a:schemeClr val="accent1"/>
+          </a:effectRef>
+          <a:fontRef idx="minor">
+            <a:schemeClr val="lt1"/>
+          </a:fontRef>
+        </p:style>
+        <p:txBody>
+          <a:bodyPr rtlCol="0" anchor="ctr" lIns="0" rIns="0" tIns="0" bIns="0"/>
+          <a:lstStyle/>
+          <a:p>
+            <a:pPr algn="ctr"/>
+            <a:r>
+              <a:rPr sz="1600" b="1">
+                <a:solidFill>
+                  <a:srgbClr val="FFFFFF"/>
+                </a:solidFill>
+                <a:latin typeface="Microsoft YaHei"/>
+              </a:rPr>
+              <a:t>3</a:t>
+            </a:r>
+          </a:p>
+        </p:txBody>
+      </p:sp>
+      <p:sp>
+        <p:nvSpPr>
+          <p:cNvPr id="7" name="TextBox 6"/>
+          <p:cNvSpPr txBox="1"/>
+          <p:nvPr/>
+        </p:nvSpPr>
+        <p:spPr>
+          <a:xfrm>
+            <a:off x="1600200" y="1920240"/>
+            <a:ext cx="3992727" cy="1280160"/>
+          </a:xfrm>
+          <a:prstGeom prst="rect">
+            <a:avLst/>
+          </a:prstGeom>
+          <a:noFill/>
+        </p:spPr>
+        <p:txBody>
+          <a:bodyPr wrap="square" anchor="t" lIns="0" rIns="0" tIns="0" bIns="0">
+            <a:spAutoFit/>
+          </a:bodyPr>
+          <a:lstStyle/>
+          <a:p>
+            <a:pPr algn="l"/>
+            <a:r>
+              <a:rPr sz="1700" b="1">
+                <a:solidFill>
+                  <a:srgbClr val="222B33"/>
+                </a:solidFill>
+                <a:latin typeface="Microsoft YaHei"/>
+              </a:rPr>
+              <a:t>下列穿实验服的做法正确的是：</a:t>
+            </a:r>
+          </a:p>
+        </p:txBody>
+      </p:sp>
+      <p:sp>
+        <p:nvSpPr>
+          <p:cNvPr id="8" name="TextBox 7"/>
+          <p:cNvSpPr txBox="1"/>
+          <p:nvPr/>
+        </p:nvSpPr>
+        <p:spPr>
+          <a:xfrm>
+            <a:off x="1600200" y="3291840"/>
+            <a:ext cx="3992727" cy="2560320"/>
+          </a:xfrm>
+          <a:prstGeom prst="rect">
+            <a:avLst/>
+          </a:prstGeom>
+          <a:noFill/>
+        </p:spPr>
+        <p:txBody>
+          <a:bodyPr wrap="square" anchor="t" lIns="0" rIns="0" tIns="0" bIns="0">
+            <a:spAutoFit/>
+          </a:bodyPr>
+          <a:lstStyle/>
+          <a:p>
+            <a:pPr algn="l"/>
+            <a:r>
+              <a:rPr sz="1500" b="0">
+                <a:solidFill>
+                  <a:srgbClr val="222B33"/>
+                </a:solidFill>
+                <a:latin typeface="Microsoft YaHei"/>
+              </a:rPr>
+              <a:t>A. 敞着怀穿</a:t>
+            </a:r>
+          </a:p>
+          <a:p>
+            <a:pPr algn="l"/>
+            <a:r>
+              <a:rPr sz="1500" b="0">
+                <a:solidFill>
+                  <a:srgbClr val="222B33"/>
+                </a:solidFill>
+                <a:latin typeface="Microsoft YaHei"/>
+              </a:rPr>
+              <a:t>B. 袖子卷到手肘</a:t>
+            </a:r>
+          </a:p>
+          <a:p>
+            <a:pPr algn="l"/>
+            <a:r>
+              <a:rPr sz="1500" b="0">
+                <a:solidFill>
+                  <a:srgbClr val="222B33"/>
+                </a:solidFill>
+                <a:latin typeface="Microsoft YaHei"/>
+              </a:rPr>
+              <a:t>C. 扣子全部扣好，袖口塞进手套</a:t>
+            </a:r>
+          </a:p>
+          <a:p>
+            <a:pPr algn="l"/>
+            <a:r>
+              <a:rPr sz="1500" b="0">
+                <a:solidFill>
+                  <a:srgbClr val="222B33"/>
+                </a:solidFill>
+                <a:latin typeface="Microsoft YaHei"/>
+              </a:rPr>
+              <a:t>D. 穿着去食堂</a:t>
+            </a:r>
+          </a:p>
+        </p:txBody>
+      </p:sp>
+      <p:sp>
+        <p:nvSpPr>
+          <p:cNvPr id="9" name="Rounded Rectangle 8"/>
+          <p:cNvSpPr/>
+          <p:nvPr/>
+        </p:nvSpPr>
+        <p:spPr>
+          <a:xfrm>
+            <a:off x="6278727" y="1645920"/>
+            <a:ext cx="5364327" cy="4389120"/>
+          </a:xfrm>
+          <a:prstGeom prst="roundRect">
+            <a:avLst>
+              <a:gd name="adj" fmla="val 8000"/>
+            </a:avLst>
+          </a:prstGeom>
+          <a:solidFill>
+            <a:srgbClr val="EEF4F7"/>
+          </a:solidFill>
+          <a:ln>
+            <a:noFill/>
+          </a:ln>
+          <a:effectLst/>
+        </p:spPr>
+        <p:style>
+          <a:lnRef idx="1">
+            <a:schemeClr val="accent1"/>
+          </a:lnRef>
+          <a:fillRef idx="3">
+            <a:schemeClr val="accent1"/>
+          </a:fillRef>
+          <a:effectRef idx="2">
+            <a:schemeClr val="accent1"/>
+          </a:effectRef>
+          <a:fontRef idx="minor">
+            <a:schemeClr val="lt1"/>
+          </a:fontRef>
+        </p:style>
+        <p:txBody>
+          <a:bodyPr rtlCol="0" anchor="ctr"/>
+          <a:lstStyle/>
+          <a:p>
+            <a:pPr algn="ctr"/>
+          </a:p>
+        </p:txBody>
+      </p:sp>
+      <p:sp>
+        <p:nvSpPr>
+          <p:cNvPr id="10" name="Oval 9"/>
+          <p:cNvSpPr/>
+          <p:nvPr/>
+        </p:nvSpPr>
+        <p:spPr>
+          <a:xfrm>
+            <a:off x="6598767" y="1874519"/>
+            <a:ext cx="548640" cy="548640"/>
+          </a:xfrm>
+          <a:prstGeom prst="ellipse">
+            <a:avLst/>
+          </a:prstGeom>
+          <a:solidFill>
+            <a:srgbClr val="0B3C5D"/>
+          </a:solidFill>
+          <a:ln>
+            <a:noFill/>
+          </a:ln>
+          <a:effectLst/>
+        </p:spPr>
+        <p:style>
+          <a:lnRef idx="1">
+            <a:schemeClr val="accent1"/>
+          </a:lnRef>
+          <a:fillRef idx="3">
+            <a:schemeClr val="accent1"/>
+          </a:fillRef>
+          <a:effectRef idx="2">
+            <a:schemeClr val="accent1"/>
+          </a:effectRef>
+          <a:fontRef idx="minor">
+            <a:schemeClr val="lt1"/>
+          </a:fontRef>
+        </p:style>
+        <p:txBody>
+          <a:bodyPr rtlCol="0" anchor="ctr" lIns="0" rIns="0" tIns="0" bIns="0"/>
+          <a:lstStyle/>
+          <a:p>
+            <a:pPr algn="ctr"/>
+            <a:r>
+              <a:rPr sz="1600" b="1">
+                <a:solidFill>
+                  <a:srgbClr val="FFFFFF"/>
+                </a:solidFill>
+                <a:latin typeface="Microsoft YaHei"/>
+              </a:rPr>
+              <a:t>4</a:t>
+            </a:r>
+          </a:p>
+        </p:txBody>
+      </p:sp>
+      <p:sp>
+        <p:nvSpPr>
+          <p:cNvPr id="11" name="TextBox 10"/>
+          <p:cNvSpPr txBox="1"/>
+          <p:nvPr/>
+        </p:nvSpPr>
+        <p:spPr>
+          <a:xfrm>
+            <a:off x="7330287" y="1920240"/>
+            <a:ext cx="3992727" cy="1280160"/>
+          </a:xfrm>
+          <a:prstGeom prst="rect">
+            <a:avLst/>
+          </a:prstGeom>
+          <a:noFill/>
+        </p:spPr>
+        <p:txBody>
+          <a:bodyPr wrap="square" anchor="t" lIns="0" rIns="0" tIns="0" bIns="0">
+            <a:spAutoFit/>
+          </a:bodyPr>
+          <a:lstStyle/>
+          <a:p>
+            <a:pPr algn="l"/>
+            <a:r>
+              <a:rPr sz="1700" b="1">
+                <a:solidFill>
+                  <a:srgbClr val="222B33"/>
+                </a:solidFill>
+                <a:latin typeface="Microsoft YaHei"/>
+              </a:rPr>
+              <a:t>处理浓酸且有较大喷溅风险时，除实验服、手套和护目镜外，还应加穿：</a:t>
+            </a:r>
+          </a:p>
+        </p:txBody>
+      </p:sp>
+      <p:sp>
+        <p:nvSpPr>
+          <p:cNvPr id="12" name="TextBox 11"/>
+          <p:cNvSpPr txBox="1"/>
+          <p:nvPr/>
+        </p:nvSpPr>
+        <p:spPr>
+          <a:xfrm>
+            <a:off x="7330287" y="3291840"/>
+            <a:ext cx="3992727" cy="2560320"/>
+          </a:xfrm>
+          <a:prstGeom prst="rect">
+            <a:avLst/>
+          </a:prstGeom>
+          <a:noFill/>
+        </p:spPr>
+        <p:txBody>
+          <a:bodyPr wrap="square" anchor="t" lIns="0" rIns="0" tIns="0" bIns="0">
+            <a:spAutoFit/>
+          </a:bodyPr>
+          <a:lstStyle/>
+          <a:p>
+            <a:pPr algn="l"/>
+            <a:r>
+              <a:rPr sz="1500" b="0">
+                <a:solidFill>
+                  <a:srgbClr val="222B33"/>
+                </a:solidFill>
+                <a:latin typeface="Microsoft YaHei"/>
+              </a:rPr>
+              <a:t>A. 耐化学品围裙</a:t>
+            </a:r>
+          </a:p>
+          <a:p>
+            <a:pPr algn="l"/>
+            <a:r>
+              <a:rPr sz="1500" b="0">
+                <a:solidFill>
+                  <a:srgbClr val="222B33"/>
+                </a:solidFill>
+                <a:latin typeface="Microsoft YaHei"/>
+              </a:rPr>
+              <a:t>B. 反光衣</a:t>
+            </a:r>
+          </a:p>
+          <a:p>
+            <a:pPr algn="l"/>
+            <a:r>
+              <a:rPr sz="1500" b="0">
+                <a:solidFill>
+                  <a:srgbClr val="222B33"/>
+                </a:solidFill>
+                <a:latin typeface="Microsoft YaHei"/>
+              </a:rPr>
+              <a:t>C. 化纤外套</a:t>
+            </a:r>
+          </a:p>
+          <a:p>
+            <a:pPr algn="l"/>
+            <a:r>
+              <a:rPr sz="1500" b="0">
+                <a:solidFill>
+                  <a:srgbClr val="222B33"/>
+                </a:solidFill>
+                <a:latin typeface="Microsoft YaHei"/>
+              </a:rPr>
+              <a:t>D. 棉布围巾</a:t>
+            </a:r>
+          </a:p>
+        </p:txBody>
+      </p:sp>
+    </p:spTree>
+  </p:cSld>
+  <p:clrMapOvr>
+    <a:masterClrMapping/>
+  </p:clrMapOvr>
+</p:sld>
+</file>
+
+<file path=ppt/slides/slide101.xml><?xml version="1.0" encoding="utf-8"?>
+<p:sld xmlns:a="http://schemas.openxmlformats.org/drawingml/2006/main" xmlns:p="http://schemas.openxmlformats.org/presentationml/2006/main" xmlns:r="http://schemas.openxmlformats.org/officeDocument/2006/relationships">
+  <p:cSld>
+    <p:bg>
+      <p:bgPr>
+        <a:solidFill>
+          <a:srgbClr val="FFFFFF"/>
+        </a:solidFill>
+        <a:effectLst/>
+      </p:bgPr>
+    </p:bg>
+    <p:spTree>
+      <p:nvGrpSpPr>
+        <p:cNvPr id="1" name=""/>
+        <p:cNvGrpSpPr/>
+        <p:nvPr/>
+      </p:nvGrpSpPr>
+      <p:grpSpPr/>
+      <p:sp>
+        <p:nvSpPr>
+          <p:cNvPr id="2" name="TextBox 1"/>
+          <p:cNvSpPr txBox="1"/>
+          <p:nvPr/>
+        </p:nvSpPr>
+        <p:spPr>
+          <a:xfrm>
+            <a:off x="548640" y="320040"/>
+            <a:ext cx="8229600" cy="320040"/>
+          </a:xfrm>
+          <a:prstGeom prst="rect">
+            <a:avLst/>
+          </a:prstGeom>
+          <a:noFill/>
+        </p:spPr>
+        <p:txBody>
+          <a:bodyPr wrap="square" anchor="t" lIns="0" rIns="0" tIns="0" bIns="0">
+            <a:spAutoFit/>
+          </a:bodyPr>
+          <a:lstStyle/>
+          <a:p>
+            <a:pPr algn="l"/>
+            <a:r>
+              <a:rPr sz="1200" b="1">
+                <a:solidFill>
+                  <a:srgbClr val="1D7A8C"/>
+                </a:solidFill>
+                <a:latin typeface="Microsoft YaHei"/>
+              </a:rPr>
+              <a:t>024 · 实验服与防护服</a:t>
+            </a:r>
+          </a:p>
+        </p:txBody>
+      </p:sp>
+      <p:sp>
+        <p:nvSpPr>
+          <p:cNvPr id="3" name="TextBox 2"/>
+          <p:cNvSpPr txBox="1"/>
+          <p:nvPr/>
+        </p:nvSpPr>
+        <p:spPr>
+          <a:xfrm>
+            <a:off x="548640" y="640080"/>
+            <a:ext cx="11094415" cy="731520"/>
+          </a:xfrm>
+          <a:prstGeom prst="rect">
+            <a:avLst/>
+          </a:prstGeom>
+          <a:noFill/>
+        </p:spPr>
+        <p:txBody>
+          <a:bodyPr wrap="square" anchor="t" lIns="0" rIns="0" tIns="0" bIns="0">
+            <a:spAutoFit/>
+          </a:bodyPr>
+          <a:lstStyle/>
+          <a:p>
+            <a:pPr algn="l"/>
+            <a:r>
+              <a:rPr sz="3000" b="1">
+                <a:solidFill>
+                  <a:srgbClr val="0B3C5D"/>
+                </a:solidFill>
+                <a:latin typeface="Microsoft YaHei"/>
+              </a:rPr>
+              <a:t>课后练习</a:t>
+            </a:r>
+          </a:p>
+        </p:txBody>
+      </p:sp>
+      <p:sp>
+        <p:nvSpPr>
+          <p:cNvPr id="4" name="TextBox 3"/>
+          <p:cNvSpPr txBox="1"/>
+          <p:nvPr/>
+        </p:nvSpPr>
+        <p:spPr>
+          <a:xfrm>
+            <a:off x="548640" y="6446520"/>
+            <a:ext cx="7315200" cy="274320"/>
+          </a:xfrm>
+          <a:prstGeom prst="rect">
+            <a:avLst/>
+          </a:prstGeom>
+          <a:noFill/>
+        </p:spPr>
+        <p:txBody>
+          <a:bodyPr wrap="square" anchor="t" lIns="0" rIns="0" tIns="0" bIns="0">
+            <a:spAutoFit/>
+          </a:bodyPr>
+          <a:lstStyle/>
+          <a:p>
+            <a:pPr algn="l"/>
+            <a:r>
+              <a:rPr sz="1000" b="0">
+                <a:solidFill>
+                  <a:srgbClr val="5F6B75"/>
+                </a:solidFill>
+                <a:latin typeface="Microsoft YaHei"/>
+              </a:rPr>
+              <a:t>《高校实验室安全》 024 实验服与防护服</a:t>
+            </a:r>
+          </a:p>
+        </p:txBody>
+      </p:sp>
+      <p:sp>
+        <p:nvSpPr>
+          <p:cNvPr id="5" name="Rounded Rectangle 4"/>
+          <p:cNvSpPr/>
+          <p:nvPr/>
+        </p:nvSpPr>
+        <p:spPr>
+          <a:xfrm>
+            <a:off x="548640" y="1645920"/>
+            <a:ext cx="5364327" cy="4389120"/>
+          </a:xfrm>
+          <a:prstGeom prst="roundRect">
+            <a:avLst>
+              <a:gd name="adj" fmla="val 8000"/>
+            </a:avLst>
+          </a:prstGeom>
+          <a:solidFill>
+            <a:srgbClr val="EEF4F7"/>
+          </a:solidFill>
+          <a:ln>
+            <a:noFill/>
+          </a:ln>
+          <a:effectLst/>
+        </p:spPr>
+        <p:style>
+          <a:lnRef idx="1">
+            <a:schemeClr val="accent1"/>
+          </a:lnRef>
+          <a:fillRef idx="3">
+            <a:schemeClr val="accent1"/>
+          </a:fillRef>
+          <a:effectRef idx="2">
+            <a:schemeClr val="accent1"/>
+          </a:effectRef>
+          <a:fontRef idx="minor">
+            <a:schemeClr val="lt1"/>
+          </a:fontRef>
+        </p:style>
+        <p:txBody>
+          <a:bodyPr rtlCol="0" anchor="ctr"/>
+          <a:lstStyle/>
+          <a:p>
+            <a:pPr algn="ctr"/>
+          </a:p>
+        </p:txBody>
+      </p:sp>
+      <p:sp>
+        <p:nvSpPr>
+          <p:cNvPr id="6" name="Oval 5"/>
+          <p:cNvSpPr/>
+          <p:nvPr/>
+        </p:nvSpPr>
+        <p:spPr>
+          <a:xfrm>
+            <a:off x="868680" y="1874519"/>
+            <a:ext cx="548640" cy="548640"/>
+          </a:xfrm>
+          <a:prstGeom prst="ellipse">
+            <a:avLst/>
+          </a:prstGeom>
+          <a:solidFill>
+            <a:srgbClr val="0B3C5D"/>
+          </a:solidFill>
+          <a:ln>
+            <a:noFill/>
+          </a:ln>
+          <a:effectLst/>
+        </p:spPr>
+        <p:style>
+          <a:lnRef idx="1">
+            <a:schemeClr val="accent1"/>
+          </a:lnRef>
+          <a:fillRef idx="3">
+            <a:schemeClr val="accent1"/>
+          </a:fillRef>
+          <a:effectRef idx="2">
+            <a:schemeClr val="accent1"/>
+          </a:effectRef>
+          <a:fontRef idx="minor">
+            <a:schemeClr val="lt1"/>
+          </a:fontRef>
+        </p:style>
+        <p:txBody>
+          <a:bodyPr rtlCol="0" anchor="ctr" lIns="0" rIns="0" tIns="0" bIns="0"/>
+          <a:lstStyle/>
+          <a:p>
+            <a:pPr algn="ctr"/>
+            <a:r>
+              <a:rPr sz="1600" b="1">
+                <a:solidFill>
+                  <a:srgbClr val="FFFFFF"/>
+                </a:solidFill>
+                <a:latin typeface="Microsoft YaHei"/>
+              </a:rPr>
+              <a:t>5</a:t>
+            </a:r>
+          </a:p>
+        </p:txBody>
+      </p:sp>
+      <p:sp>
+        <p:nvSpPr>
+          <p:cNvPr id="7" name="TextBox 6"/>
+          <p:cNvSpPr txBox="1"/>
+          <p:nvPr/>
+        </p:nvSpPr>
+        <p:spPr>
+          <a:xfrm>
+            <a:off x="1600200" y="1920240"/>
+            <a:ext cx="3992727" cy="1280160"/>
+          </a:xfrm>
+          <a:prstGeom prst="rect">
+            <a:avLst/>
+          </a:prstGeom>
+          <a:noFill/>
+        </p:spPr>
+        <p:txBody>
+          <a:bodyPr wrap="square" anchor="t" lIns="0" rIns="0" tIns="0" bIns="0">
+            <a:spAutoFit/>
+          </a:bodyPr>
+          <a:lstStyle/>
+          <a:p>
+            <a:pPr algn="l"/>
+            <a:r>
+              <a:rPr sz="1700" b="1">
+                <a:solidFill>
+                  <a:srgbClr val="222B33"/>
+                </a:solidFill>
+                <a:latin typeface="Microsoft YaHei"/>
+              </a:rPr>
+              <a:t>判断：大量化学品泼到实验服上，应立即脱下污染衣物，到紧急喷淋下冲洗并报告。</a:t>
+            </a:r>
+          </a:p>
+        </p:txBody>
+      </p:sp>
+      <p:sp>
+        <p:nvSpPr>
+          <p:cNvPr id="8" name="TextBox 7"/>
+          <p:cNvSpPr txBox="1"/>
+          <p:nvPr/>
+        </p:nvSpPr>
+        <p:spPr>
+          <a:xfrm>
+            <a:off x="1600200" y="3291840"/>
+            <a:ext cx="3992727" cy="2560320"/>
+          </a:xfrm>
+          <a:prstGeom prst="rect">
+            <a:avLst/>
+          </a:prstGeom>
+          <a:noFill/>
+        </p:spPr>
+        <p:txBody>
+          <a:bodyPr wrap="square" anchor="t" lIns="0" rIns="0" tIns="0" bIns="0">
+            <a:spAutoFit/>
+          </a:bodyPr>
+          <a:lstStyle/>
+          <a:p>
+            <a:pPr algn="l"/>
+            <a:r>
+              <a:rPr sz="1500" b="0">
+                <a:solidFill>
+                  <a:srgbClr val="222B33"/>
+                </a:solidFill>
+                <a:latin typeface="Microsoft YaHei"/>
+              </a:rPr>
+              <a:t>A. 正确</a:t>
+            </a:r>
+          </a:p>
+          <a:p>
+            <a:pPr algn="l"/>
+            <a:r>
+              <a:rPr sz="1500" b="0">
+                <a:solidFill>
+                  <a:srgbClr val="222B33"/>
+                </a:solidFill>
+                <a:latin typeface="Microsoft YaHei"/>
+              </a:rPr>
+              <a:t>B. 错误</a:t>
+            </a:r>
+          </a:p>
+        </p:txBody>
+      </p:sp>
+    </p:spTree>
+  </p:cSld>
+  <p:clrMapOvr>
+    <a:masterClrMapping/>
+  </p:clrMapOvr>
+</p:sld>
+</file>
+
+<file path=ppt/slides/slide102.xml><?xml version="1.0" encoding="utf-8"?>
+<p:sld xmlns:a="http://schemas.openxmlformats.org/drawingml/2006/main" xmlns:p="http://schemas.openxmlformats.org/presentationml/2006/main" xmlns:r="http://schemas.openxmlformats.org/officeDocument/2006/relationships">
+  <p:cSld>
+    <p:bg>
+      <p:bgPr>
+        <a:solidFill>
+          <a:srgbClr val="0B3C5D"/>
+        </a:solidFill>
+        <a:effectLst/>
+      </p:bgPr>
+    </p:bg>
+    <p:spTree>
+      <p:nvGrpSpPr>
+        <p:cNvPr id="1" name=""/>
+        <p:cNvGrpSpPr/>
+        <p:nvPr/>
+      </p:nvGrpSpPr>
+      <p:grpSpPr/>
+      <p:sp>
+        <p:nvSpPr>
+          <p:cNvPr id="2" name="TextBox 1"/>
+          <p:cNvSpPr txBox="1"/>
+          <p:nvPr/>
+        </p:nvSpPr>
+        <p:spPr>
+          <a:xfrm>
+            <a:off x="548640" y="548640"/>
+            <a:ext cx="11094415" cy="731520"/>
+          </a:xfrm>
+          <a:prstGeom prst="rect">
+            <a:avLst/>
+          </a:prstGeom>
+          <a:noFill/>
+        </p:spPr>
+        <p:txBody>
+          <a:bodyPr wrap="square" anchor="t" lIns="0" rIns="0" tIns="0" bIns="0">
+            <a:spAutoFit/>
+          </a:bodyPr>
+          <a:lstStyle/>
+          <a:p>
+            <a:pPr algn="l"/>
+            <a:r>
+              <a:rPr sz="3400" b="1">
+                <a:solidFill>
+                  <a:srgbClr val="FFFFFF"/>
+                </a:solidFill>
+                <a:latin typeface="Microsoft YaHei"/>
+              </a:rPr>
+              <a:t>本课小结</a:t>
+            </a:r>
+          </a:p>
+        </p:txBody>
+      </p:sp>
+      <p:sp>
+        <p:nvSpPr>
+          <p:cNvPr id="3" name="TextBox 2"/>
+          <p:cNvSpPr txBox="1"/>
+          <p:nvPr/>
+        </p:nvSpPr>
+        <p:spPr>
+          <a:xfrm>
+            <a:off x="548640" y="1645920"/>
+            <a:ext cx="5364327" cy="4572000"/>
+          </a:xfrm>
+          <a:prstGeom prst="rect">
+            <a:avLst/>
+          </a:prstGeom>
+          <a:noFill/>
+        </p:spPr>
+        <p:txBody>
+          <a:bodyPr wrap="square" lIns="0" rIns="0" tIns="0" bIns="0">
+            <a:spAutoFit/>
+          </a:bodyPr>
+          <a:lstStyle/>
+          <a:p>
+            <a:pPr>
+              <a:spcAft>
+                <a:spcPts val="800"/>
+              </a:spcAft>
+            </a:pPr>
+            <a:r>
+              <a:rPr sz="1800">
+                <a:solidFill>
+                  <a:srgbClr val="FFFFFF"/>
+                </a:solidFill>
+                <a:latin typeface="Microsoft YaHei"/>
+              </a:rPr>
+              <a:t>▪ K1  实验服是防护用品，进门就穿</a:t>
+            </a:r>
+          </a:p>
+          <a:p>
+            <a:pPr>
+              <a:spcAft>
+                <a:spcPts val="800"/>
+              </a:spcAft>
+            </a:pPr>
+            <a:r>
+              <a:rPr sz="1800">
+                <a:solidFill>
+                  <a:srgbClr val="FFFFFF"/>
+                </a:solidFill>
+                <a:latin typeface="Microsoft YaHei"/>
+              </a:rPr>
+              <a:t>▪ K2  实验服选棉质或阻燃材质</a:t>
+            </a:r>
+          </a:p>
+          <a:p>
+            <a:pPr>
+              <a:spcAft>
+                <a:spcPts val="800"/>
+              </a:spcAft>
+            </a:pPr>
+            <a:r>
+              <a:rPr sz="1800">
+                <a:solidFill>
+                  <a:srgbClr val="FFFFFF"/>
+                </a:solidFill>
+                <a:latin typeface="Microsoft YaHei"/>
+              </a:rPr>
+              <a:t>▪ K3  明火、自燃试剂和火花：穿阻燃服</a:t>
+            </a:r>
+          </a:p>
+          <a:p>
+            <a:pPr>
+              <a:spcAft>
+                <a:spcPts val="800"/>
+              </a:spcAft>
+            </a:pPr>
+            <a:r>
+              <a:rPr sz="1800">
+                <a:solidFill>
+                  <a:srgbClr val="FFFFFF"/>
+                </a:solidFill>
+                <a:latin typeface="Microsoft YaHei"/>
+              </a:rPr>
+              <a:t>▪ K4  扣子扣好，袖口塞进手套</a:t>
+            </a:r>
+          </a:p>
+        </p:txBody>
+      </p:sp>
+      <p:sp>
+        <p:nvSpPr>
+          <p:cNvPr id="4" name="TextBox 3"/>
+          <p:cNvSpPr txBox="1"/>
+          <p:nvPr/>
+        </p:nvSpPr>
+        <p:spPr>
+          <a:xfrm>
+            <a:off x="6278727" y="1645920"/>
+            <a:ext cx="5364327" cy="4572000"/>
+          </a:xfrm>
+          <a:prstGeom prst="rect">
+            <a:avLst/>
+          </a:prstGeom>
+          <a:noFill/>
+        </p:spPr>
+        <p:txBody>
+          <a:bodyPr wrap="square" lIns="0" rIns="0" tIns="0" bIns="0">
+            <a:spAutoFit/>
+          </a:bodyPr>
+          <a:lstStyle/>
+          <a:p>
+            <a:pPr>
+              <a:spcAft>
+                <a:spcPts val="800"/>
+              </a:spcAft>
+            </a:pPr>
+            <a:r>
+              <a:rPr sz="1800">
+                <a:solidFill>
+                  <a:srgbClr val="FFFFFF"/>
+                </a:solidFill>
+                <a:latin typeface="Microsoft YaHei"/>
+              </a:rPr>
+              <a:t>▪ K5  有喷溅，加穿耐化学品围裙</a:t>
+            </a:r>
+          </a:p>
+          <a:p>
+            <a:pPr>
+              <a:spcAft>
+                <a:spcPts val="800"/>
+              </a:spcAft>
+            </a:pPr>
+            <a:r>
+              <a:rPr sz="1800">
+                <a:solidFill>
+                  <a:srgbClr val="FFFFFF"/>
+                </a:solidFill>
+                <a:latin typeface="Microsoft YaHei"/>
+              </a:rPr>
+              <a:t>▪ K6  防护服按危害选，沾污就换</a:t>
+            </a:r>
+          </a:p>
+          <a:p>
+            <a:pPr>
+              <a:spcAft>
+                <a:spcPts val="800"/>
+              </a:spcAft>
+            </a:pPr>
+            <a:r>
+              <a:rPr sz="1800">
+                <a:solidFill>
+                  <a:srgbClr val="FFFFFF"/>
+                </a:solidFill>
+                <a:latin typeface="Microsoft YaHei"/>
+              </a:rPr>
+              <a:t>▪ K7  实验服不出实验室，不带回家洗</a:t>
+            </a:r>
+          </a:p>
+          <a:p>
+            <a:pPr>
+              <a:spcAft>
+                <a:spcPts val="800"/>
+              </a:spcAft>
+            </a:pPr>
+            <a:r>
+              <a:rPr sz="1800">
+                <a:solidFill>
+                  <a:srgbClr val="FFFFFF"/>
+                </a:solidFill>
+                <a:latin typeface="Microsoft YaHei"/>
+              </a:rPr>
+              <a:t>▪ S1  大量沾染，立即脱下冲洗</a:t>
+            </a:r>
+          </a:p>
+        </p:txBody>
+      </p:sp>
+    </p:spTree>
+  </p:cSld>
+  <p:clrMapOvr>
+    <a:masterClrMapping/>
+  </p:clrMapOvr>
+</p:sld>
+</file>
+
 <file path=ppt/slides/slide11.xml><?xml version="1.0" encoding="utf-8"?>
 <p:sld xmlns:a="http://schemas.openxmlformats.org/drawingml/2006/main" xmlns:p="http://schemas.openxmlformats.org/presentationml/2006/main" xmlns:r="http://schemas.openxmlformats.org/officeDocument/2006/relationships">
   <p:cSld>
@@ -59586,6 +61509,918 @@
 </p:sld>
 </file>
 
+<file path=ppt/slides/slide88.xml><?xml version="1.0" encoding="utf-8"?>
+<p:sld xmlns:a="http://schemas.openxmlformats.org/drawingml/2006/main" xmlns:p="http://schemas.openxmlformats.org/presentationml/2006/main" xmlns:r="http://schemas.openxmlformats.org/officeDocument/2006/relationships">
+  <p:cSld>
+    <p:bg>
+      <p:bgPr>
+        <a:solidFill>
+          <a:srgbClr val="0B3C5D"/>
+        </a:solidFill>
+        <a:effectLst/>
+      </p:bgPr>
+    </p:bg>
+    <p:spTree>
+      <p:nvGrpSpPr>
+        <p:cNvPr id="1" name=""/>
+        <p:cNvGrpSpPr/>
+        <p:nvPr/>
+      </p:nvGrpSpPr>
+      <p:grpSpPr/>
+      <p:sp>
+        <p:nvSpPr>
+          <p:cNvPr id="2" name="Oval 1"/>
+          <p:cNvSpPr/>
+          <p:nvPr/>
+        </p:nvSpPr>
+        <p:spPr>
+          <a:xfrm>
+            <a:off x="548640" y="1280160"/>
+            <a:ext cx="1005840" cy="1005840"/>
+          </a:xfrm>
+          <a:prstGeom prst="ellipse">
+            <a:avLst/>
+          </a:prstGeom>
+          <a:solidFill>
+            <a:srgbClr val="F28C28"/>
+          </a:solidFill>
+          <a:ln>
+            <a:noFill/>
+          </a:ln>
+          <a:effectLst/>
+        </p:spPr>
+        <p:style>
+          <a:lnRef idx="1">
+            <a:schemeClr val="accent1"/>
+          </a:lnRef>
+          <a:fillRef idx="3">
+            <a:schemeClr val="accent1"/>
+          </a:fillRef>
+          <a:effectRef idx="2">
+            <a:schemeClr val="accent1"/>
+          </a:effectRef>
+          <a:fontRef idx="minor">
+            <a:schemeClr val="lt1"/>
+          </a:fontRef>
+        </p:style>
+        <p:txBody>
+          <a:bodyPr rtlCol="0" anchor="ctr"/>
+          <a:lstStyle/>
+          <a:p>
+            <a:pPr algn="ctr"/>
+          </a:p>
+        </p:txBody>
+      </p:sp>
+      <p:sp>
+        <p:nvSpPr>
+          <p:cNvPr id="3" name="TextBox 2"/>
+          <p:cNvSpPr txBox="1"/>
+          <p:nvPr/>
+        </p:nvSpPr>
+        <p:spPr>
+          <a:xfrm>
+            <a:off x="548640" y="1280160"/>
+            <a:ext cx="1005840" cy="1005840"/>
+          </a:xfrm>
+          <a:prstGeom prst="rect">
+            <a:avLst/>
+          </a:prstGeom>
+          <a:noFill/>
+        </p:spPr>
+        <p:txBody>
+          <a:bodyPr wrap="square" anchor="ctr" lIns="0" rIns="0" tIns="0" bIns="0">
+            <a:spAutoFit/>
+          </a:bodyPr>
+          <a:lstStyle/>
+          <a:p>
+            <a:pPr algn="ctr"/>
+            <a:r>
+              <a:rPr sz="2400" b="1">
+                <a:solidFill>
+                  <a:srgbClr val="FFFFFF"/>
+                </a:solidFill>
+                <a:latin typeface="Microsoft YaHei"/>
+              </a:rPr>
+              <a:t>024</a:t>
+            </a:r>
+          </a:p>
+        </p:txBody>
+      </p:sp>
+      <p:sp>
+        <p:nvSpPr>
+          <p:cNvPr id="4" name="TextBox 3"/>
+          <p:cNvSpPr txBox="1"/>
+          <p:nvPr/>
+        </p:nvSpPr>
+        <p:spPr>
+          <a:xfrm>
+            <a:off x="548640" y="2651760"/>
+            <a:ext cx="11094415" cy="1097280"/>
+          </a:xfrm>
+          <a:prstGeom prst="rect">
+            <a:avLst/>
+          </a:prstGeom>
+          <a:noFill/>
+        </p:spPr>
+        <p:txBody>
+          <a:bodyPr wrap="square" anchor="t" lIns="0" rIns="0" tIns="0" bIns="0">
+            <a:spAutoFit/>
+          </a:bodyPr>
+          <a:lstStyle/>
+          <a:p>
+            <a:pPr algn="l"/>
+            <a:r>
+              <a:rPr sz="4400" b="1">
+                <a:solidFill>
+                  <a:srgbClr val="FFFFFF"/>
+                </a:solidFill>
+                <a:latin typeface="Microsoft YaHei"/>
+              </a:rPr>
+              <a:t>实验服与防护服</a:t>
+            </a:r>
+          </a:p>
+        </p:txBody>
+      </p:sp>
+      <p:sp>
+        <p:nvSpPr>
+          <p:cNvPr id="5" name="TextBox 4"/>
+          <p:cNvSpPr txBox="1"/>
+          <p:nvPr/>
+        </p:nvSpPr>
+        <p:spPr>
+          <a:xfrm>
+            <a:off x="548640" y="3840480"/>
+            <a:ext cx="11094415" cy="457200"/>
+          </a:xfrm>
+          <a:prstGeom prst="rect">
+            <a:avLst/>
+          </a:prstGeom>
+          <a:noFill/>
+        </p:spPr>
+        <p:txBody>
+          <a:bodyPr wrap="square" anchor="t" lIns="0" rIns="0" tIns="0" bIns="0">
+            <a:spAutoFit/>
+          </a:bodyPr>
+          <a:lstStyle/>
+          <a:p>
+            <a:pPr algn="l"/>
+            <a:r>
+              <a:rPr sz="2000" b="0">
+                <a:solidFill>
+                  <a:srgbClr val="CADCE6"/>
+                </a:solidFill>
+                <a:latin typeface="Microsoft YaHei"/>
+              </a:rPr>
+              <a:t>第3章 通用安全与个人防护</a:t>
+            </a:r>
+          </a:p>
+        </p:txBody>
+      </p:sp>
+      <p:sp>
+        <p:nvSpPr>
+          <p:cNvPr id="6" name="TextBox 5"/>
+          <p:cNvSpPr txBox="1"/>
+          <p:nvPr/>
+        </p:nvSpPr>
+        <p:spPr>
+          <a:xfrm>
+            <a:off x="548640" y="4389120"/>
+            <a:ext cx="11094415" cy="457200"/>
+          </a:xfrm>
+          <a:prstGeom prst="rect">
+            <a:avLst/>
+          </a:prstGeom>
+          <a:noFill/>
+        </p:spPr>
+        <p:txBody>
+          <a:bodyPr wrap="square" anchor="t" lIns="0" rIns="0" tIns="0" bIns="0">
+            <a:spAutoFit/>
+          </a:bodyPr>
+          <a:lstStyle/>
+          <a:p>
+            <a:pPr algn="l"/>
+            <a:r>
+              <a:rPr sz="1400" b="0">
+                <a:solidFill>
+                  <a:srgbClr val="CADCE6"/>
+                </a:solidFill>
+                <a:latin typeface="Microsoft YaHei"/>
+              </a:rPr>
+              <a:t>课时：约 4 分钟（卡通视频 45 镜）　适用对象：全体进入高校实验室的本科生、研究生和教职工（必修）；化学、材料、生物、工程实训实验室人员重点学习</a:t>
+            </a:r>
+          </a:p>
+        </p:txBody>
+      </p:sp>
+      <p:sp>
+        <p:nvSpPr>
+          <p:cNvPr id="7" name="TextBox 6"/>
+          <p:cNvSpPr txBox="1"/>
+          <p:nvPr/>
+        </p:nvSpPr>
+        <p:spPr>
+          <a:xfrm>
+            <a:off x="548640" y="6126480"/>
+            <a:ext cx="7315200" cy="365760"/>
+          </a:xfrm>
+          <a:prstGeom prst="rect">
+            <a:avLst/>
+          </a:prstGeom>
+          <a:noFill/>
+        </p:spPr>
+        <p:txBody>
+          <a:bodyPr wrap="square" anchor="t" lIns="0" rIns="0" tIns="0" bIns="0">
+            <a:spAutoFit/>
+          </a:bodyPr>
+          <a:lstStyle/>
+          <a:p>
+            <a:pPr algn="l"/>
+            <a:r>
+              <a:rPr sz="1400" b="1">
+                <a:solidFill>
+                  <a:srgbClr val="F28C28"/>
+                </a:solidFill>
+                <a:latin typeface="Microsoft YaHei"/>
+              </a:rPr>
+              <a:t>《高校实验室安全》学习课件</a:t>
+            </a:r>
+          </a:p>
+        </p:txBody>
+      </p:sp>
+    </p:spTree>
+  </p:cSld>
+  <p:clrMapOvr>
+    <a:masterClrMapping/>
+  </p:clrMapOvr>
+</p:sld>
+</file>
+
+<file path=ppt/slides/slide89.xml><?xml version="1.0" encoding="utf-8"?>
+<p:sld xmlns:a="http://schemas.openxmlformats.org/drawingml/2006/main" xmlns:p="http://schemas.openxmlformats.org/presentationml/2006/main" xmlns:r="http://schemas.openxmlformats.org/officeDocument/2006/relationships">
+  <p:cSld>
+    <p:bg>
+      <p:bgPr>
+        <a:solidFill>
+          <a:srgbClr val="FFFFFF"/>
+        </a:solidFill>
+        <a:effectLst/>
+      </p:bgPr>
+    </p:bg>
+    <p:spTree>
+      <p:nvGrpSpPr>
+        <p:cNvPr id="1" name=""/>
+        <p:cNvGrpSpPr/>
+        <p:nvPr/>
+      </p:nvGrpSpPr>
+      <p:grpSpPr/>
+      <p:sp>
+        <p:nvSpPr>
+          <p:cNvPr id="2" name="TextBox 1"/>
+          <p:cNvSpPr txBox="1"/>
+          <p:nvPr/>
+        </p:nvSpPr>
+        <p:spPr>
+          <a:xfrm>
+            <a:off x="548640" y="320040"/>
+            <a:ext cx="8229600" cy="320040"/>
+          </a:xfrm>
+          <a:prstGeom prst="rect">
+            <a:avLst/>
+          </a:prstGeom>
+          <a:noFill/>
+        </p:spPr>
+        <p:txBody>
+          <a:bodyPr wrap="square" anchor="t" lIns="0" rIns="0" tIns="0" bIns="0">
+            <a:spAutoFit/>
+          </a:bodyPr>
+          <a:lstStyle/>
+          <a:p>
+            <a:pPr algn="l"/>
+            <a:r>
+              <a:rPr sz="1200" b="1">
+                <a:solidFill>
+                  <a:srgbClr val="1D7A8C"/>
+                </a:solidFill>
+                <a:latin typeface="Microsoft YaHei"/>
+              </a:rPr>
+              <a:t>024 · 实验服与防护服</a:t>
+            </a:r>
+          </a:p>
+        </p:txBody>
+      </p:sp>
+      <p:sp>
+        <p:nvSpPr>
+          <p:cNvPr id="3" name="TextBox 2"/>
+          <p:cNvSpPr txBox="1"/>
+          <p:nvPr/>
+        </p:nvSpPr>
+        <p:spPr>
+          <a:xfrm>
+            <a:off x="548640" y="640080"/>
+            <a:ext cx="11094415" cy="731520"/>
+          </a:xfrm>
+          <a:prstGeom prst="rect">
+            <a:avLst/>
+          </a:prstGeom>
+          <a:noFill/>
+        </p:spPr>
+        <p:txBody>
+          <a:bodyPr wrap="square" anchor="t" lIns="0" rIns="0" tIns="0" bIns="0">
+            <a:spAutoFit/>
+          </a:bodyPr>
+          <a:lstStyle/>
+          <a:p>
+            <a:pPr algn="l"/>
+            <a:r>
+              <a:rPr sz="3000" b="1">
+                <a:solidFill>
+                  <a:srgbClr val="0B3C5D"/>
+                </a:solidFill>
+                <a:latin typeface="Microsoft YaHei"/>
+              </a:rPr>
+              <a:t>学习目标</a:t>
+            </a:r>
+          </a:p>
+        </p:txBody>
+      </p:sp>
+      <p:sp>
+        <p:nvSpPr>
+          <p:cNvPr id="4" name="TextBox 3"/>
+          <p:cNvSpPr txBox="1"/>
+          <p:nvPr/>
+        </p:nvSpPr>
+        <p:spPr>
+          <a:xfrm>
+            <a:off x="548640" y="6446520"/>
+            <a:ext cx="7315200" cy="274320"/>
+          </a:xfrm>
+          <a:prstGeom prst="rect">
+            <a:avLst/>
+          </a:prstGeom>
+          <a:noFill/>
+        </p:spPr>
+        <p:txBody>
+          <a:bodyPr wrap="square" anchor="t" lIns="0" rIns="0" tIns="0" bIns="0">
+            <a:spAutoFit/>
+          </a:bodyPr>
+          <a:lstStyle/>
+          <a:p>
+            <a:pPr algn="l"/>
+            <a:r>
+              <a:rPr sz="1000" b="0">
+                <a:solidFill>
+                  <a:srgbClr val="5F6B75"/>
+                </a:solidFill>
+                <a:latin typeface="Microsoft YaHei"/>
+              </a:rPr>
+              <a:t>《高校实验室安全》 024 实验服与防护服</a:t>
+            </a:r>
+          </a:p>
+        </p:txBody>
+      </p:sp>
+      <p:sp>
+        <p:nvSpPr>
+          <p:cNvPr id="5" name="Rounded Rectangle 4"/>
+          <p:cNvSpPr/>
+          <p:nvPr/>
+        </p:nvSpPr>
+        <p:spPr>
+          <a:xfrm>
+            <a:off x="548640" y="1828800"/>
+            <a:ext cx="2499283" cy="3931920"/>
+          </a:xfrm>
+          <a:prstGeom prst="roundRect">
+            <a:avLst>
+              <a:gd name="adj" fmla="val 8000"/>
+            </a:avLst>
+          </a:prstGeom>
+          <a:solidFill>
+            <a:srgbClr val="EEF4F7"/>
+          </a:solidFill>
+          <a:ln>
+            <a:noFill/>
+          </a:ln>
+          <a:effectLst/>
+        </p:spPr>
+        <p:style>
+          <a:lnRef idx="1">
+            <a:schemeClr val="accent1"/>
+          </a:lnRef>
+          <a:fillRef idx="3">
+            <a:schemeClr val="accent1"/>
+          </a:fillRef>
+          <a:effectRef idx="2">
+            <a:schemeClr val="accent1"/>
+          </a:effectRef>
+          <a:fontRef idx="minor">
+            <a:schemeClr val="lt1"/>
+          </a:fontRef>
+        </p:style>
+        <p:txBody>
+          <a:bodyPr rtlCol="0" anchor="ctr"/>
+          <a:lstStyle/>
+          <a:p>
+            <a:pPr algn="ctr"/>
+          </a:p>
+        </p:txBody>
+      </p:sp>
+      <p:sp>
+        <p:nvSpPr>
+          <p:cNvPr id="6" name="Oval 5"/>
+          <p:cNvSpPr/>
+          <p:nvPr/>
+        </p:nvSpPr>
+        <p:spPr>
+          <a:xfrm>
+            <a:off x="868680" y="2148840"/>
+            <a:ext cx="685800" cy="685800"/>
+          </a:xfrm>
+          <a:prstGeom prst="ellipse">
+            <a:avLst/>
+          </a:prstGeom>
+          <a:solidFill>
+            <a:srgbClr val="1D7A8C"/>
+          </a:solidFill>
+          <a:ln>
+            <a:noFill/>
+          </a:ln>
+          <a:effectLst/>
+        </p:spPr>
+        <p:style>
+          <a:lnRef idx="1">
+            <a:schemeClr val="accent1"/>
+          </a:lnRef>
+          <a:fillRef idx="3">
+            <a:schemeClr val="accent1"/>
+          </a:fillRef>
+          <a:effectRef idx="2">
+            <a:schemeClr val="accent1"/>
+          </a:effectRef>
+          <a:fontRef idx="minor">
+            <a:schemeClr val="lt1"/>
+          </a:fontRef>
+        </p:style>
+        <p:txBody>
+          <a:bodyPr rtlCol="0" anchor="ctr" lIns="0" rIns="0" tIns="0" bIns="0"/>
+          <a:lstStyle/>
+          <a:p>
+            <a:pPr algn="ctr"/>
+            <a:r>
+              <a:rPr sz="2000" b="1">
+                <a:solidFill>
+                  <a:srgbClr val="FFFFFF"/>
+                </a:solidFill>
+                <a:latin typeface="Microsoft YaHei"/>
+              </a:rPr>
+              <a:t>1</a:t>
+            </a:r>
+          </a:p>
+        </p:txBody>
+      </p:sp>
+      <p:sp>
+        <p:nvSpPr>
+          <p:cNvPr id="7" name="TextBox 6"/>
+          <p:cNvSpPr txBox="1"/>
+          <p:nvPr/>
+        </p:nvSpPr>
+        <p:spPr>
+          <a:xfrm>
+            <a:off x="868680" y="3108960"/>
+            <a:ext cx="1859203" cy="2468880"/>
+          </a:xfrm>
+          <a:prstGeom prst="rect">
+            <a:avLst/>
+          </a:prstGeom>
+          <a:noFill/>
+        </p:spPr>
+        <p:txBody>
+          <a:bodyPr wrap="square" anchor="t" lIns="0" rIns="0" tIns="0" bIns="0">
+            <a:spAutoFit/>
+          </a:bodyPr>
+          <a:lstStyle/>
+          <a:p>
+            <a:pPr algn="l"/>
+            <a:r>
+              <a:rPr sz="1800" b="0">
+                <a:solidFill>
+                  <a:srgbClr val="222B33"/>
+                </a:solidFill>
+                <a:latin typeface="Microsoft YaHei"/>
+              </a:rPr>
+              <a:t>能说出实验服的防护作用，能做到进实验室就穿、扣好扣子、袖口塞进手套。</a:t>
+            </a:r>
+          </a:p>
+        </p:txBody>
+      </p:sp>
+      <p:sp>
+        <p:nvSpPr>
+          <p:cNvPr id="8" name="Rounded Rectangle 7"/>
+          <p:cNvSpPr/>
+          <p:nvPr/>
+        </p:nvSpPr>
+        <p:spPr>
+          <a:xfrm>
+            <a:off x="3413683" y="1828800"/>
+            <a:ext cx="2499283" cy="3931920"/>
+          </a:xfrm>
+          <a:prstGeom prst="roundRect">
+            <a:avLst>
+              <a:gd name="adj" fmla="val 8000"/>
+            </a:avLst>
+          </a:prstGeom>
+          <a:solidFill>
+            <a:srgbClr val="EEF4F7"/>
+          </a:solidFill>
+          <a:ln>
+            <a:noFill/>
+          </a:ln>
+          <a:effectLst/>
+        </p:spPr>
+        <p:style>
+          <a:lnRef idx="1">
+            <a:schemeClr val="accent1"/>
+          </a:lnRef>
+          <a:fillRef idx="3">
+            <a:schemeClr val="accent1"/>
+          </a:fillRef>
+          <a:effectRef idx="2">
+            <a:schemeClr val="accent1"/>
+          </a:effectRef>
+          <a:fontRef idx="minor">
+            <a:schemeClr val="lt1"/>
+          </a:fontRef>
+        </p:style>
+        <p:txBody>
+          <a:bodyPr rtlCol="0" anchor="ctr"/>
+          <a:lstStyle/>
+          <a:p>
+            <a:pPr algn="ctr"/>
+          </a:p>
+        </p:txBody>
+      </p:sp>
+      <p:sp>
+        <p:nvSpPr>
+          <p:cNvPr id="9" name="Oval 8"/>
+          <p:cNvSpPr/>
+          <p:nvPr/>
+        </p:nvSpPr>
+        <p:spPr>
+          <a:xfrm>
+            <a:off x="3733723" y="2148840"/>
+            <a:ext cx="685800" cy="685800"/>
+          </a:xfrm>
+          <a:prstGeom prst="ellipse">
+            <a:avLst/>
+          </a:prstGeom>
+          <a:solidFill>
+            <a:srgbClr val="1D7A8C"/>
+          </a:solidFill>
+          <a:ln>
+            <a:noFill/>
+          </a:ln>
+          <a:effectLst/>
+        </p:spPr>
+        <p:style>
+          <a:lnRef idx="1">
+            <a:schemeClr val="accent1"/>
+          </a:lnRef>
+          <a:fillRef idx="3">
+            <a:schemeClr val="accent1"/>
+          </a:fillRef>
+          <a:effectRef idx="2">
+            <a:schemeClr val="accent1"/>
+          </a:effectRef>
+          <a:fontRef idx="minor">
+            <a:schemeClr val="lt1"/>
+          </a:fontRef>
+        </p:style>
+        <p:txBody>
+          <a:bodyPr rtlCol="0" anchor="ctr" lIns="0" rIns="0" tIns="0" bIns="0"/>
+          <a:lstStyle/>
+          <a:p>
+            <a:pPr algn="ctr"/>
+            <a:r>
+              <a:rPr sz="2000" b="1">
+                <a:solidFill>
+                  <a:srgbClr val="FFFFFF"/>
+                </a:solidFill>
+                <a:latin typeface="Microsoft YaHei"/>
+              </a:rPr>
+              <a:t>2</a:t>
+            </a:r>
+          </a:p>
+        </p:txBody>
+      </p:sp>
+      <p:sp>
+        <p:nvSpPr>
+          <p:cNvPr id="10" name="TextBox 9"/>
+          <p:cNvSpPr txBox="1"/>
+          <p:nvPr/>
+        </p:nvSpPr>
+        <p:spPr>
+          <a:xfrm>
+            <a:off x="3733723" y="3108960"/>
+            <a:ext cx="1859203" cy="2468880"/>
+          </a:xfrm>
+          <a:prstGeom prst="rect">
+            <a:avLst/>
+          </a:prstGeom>
+          <a:noFill/>
+        </p:spPr>
+        <p:txBody>
+          <a:bodyPr wrap="square" anchor="t" lIns="0" rIns="0" tIns="0" bIns="0">
+            <a:spAutoFit/>
+          </a:bodyPr>
+          <a:lstStyle/>
+          <a:p>
+            <a:pPr algn="l"/>
+            <a:r>
+              <a:rPr sz="1800" b="0">
+                <a:solidFill>
+                  <a:srgbClr val="222B33"/>
+                </a:solidFill>
+                <a:latin typeface="Microsoft YaHei"/>
+              </a:rPr>
+              <a:t>能判断实验服应选棉质或阻燃材质，使用自燃试剂、明火、高能反应或有火花时穿阻燃服。</a:t>
+            </a:r>
+          </a:p>
+        </p:txBody>
+      </p:sp>
+      <p:sp>
+        <p:nvSpPr>
+          <p:cNvPr id="11" name="Rounded Rectangle 10"/>
+          <p:cNvSpPr/>
+          <p:nvPr/>
+        </p:nvSpPr>
+        <p:spPr>
+          <a:xfrm>
+            <a:off x="6278727" y="1828800"/>
+            <a:ext cx="2499283" cy="3931920"/>
+          </a:xfrm>
+          <a:prstGeom prst="roundRect">
+            <a:avLst>
+              <a:gd name="adj" fmla="val 8000"/>
+            </a:avLst>
+          </a:prstGeom>
+          <a:solidFill>
+            <a:srgbClr val="EEF4F7"/>
+          </a:solidFill>
+          <a:ln>
+            <a:noFill/>
+          </a:ln>
+          <a:effectLst/>
+        </p:spPr>
+        <p:style>
+          <a:lnRef idx="1">
+            <a:schemeClr val="accent1"/>
+          </a:lnRef>
+          <a:fillRef idx="3">
+            <a:schemeClr val="accent1"/>
+          </a:fillRef>
+          <a:effectRef idx="2">
+            <a:schemeClr val="accent1"/>
+          </a:effectRef>
+          <a:fontRef idx="minor">
+            <a:schemeClr val="lt1"/>
+          </a:fontRef>
+        </p:style>
+        <p:txBody>
+          <a:bodyPr rtlCol="0" anchor="ctr"/>
+          <a:lstStyle/>
+          <a:p>
+            <a:pPr algn="ctr"/>
+          </a:p>
+        </p:txBody>
+      </p:sp>
+      <p:sp>
+        <p:nvSpPr>
+          <p:cNvPr id="12" name="Oval 11"/>
+          <p:cNvSpPr/>
+          <p:nvPr/>
+        </p:nvSpPr>
+        <p:spPr>
+          <a:xfrm>
+            <a:off x="6598767" y="2148840"/>
+            <a:ext cx="685800" cy="685800"/>
+          </a:xfrm>
+          <a:prstGeom prst="ellipse">
+            <a:avLst/>
+          </a:prstGeom>
+          <a:solidFill>
+            <a:srgbClr val="1D7A8C"/>
+          </a:solidFill>
+          <a:ln>
+            <a:noFill/>
+          </a:ln>
+          <a:effectLst/>
+        </p:spPr>
+        <p:style>
+          <a:lnRef idx="1">
+            <a:schemeClr val="accent1"/>
+          </a:lnRef>
+          <a:fillRef idx="3">
+            <a:schemeClr val="accent1"/>
+          </a:fillRef>
+          <a:effectRef idx="2">
+            <a:schemeClr val="accent1"/>
+          </a:effectRef>
+          <a:fontRef idx="minor">
+            <a:schemeClr val="lt1"/>
+          </a:fontRef>
+        </p:style>
+        <p:txBody>
+          <a:bodyPr rtlCol="0" anchor="ctr" lIns="0" rIns="0" tIns="0" bIns="0"/>
+          <a:lstStyle/>
+          <a:p>
+            <a:pPr algn="ctr"/>
+            <a:r>
+              <a:rPr sz="2000" b="1">
+                <a:solidFill>
+                  <a:srgbClr val="FFFFFF"/>
+                </a:solidFill>
+                <a:latin typeface="Microsoft YaHei"/>
+              </a:rPr>
+              <a:t>3</a:t>
+            </a:r>
+          </a:p>
+        </p:txBody>
+      </p:sp>
+      <p:sp>
+        <p:nvSpPr>
+          <p:cNvPr id="13" name="TextBox 12"/>
+          <p:cNvSpPr txBox="1"/>
+          <p:nvPr/>
+        </p:nvSpPr>
+        <p:spPr>
+          <a:xfrm>
+            <a:off x="6598767" y="3108960"/>
+            <a:ext cx="1859203" cy="2468880"/>
+          </a:xfrm>
+          <a:prstGeom prst="rect">
+            <a:avLst/>
+          </a:prstGeom>
+          <a:noFill/>
+        </p:spPr>
+        <p:txBody>
+          <a:bodyPr wrap="square" anchor="t" lIns="0" rIns="0" tIns="0" bIns="0">
+            <a:spAutoFit/>
+          </a:bodyPr>
+          <a:lstStyle/>
+          <a:p>
+            <a:pPr algn="l"/>
+            <a:r>
+              <a:rPr sz="1800" b="0">
+                <a:solidFill>
+                  <a:srgbClr val="222B33"/>
+                </a:solidFill>
+                <a:latin typeface="Microsoft YaHei"/>
+              </a:rPr>
+              <a:t>能做到有喷溅风险时加穿耐化学品围裙，按危害选用防护服，沾污及时更换。</a:t>
+            </a:r>
+          </a:p>
+        </p:txBody>
+      </p:sp>
+      <p:sp>
+        <p:nvSpPr>
+          <p:cNvPr id="14" name="Rounded Rectangle 13"/>
+          <p:cNvSpPr/>
+          <p:nvPr/>
+        </p:nvSpPr>
+        <p:spPr>
+          <a:xfrm>
+            <a:off x="9143771" y="1828800"/>
+            <a:ext cx="2499283" cy="3931920"/>
+          </a:xfrm>
+          <a:prstGeom prst="roundRect">
+            <a:avLst>
+              <a:gd name="adj" fmla="val 8000"/>
+            </a:avLst>
+          </a:prstGeom>
+          <a:solidFill>
+            <a:srgbClr val="EEF4F7"/>
+          </a:solidFill>
+          <a:ln>
+            <a:noFill/>
+          </a:ln>
+          <a:effectLst/>
+        </p:spPr>
+        <p:style>
+          <a:lnRef idx="1">
+            <a:schemeClr val="accent1"/>
+          </a:lnRef>
+          <a:fillRef idx="3">
+            <a:schemeClr val="accent1"/>
+          </a:fillRef>
+          <a:effectRef idx="2">
+            <a:schemeClr val="accent1"/>
+          </a:effectRef>
+          <a:fontRef idx="minor">
+            <a:schemeClr val="lt1"/>
+          </a:fontRef>
+        </p:style>
+        <p:txBody>
+          <a:bodyPr rtlCol="0" anchor="ctr"/>
+          <a:lstStyle/>
+          <a:p>
+            <a:pPr algn="ctr"/>
+          </a:p>
+        </p:txBody>
+      </p:sp>
+      <p:sp>
+        <p:nvSpPr>
+          <p:cNvPr id="15" name="Oval 14"/>
+          <p:cNvSpPr/>
+          <p:nvPr/>
+        </p:nvSpPr>
+        <p:spPr>
+          <a:xfrm>
+            <a:off x="9463811" y="2148840"/>
+            <a:ext cx="685800" cy="685800"/>
+          </a:xfrm>
+          <a:prstGeom prst="ellipse">
+            <a:avLst/>
+          </a:prstGeom>
+          <a:solidFill>
+            <a:srgbClr val="1D7A8C"/>
+          </a:solidFill>
+          <a:ln>
+            <a:noFill/>
+          </a:ln>
+          <a:effectLst/>
+        </p:spPr>
+        <p:style>
+          <a:lnRef idx="1">
+            <a:schemeClr val="accent1"/>
+          </a:lnRef>
+          <a:fillRef idx="3">
+            <a:schemeClr val="accent1"/>
+          </a:fillRef>
+          <a:effectRef idx="2">
+            <a:schemeClr val="accent1"/>
+          </a:effectRef>
+          <a:fontRef idx="minor">
+            <a:schemeClr val="lt1"/>
+          </a:fontRef>
+        </p:style>
+        <p:txBody>
+          <a:bodyPr rtlCol="0" anchor="ctr" lIns="0" rIns="0" tIns="0" bIns="0"/>
+          <a:lstStyle/>
+          <a:p>
+            <a:pPr algn="ctr"/>
+            <a:r>
+              <a:rPr sz="2000" b="1">
+                <a:solidFill>
+                  <a:srgbClr val="FFFFFF"/>
+                </a:solidFill>
+                <a:latin typeface="Microsoft YaHei"/>
+              </a:rPr>
+              <a:t>4</a:t>
+            </a:r>
+          </a:p>
+        </p:txBody>
+      </p:sp>
+      <p:sp>
+        <p:nvSpPr>
+          <p:cNvPr id="16" name="TextBox 15"/>
+          <p:cNvSpPr txBox="1"/>
+          <p:nvPr/>
+        </p:nvSpPr>
+        <p:spPr>
+          <a:xfrm>
+            <a:off x="9463811" y="3108960"/>
+            <a:ext cx="1859203" cy="2468880"/>
+          </a:xfrm>
+          <a:prstGeom prst="rect">
+            <a:avLst/>
+          </a:prstGeom>
+          <a:noFill/>
+        </p:spPr>
+        <p:txBody>
+          <a:bodyPr wrap="square" anchor="t" lIns="0" rIns="0" tIns="0" bIns="0">
+            <a:spAutoFit/>
+          </a:bodyPr>
+          <a:lstStyle/>
+          <a:p>
+            <a:pPr algn="l"/>
+            <a:r>
+              <a:rPr sz="1800" b="0">
+                <a:solidFill>
+                  <a:srgbClr val="222B33"/>
+                </a:solidFill>
+                <a:latin typeface="Microsoft YaHei"/>
+              </a:rPr>
+              <a:t>能做到实验服不穿出实验室、不带回家洗，大量沾染时立即脱下冲洗并报告。</a:t>
+            </a:r>
+          </a:p>
+        </p:txBody>
+      </p:sp>
+    </p:spTree>
+  </p:cSld>
+  <p:clrMapOvr>
+    <a:masterClrMapping/>
+  </p:clrMapOvr>
+</p:sld>
+</file>
+
 <file path=ppt/slides/slide9.xml><?xml version="1.0" encoding="utf-8"?>
 <p:sld xmlns:a="http://schemas.openxmlformats.org/drawingml/2006/main" xmlns:p="http://schemas.openxmlformats.org/presentationml/2006/main" xmlns:r="http://schemas.openxmlformats.org/officeDocument/2006/relationships">
   <p:cSld>
@@ -60185,6 +63020,6464 @@
                 <a:latin typeface="Microsoft YaHei"/>
               </a:rPr>
               <a:t>▪ 认为“只进去拿个东西”就可以不按要求着装</a:t>
+            </a:r>
+          </a:p>
+        </p:txBody>
+      </p:sp>
+    </p:spTree>
+  </p:cSld>
+  <p:clrMapOvr>
+    <a:masterClrMapping/>
+  </p:clrMapOvr>
+</p:sld>
+</file>
+
+<file path=ppt/slides/slide90.xml><?xml version="1.0" encoding="utf-8"?>
+<p:sld xmlns:a="http://schemas.openxmlformats.org/drawingml/2006/main" xmlns:p="http://schemas.openxmlformats.org/presentationml/2006/main" xmlns:r="http://schemas.openxmlformats.org/officeDocument/2006/relationships">
+  <p:cSld>
+    <p:bg>
+      <p:bgPr>
+        <a:solidFill>
+          <a:srgbClr val="FFFFFF"/>
+        </a:solidFill>
+        <a:effectLst/>
+      </p:bgPr>
+    </p:bg>
+    <p:spTree>
+      <p:nvGrpSpPr>
+        <p:cNvPr id="1" name=""/>
+        <p:cNvGrpSpPr/>
+        <p:nvPr/>
+      </p:nvGrpSpPr>
+      <p:grpSpPr/>
+      <p:sp>
+        <p:nvSpPr>
+          <p:cNvPr id="2" name="TextBox 1"/>
+          <p:cNvSpPr txBox="1"/>
+          <p:nvPr/>
+        </p:nvSpPr>
+        <p:spPr>
+          <a:xfrm>
+            <a:off x="548640" y="320040"/>
+            <a:ext cx="8229600" cy="320040"/>
+          </a:xfrm>
+          <a:prstGeom prst="rect">
+            <a:avLst/>
+          </a:prstGeom>
+          <a:noFill/>
+        </p:spPr>
+        <p:txBody>
+          <a:bodyPr wrap="square" anchor="t" lIns="0" rIns="0" tIns="0" bIns="0">
+            <a:spAutoFit/>
+          </a:bodyPr>
+          <a:lstStyle/>
+          <a:p>
+            <a:pPr algn="l"/>
+            <a:r>
+              <a:rPr sz="1200" b="1">
+                <a:solidFill>
+                  <a:srgbClr val="1D7A8C"/>
+                </a:solidFill>
+                <a:latin typeface="Microsoft YaHei"/>
+              </a:rPr>
+              <a:t>024 · 实验服与防护服</a:t>
+            </a:r>
+          </a:p>
+        </p:txBody>
+      </p:sp>
+      <p:sp>
+        <p:nvSpPr>
+          <p:cNvPr id="3" name="TextBox 2"/>
+          <p:cNvSpPr txBox="1"/>
+          <p:nvPr/>
+        </p:nvSpPr>
+        <p:spPr>
+          <a:xfrm>
+            <a:off x="548640" y="640080"/>
+            <a:ext cx="11094415" cy="731520"/>
+          </a:xfrm>
+          <a:prstGeom prst="rect">
+            <a:avLst/>
+          </a:prstGeom>
+          <a:noFill/>
+        </p:spPr>
+        <p:txBody>
+          <a:bodyPr wrap="square" anchor="t" lIns="0" rIns="0" tIns="0" bIns="0">
+            <a:spAutoFit/>
+          </a:bodyPr>
+          <a:lstStyle/>
+          <a:p>
+            <a:pPr algn="l"/>
+            <a:r>
+              <a:rPr sz="3000" b="1">
+                <a:solidFill>
+                  <a:srgbClr val="0B3C5D"/>
+                </a:solidFill>
+                <a:latin typeface="Microsoft YaHei"/>
+              </a:rPr>
+              <a:t>法规与标准依据</a:t>
+            </a:r>
+          </a:p>
+        </p:txBody>
+      </p:sp>
+      <p:sp>
+        <p:nvSpPr>
+          <p:cNvPr id="4" name="TextBox 3"/>
+          <p:cNvSpPr txBox="1"/>
+          <p:nvPr/>
+        </p:nvSpPr>
+        <p:spPr>
+          <a:xfrm>
+            <a:off x="548640" y="6446520"/>
+            <a:ext cx="7315200" cy="274320"/>
+          </a:xfrm>
+          <a:prstGeom prst="rect">
+            <a:avLst/>
+          </a:prstGeom>
+          <a:noFill/>
+        </p:spPr>
+        <p:txBody>
+          <a:bodyPr wrap="square" anchor="t" lIns="0" rIns="0" tIns="0" bIns="0">
+            <a:spAutoFit/>
+          </a:bodyPr>
+          <a:lstStyle/>
+          <a:p>
+            <a:pPr algn="l"/>
+            <a:r>
+              <a:rPr sz="1000" b="0">
+                <a:solidFill>
+                  <a:srgbClr val="5F6B75"/>
+                </a:solidFill>
+                <a:latin typeface="Microsoft YaHei"/>
+              </a:rPr>
+              <a:t>《高校实验室安全》 024 实验服与防护服</a:t>
+            </a:r>
+          </a:p>
+        </p:txBody>
+      </p:sp>
+      <p:sp>
+        <p:nvSpPr>
+          <p:cNvPr id="5" name="Rounded Rectangle 4"/>
+          <p:cNvSpPr/>
+          <p:nvPr/>
+        </p:nvSpPr>
+        <p:spPr>
+          <a:xfrm>
+            <a:off x="548640" y="1737360"/>
+            <a:ext cx="5364327" cy="960120"/>
+          </a:xfrm>
+          <a:prstGeom prst="roundRect">
+            <a:avLst>
+              <a:gd name="adj" fmla="val 8000"/>
+            </a:avLst>
+          </a:prstGeom>
+          <a:solidFill>
+            <a:srgbClr val="EEF4F7"/>
+          </a:solidFill>
+          <a:ln>
+            <a:noFill/>
+          </a:ln>
+          <a:effectLst/>
+        </p:spPr>
+        <p:style>
+          <a:lnRef idx="1">
+            <a:schemeClr val="accent1"/>
+          </a:lnRef>
+          <a:fillRef idx="3">
+            <a:schemeClr val="accent1"/>
+          </a:fillRef>
+          <a:effectRef idx="2">
+            <a:schemeClr val="accent1"/>
+          </a:effectRef>
+          <a:fontRef idx="minor">
+            <a:schemeClr val="lt1"/>
+          </a:fontRef>
+        </p:style>
+        <p:txBody>
+          <a:bodyPr rtlCol="0" anchor="ctr"/>
+          <a:lstStyle/>
+          <a:p>
+            <a:pPr algn="ctr"/>
+          </a:p>
+        </p:txBody>
+      </p:sp>
+      <p:sp>
+        <p:nvSpPr>
+          <p:cNvPr id="6" name="Oval 5"/>
+          <p:cNvSpPr/>
+          <p:nvPr/>
+        </p:nvSpPr>
+        <p:spPr>
+          <a:xfrm>
+            <a:off x="731520" y="1988820"/>
+            <a:ext cx="457200" cy="457200"/>
+          </a:xfrm>
+          <a:prstGeom prst="ellipse">
+            <a:avLst/>
+          </a:prstGeom>
+          <a:solidFill>
+            <a:srgbClr val="0B3C5D"/>
+          </a:solidFill>
+          <a:ln>
+            <a:noFill/>
+          </a:ln>
+          <a:effectLst/>
+        </p:spPr>
+        <p:style>
+          <a:lnRef idx="1">
+            <a:schemeClr val="accent1"/>
+          </a:lnRef>
+          <a:fillRef idx="3">
+            <a:schemeClr val="accent1"/>
+          </a:fillRef>
+          <a:effectRef idx="2">
+            <a:schemeClr val="accent1"/>
+          </a:effectRef>
+          <a:fontRef idx="minor">
+            <a:schemeClr val="lt1"/>
+          </a:fontRef>
+        </p:style>
+        <p:txBody>
+          <a:bodyPr rtlCol="0" anchor="ctr" lIns="0" rIns="0" tIns="0" bIns="0"/>
+          <a:lstStyle/>
+          <a:p>
+            <a:pPr algn="ctr"/>
+            <a:r>
+              <a:rPr sz="1600" b="1">
+                <a:solidFill>
+                  <a:srgbClr val="FFFFFF"/>
+                </a:solidFill>
+                <a:latin typeface="Microsoft YaHei"/>
+              </a:rPr>
+              <a:t>§</a:t>
+            </a:r>
+          </a:p>
+        </p:txBody>
+      </p:sp>
+      <p:sp>
+        <p:nvSpPr>
+          <p:cNvPr id="7" name="TextBox 6"/>
+          <p:cNvSpPr txBox="1"/>
+          <p:nvPr/>
+        </p:nvSpPr>
+        <p:spPr>
+          <a:xfrm>
+            <a:off x="1371600" y="1828800"/>
+            <a:ext cx="4358487" cy="777240"/>
+          </a:xfrm>
+          <a:prstGeom prst="rect">
+            <a:avLst/>
+          </a:prstGeom>
+          <a:noFill/>
+        </p:spPr>
+        <p:txBody>
+          <a:bodyPr wrap="square" anchor="ctr" lIns="0" rIns="0" tIns="0" bIns="0">
+            <a:spAutoFit/>
+          </a:bodyPr>
+          <a:lstStyle/>
+          <a:p>
+            <a:pPr algn="l"/>
+            <a:r>
+              <a:rPr sz="1400" b="0">
+                <a:solidFill>
+                  <a:srgbClr val="222B33"/>
+                </a:solidFill>
+                <a:latin typeface="Microsoft YaHei"/>
+              </a:rPr>
+              <a:t>GB 39800.1-2020（以现行文本为准）《个体防护装备配备规范 第1部分：总则》：按危害配备躯体防护</a:t>
+            </a:r>
+          </a:p>
+        </p:txBody>
+      </p:sp>
+      <p:sp>
+        <p:nvSpPr>
+          <p:cNvPr id="8" name="Rounded Rectangle 7"/>
+          <p:cNvSpPr/>
+          <p:nvPr/>
+        </p:nvSpPr>
+        <p:spPr>
+          <a:xfrm>
+            <a:off x="6278727" y="1737360"/>
+            <a:ext cx="5364327" cy="960120"/>
+          </a:xfrm>
+          <a:prstGeom prst="roundRect">
+            <a:avLst>
+              <a:gd name="adj" fmla="val 8000"/>
+            </a:avLst>
+          </a:prstGeom>
+          <a:solidFill>
+            <a:srgbClr val="EEF4F7"/>
+          </a:solidFill>
+          <a:ln>
+            <a:noFill/>
+          </a:ln>
+          <a:effectLst/>
+        </p:spPr>
+        <p:style>
+          <a:lnRef idx="1">
+            <a:schemeClr val="accent1"/>
+          </a:lnRef>
+          <a:fillRef idx="3">
+            <a:schemeClr val="accent1"/>
+          </a:fillRef>
+          <a:effectRef idx="2">
+            <a:schemeClr val="accent1"/>
+          </a:effectRef>
+          <a:fontRef idx="minor">
+            <a:schemeClr val="lt1"/>
+          </a:fontRef>
+        </p:style>
+        <p:txBody>
+          <a:bodyPr rtlCol="0" anchor="ctr"/>
+          <a:lstStyle/>
+          <a:p>
+            <a:pPr algn="ctr"/>
+          </a:p>
+        </p:txBody>
+      </p:sp>
+      <p:sp>
+        <p:nvSpPr>
+          <p:cNvPr id="9" name="Oval 8"/>
+          <p:cNvSpPr/>
+          <p:nvPr/>
+        </p:nvSpPr>
+        <p:spPr>
+          <a:xfrm>
+            <a:off x="6461607" y="1988820"/>
+            <a:ext cx="457200" cy="457200"/>
+          </a:xfrm>
+          <a:prstGeom prst="ellipse">
+            <a:avLst/>
+          </a:prstGeom>
+          <a:solidFill>
+            <a:srgbClr val="0B3C5D"/>
+          </a:solidFill>
+          <a:ln>
+            <a:noFill/>
+          </a:ln>
+          <a:effectLst/>
+        </p:spPr>
+        <p:style>
+          <a:lnRef idx="1">
+            <a:schemeClr val="accent1"/>
+          </a:lnRef>
+          <a:fillRef idx="3">
+            <a:schemeClr val="accent1"/>
+          </a:fillRef>
+          <a:effectRef idx="2">
+            <a:schemeClr val="accent1"/>
+          </a:effectRef>
+          <a:fontRef idx="minor">
+            <a:schemeClr val="lt1"/>
+          </a:fontRef>
+        </p:style>
+        <p:txBody>
+          <a:bodyPr rtlCol="0" anchor="ctr" lIns="0" rIns="0" tIns="0" bIns="0"/>
+          <a:lstStyle/>
+          <a:p>
+            <a:pPr algn="ctr"/>
+            <a:r>
+              <a:rPr sz="1600" b="1">
+                <a:solidFill>
+                  <a:srgbClr val="FFFFFF"/>
+                </a:solidFill>
+                <a:latin typeface="Microsoft YaHei"/>
+              </a:rPr>
+              <a:t>§</a:t>
+            </a:r>
+          </a:p>
+        </p:txBody>
+      </p:sp>
+      <p:sp>
+        <p:nvSpPr>
+          <p:cNvPr id="10" name="TextBox 9"/>
+          <p:cNvSpPr txBox="1"/>
+          <p:nvPr/>
+        </p:nvSpPr>
+        <p:spPr>
+          <a:xfrm>
+            <a:off x="7101687" y="1828800"/>
+            <a:ext cx="4358487" cy="777240"/>
+          </a:xfrm>
+          <a:prstGeom prst="rect">
+            <a:avLst/>
+          </a:prstGeom>
+          <a:noFill/>
+        </p:spPr>
+        <p:txBody>
+          <a:bodyPr wrap="square" anchor="ctr" lIns="0" rIns="0" tIns="0" bIns="0">
+            <a:spAutoFit/>
+          </a:bodyPr>
+          <a:lstStyle/>
+          <a:p>
+            <a:pPr algn="l"/>
+            <a:r>
+              <a:rPr sz="1400" b="0">
+                <a:solidFill>
+                  <a:srgbClr val="222B33"/>
+                </a:solidFill>
+                <a:latin typeface="Microsoft YaHei"/>
+              </a:rPr>
+              <a:t>GB 8965.1-2020（以现行文本为准）《防护服装 阻燃服》：阻燃防护服的技术要求</a:t>
+            </a:r>
+          </a:p>
+        </p:txBody>
+      </p:sp>
+      <p:sp>
+        <p:nvSpPr>
+          <p:cNvPr id="11" name="Rounded Rectangle 10"/>
+          <p:cNvSpPr/>
+          <p:nvPr/>
+        </p:nvSpPr>
+        <p:spPr>
+          <a:xfrm>
+            <a:off x="548640" y="2834640"/>
+            <a:ext cx="5364327" cy="960120"/>
+          </a:xfrm>
+          <a:prstGeom prst="roundRect">
+            <a:avLst>
+              <a:gd name="adj" fmla="val 8000"/>
+            </a:avLst>
+          </a:prstGeom>
+          <a:solidFill>
+            <a:srgbClr val="EEF4F7"/>
+          </a:solidFill>
+          <a:ln>
+            <a:noFill/>
+          </a:ln>
+          <a:effectLst/>
+        </p:spPr>
+        <p:style>
+          <a:lnRef idx="1">
+            <a:schemeClr val="accent1"/>
+          </a:lnRef>
+          <a:fillRef idx="3">
+            <a:schemeClr val="accent1"/>
+          </a:fillRef>
+          <a:effectRef idx="2">
+            <a:schemeClr val="accent1"/>
+          </a:effectRef>
+          <a:fontRef idx="minor">
+            <a:schemeClr val="lt1"/>
+          </a:fontRef>
+        </p:style>
+        <p:txBody>
+          <a:bodyPr rtlCol="0" anchor="ctr"/>
+          <a:lstStyle/>
+          <a:p>
+            <a:pPr algn="ctr"/>
+          </a:p>
+        </p:txBody>
+      </p:sp>
+      <p:sp>
+        <p:nvSpPr>
+          <p:cNvPr id="12" name="Oval 11"/>
+          <p:cNvSpPr/>
+          <p:nvPr/>
+        </p:nvSpPr>
+        <p:spPr>
+          <a:xfrm>
+            <a:off x="731520" y="3086100"/>
+            <a:ext cx="457200" cy="457200"/>
+          </a:xfrm>
+          <a:prstGeom prst="ellipse">
+            <a:avLst/>
+          </a:prstGeom>
+          <a:solidFill>
+            <a:srgbClr val="0B3C5D"/>
+          </a:solidFill>
+          <a:ln>
+            <a:noFill/>
+          </a:ln>
+          <a:effectLst/>
+        </p:spPr>
+        <p:style>
+          <a:lnRef idx="1">
+            <a:schemeClr val="accent1"/>
+          </a:lnRef>
+          <a:fillRef idx="3">
+            <a:schemeClr val="accent1"/>
+          </a:fillRef>
+          <a:effectRef idx="2">
+            <a:schemeClr val="accent1"/>
+          </a:effectRef>
+          <a:fontRef idx="minor">
+            <a:schemeClr val="lt1"/>
+          </a:fontRef>
+        </p:style>
+        <p:txBody>
+          <a:bodyPr rtlCol="0" anchor="ctr" lIns="0" rIns="0" tIns="0" bIns="0"/>
+          <a:lstStyle/>
+          <a:p>
+            <a:pPr algn="ctr"/>
+            <a:r>
+              <a:rPr sz="1600" b="1">
+                <a:solidFill>
+                  <a:srgbClr val="FFFFFF"/>
+                </a:solidFill>
+                <a:latin typeface="Microsoft YaHei"/>
+              </a:rPr>
+              <a:t>§</a:t>
+            </a:r>
+          </a:p>
+        </p:txBody>
+      </p:sp>
+      <p:sp>
+        <p:nvSpPr>
+          <p:cNvPr id="13" name="TextBox 12"/>
+          <p:cNvSpPr txBox="1"/>
+          <p:nvPr/>
+        </p:nvSpPr>
+        <p:spPr>
+          <a:xfrm>
+            <a:off x="1371600" y="2926080"/>
+            <a:ext cx="4358487" cy="777240"/>
+          </a:xfrm>
+          <a:prstGeom prst="rect">
+            <a:avLst/>
+          </a:prstGeom>
+          <a:noFill/>
+        </p:spPr>
+        <p:txBody>
+          <a:bodyPr wrap="square" anchor="ctr" lIns="0" rIns="0" tIns="0" bIns="0">
+            <a:spAutoFit/>
+          </a:bodyPr>
+          <a:lstStyle/>
+          <a:p>
+            <a:pPr algn="l"/>
+            <a:r>
+              <a:rPr sz="1400" b="0">
+                <a:solidFill>
+                  <a:srgbClr val="222B33"/>
+                </a:solidFill>
+                <a:latin typeface="Microsoft YaHei"/>
+              </a:rPr>
+              <a:t>《中华人民共和国安全生产法》（以现行文本为准）：提供并正确佩戴使用符合国家标准的劳动防护用品</a:t>
+            </a:r>
+          </a:p>
+        </p:txBody>
+      </p:sp>
+      <p:sp>
+        <p:nvSpPr>
+          <p:cNvPr id="14" name="Rounded Rectangle 13"/>
+          <p:cNvSpPr/>
+          <p:nvPr/>
+        </p:nvSpPr>
+        <p:spPr>
+          <a:xfrm>
+            <a:off x="6278727" y="2834640"/>
+            <a:ext cx="5364327" cy="960120"/>
+          </a:xfrm>
+          <a:prstGeom prst="roundRect">
+            <a:avLst>
+              <a:gd name="adj" fmla="val 8000"/>
+            </a:avLst>
+          </a:prstGeom>
+          <a:solidFill>
+            <a:srgbClr val="EEF4F7"/>
+          </a:solidFill>
+          <a:ln>
+            <a:noFill/>
+          </a:ln>
+          <a:effectLst/>
+        </p:spPr>
+        <p:style>
+          <a:lnRef idx="1">
+            <a:schemeClr val="accent1"/>
+          </a:lnRef>
+          <a:fillRef idx="3">
+            <a:schemeClr val="accent1"/>
+          </a:fillRef>
+          <a:effectRef idx="2">
+            <a:schemeClr val="accent1"/>
+          </a:effectRef>
+          <a:fontRef idx="minor">
+            <a:schemeClr val="lt1"/>
+          </a:fontRef>
+        </p:style>
+        <p:txBody>
+          <a:bodyPr rtlCol="0" anchor="ctr"/>
+          <a:lstStyle/>
+          <a:p>
+            <a:pPr algn="ctr"/>
+          </a:p>
+        </p:txBody>
+      </p:sp>
+      <p:sp>
+        <p:nvSpPr>
+          <p:cNvPr id="15" name="Oval 14"/>
+          <p:cNvSpPr/>
+          <p:nvPr/>
+        </p:nvSpPr>
+        <p:spPr>
+          <a:xfrm>
+            <a:off x="6461607" y="3086100"/>
+            <a:ext cx="457200" cy="457200"/>
+          </a:xfrm>
+          <a:prstGeom prst="ellipse">
+            <a:avLst/>
+          </a:prstGeom>
+          <a:solidFill>
+            <a:srgbClr val="0B3C5D"/>
+          </a:solidFill>
+          <a:ln>
+            <a:noFill/>
+          </a:ln>
+          <a:effectLst/>
+        </p:spPr>
+        <p:style>
+          <a:lnRef idx="1">
+            <a:schemeClr val="accent1"/>
+          </a:lnRef>
+          <a:fillRef idx="3">
+            <a:schemeClr val="accent1"/>
+          </a:fillRef>
+          <a:effectRef idx="2">
+            <a:schemeClr val="accent1"/>
+          </a:effectRef>
+          <a:fontRef idx="minor">
+            <a:schemeClr val="lt1"/>
+          </a:fontRef>
+        </p:style>
+        <p:txBody>
+          <a:bodyPr rtlCol="0" anchor="ctr" lIns="0" rIns="0" tIns="0" bIns="0"/>
+          <a:lstStyle/>
+          <a:p>
+            <a:pPr algn="ctr"/>
+            <a:r>
+              <a:rPr sz="1600" b="1">
+                <a:solidFill>
+                  <a:srgbClr val="FFFFFF"/>
+                </a:solidFill>
+                <a:latin typeface="Microsoft YaHei"/>
+              </a:rPr>
+              <a:t>§</a:t>
+            </a:r>
+          </a:p>
+        </p:txBody>
+      </p:sp>
+      <p:sp>
+        <p:nvSpPr>
+          <p:cNvPr id="16" name="TextBox 15"/>
+          <p:cNvSpPr txBox="1"/>
+          <p:nvPr/>
+        </p:nvSpPr>
+        <p:spPr>
+          <a:xfrm>
+            <a:off x="7101687" y="2926080"/>
+            <a:ext cx="4358487" cy="777240"/>
+          </a:xfrm>
+          <a:prstGeom prst="rect">
+            <a:avLst/>
+          </a:prstGeom>
+          <a:noFill/>
+        </p:spPr>
+        <p:txBody>
+          <a:bodyPr wrap="square" anchor="ctr" lIns="0" rIns="0" tIns="0" bIns="0">
+            <a:spAutoFit/>
+          </a:bodyPr>
+          <a:lstStyle/>
+          <a:p>
+            <a:pPr algn="l"/>
+            <a:r>
+              <a:rPr sz="1400" b="0">
+                <a:solidFill>
+                  <a:srgbClr val="222B33"/>
+                </a:solidFill>
+                <a:latin typeface="Microsoft YaHei"/>
+              </a:rPr>
+              <a:t>《高等学校实验室安全规范》（教科信厅函〔2023〕5 号，以现行文本为准）：实验人员按实验风险穿戴防护用品</a:t>
+            </a:r>
+          </a:p>
+        </p:txBody>
+      </p:sp>
+      <p:sp>
+        <p:nvSpPr>
+          <p:cNvPr id="17" name="Rounded Rectangle 16"/>
+          <p:cNvSpPr/>
+          <p:nvPr/>
+        </p:nvSpPr>
+        <p:spPr>
+          <a:xfrm>
+            <a:off x="548640" y="3931920"/>
+            <a:ext cx="5364327" cy="960120"/>
+          </a:xfrm>
+          <a:prstGeom prst="roundRect">
+            <a:avLst>
+              <a:gd name="adj" fmla="val 8000"/>
+            </a:avLst>
+          </a:prstGeom>
+          <a:solidFill>
+            <a:srgbClr val="EEF4F7"/>
+          </a:solidFill>
+          <a:ln>
+            <a:noFill/>
+          </a:ln>
+          <a:effectLst/>
+        </p:spPr>
+        <p:style>
+          <a:lnRef idx="1">
+            <a:schemeClr val="accent1"/>
+          </a:lnRef>
+          <a:fillRef idx="3">
+            <a:schemeClr val="accent1"/>
+          </a:fillRef>
+          <a:effectRef idx="2">
+            <a:schemeClr val="accent1"/>
+          </a:effectRef>
+          <a:fontRef idx="minor">
+            <a:schemeClr val="lt1"/>
+          </a:fontRef>
+        </p:style>
+        <p:txBody>
+          <a:bodyPr rtlCol="0" anchor="ctr"/>
+          <a:lstStyle/>
+          <a:p>
+            <a:pPr algn="ctr"/>
+          </a:p>
+        </p:txBody>
+      </p:sp>
+      <p:sp>
+        <p:nvSpPr>
+          <p:cNvPr id="18" name="Oval 17"/>
+          <p:cNvSpPr/>
+          <p:nvPr/>
+        </p:nvSpPr>
+        <p:spPr>
+          <a:xfrm>
+            <a:off x="731520" y="4183380"/>
+            <a:ext cx="457200" cy="457200"/>
+          </a:xfrm>
+          <a:prstGeom prst="ellipse">
+            <a:avLst/>
+          </a:prstGeom>
+          <a:solidFill>
+            <a:srgbClr val="0B3C5D"/>
+          </a:solidFill>
+          <a:ln>
+            <a:noFill/>
+          </a:ln>
+          <a:effectLst/>
+        </p:spPr>
+        <p:style>
+          <a:lnRef idx="1">
+            <a:schemeClr val="accent1"/>
+          </a:lnRef>
+          <a:fillRef idx="3">
+            <a:schemeClr val="accent1"/>
+          </a:fillRef>
+          <a:effectRef idx="2">
+            <a:schemeClr val="accent1"/>
+          </a:effectRef>
+          <a:fontRef idx="minor">
+            <a:schemeClr val="lt1"/>
+          </a:fontRef>
+        </p:style>
+        <p:txBody>
+          <a:bodyPr rtlCol="0" anchor="ctr" lIns="0" rIns="0" tIns="0" bIns="0"/>
+          <a:lstStyle/>
+          <a:p>
+            <a:pPr algn="ctr"/>
+            <a:r>
+              <a:rPr sz="1600" b="1">
+                <a:solidFill>
+                  <a:srgbClr val="FFFFFF"/>
+                </a:solidFill>
+                <a:latin typeface="Microsoft YaHei"/>
+              </a:rPr>
+              <a:t>§</a:t>
+            </a:r>
+          </a:p>
+        </p:txBody>
+      </p:sp>
+      <p:sp>
+        <p:nvSpPr>
+          <p:cNvPr id="19" name="TextBox 18"/>
+          <p:cNvSpPr txBox="1"/>
+          <p:nvPr/>
+        </p:nvSpPr>
+        <p:spPr>
+          <a:xfrm>
+            <a:off x="1371600" y="4023360"/>
+            <a:ext cx="4358487" cy="777240"/>
+          </a:xfrm>
+          <a:prstGeom prst="rect">
+            <a:avLst/>
+          </a:prstGeom>
+          <a:noFill/>
+        </p:spPr>
+        <p:txBody>
+          <a:bodyPr wrap="square" anchor="ctr" lIns="0" rIns="0" tIns="0" bIns="0">
+            <a:spAutoFit/>
+          </a:bodyPr>
+          <a:lstStyle/>
+          <a:p>
+            <a:pPr algn="l"/>
+            <a:r>
+              <a:rPr sz="1400" b="0">
+                <a:solidFill>
+                  <a:srgbClr val="222B33"/>
+                </a:solidFill>
+                <a:latin typeface="Microsoft YaHei"/>
+              </a:rPr>
+              <a:t>《病原微生物实验室生物安全管理条例》及 GB 19489-2008（以现行文本为准）《实验室 生物安全通用要求》：生物实验室防护服的管理与消毒</a:t>
+            </a:r>
+          </a:p>
+        </p:txBody>
+      </p:sp>
+      <p:sp>
+        <p:nvSpPr>
+          <p:cNvPr id="20" name="Rounded Rectangle 19"/>
+          <p:cNvSpPr/>
+          <p:nvPr/>
+        </p:nvSpPr>
+        <p:spPr>
+          <a:xfrm>
+            <a:off x="6278727" y="3931920"/>
+            <a:ext cx="5364327" cy="960120"/>
+          </a:xfrm>
+          <a:prstGeom prst="roundRect">
+            <a:avLst>
+              <a:gd name="adj" fmla="val 8000"/>
+            </a:avLst>
+          </a:prstGeom>
+          <a:solidFill>
+            <a:srgbClr val="EEF4F7"/>
+          </a:solidFill>
+          <a:ln>
+            <a:noFill/>
+          </a:ln>
+          <a:effectLst/>
+        </p:spPr>
+        <p:style>
+          <a:lnRef idx="1">
+            <a:schemeClr val="accent1"/>
+          </a:lnRef>
+          <a:fillRef idx="3">
+            <a:schemeClr val="accent1"/>
+          </a:fillRef>
+          <a:effectRef idx="2">
+            <a:schemeClr val="accent1"/>
+          </a:effectRef>
+          <a:fontRef idx="minor">
+            <a:schemeClr val="lt1"/>
+          </a:fontRef>
+        </p:style>
+        <p:txBody>
+          <a:bodyPr rtlCol="0" anchor="ctr"/>
+          <a:lstStyle/>
+          <a:p>
+            <a:pPr algn="ctr"/>
+          </a:p>
+        </p:txBody>
+      </p:sp>
+      <p:sp>
+        <p:nvSpPr>
+          <p:cNvPr id="21" name="Oval 20"/>
+          <p:cNvSpPr/>
+          <p:nvPr/>
+        </p:nvSpPr>
+        <p:spPr>
+          <a:xfrm>
+            <a:off x="6461607" y="4183380"/>
+            <a:ext cx="457200" cy="457200"/>
+          </a:xfrm>
+          <a:prstGeom prst="ellipse">
+            <a:avLst/>
+          </a:prstGeom>
+          <a:solidFill>
+            <a:srgbClr val="0B3C5D"/>
+          </a:solidFill>
+          <a:ln>
+            <a:noFill/>
+          </a:ln>
+          <a:effectLst/>
+        </p:spPr>
+        <p:style>
+          <a:lnRef idx="1">
+            <a:schemeClr val="accent1"/>
+          </a:lnRef>
+          <a:fillRef idx="3">
+            <a:schemeClr val="accent1"/>
+          </a:fillRef>
+          <a:effectRef idx="2">
+            <a:schemeClr val="accent1"/>
+          </a:effectRef>
+          <a:fontRef idx="minor">
+            <a:schemeClr val="lt1"/>
+          </a:fontRef>
+        </p:style>
+        <p:txBody>
+          <a:bodyPr rtlCol="0" anchor="ctr" lIns="0" rIns="0" tIns="0" bIns="0"/>
+          <a:lstStyle/>
+          <a:p>
+            <a:pPr algn="ctr"/>
+            <a:r>
+              <a:rPr sz="1600" b="1">
+                <a:solidFill>
+                  <a:srgbClr val="FFFFFF"/>
+                </a:solidFill>
+                <a:latin typeface="Microsoft YaHei"/>
+              </a:rPr>
+              <a:t>§</a:t>
+            </a:r>
+          </a:p>
+        </p:txBody>
+      </p:sp>
+      <p:sp>
+        <p:nvSpPr>
+          <p:cNvPr id="22" name="TextBox 21"/>
+          <p:cNvSpPr txBox="1"/>
+          <p:nvPr/>
+        </p:nvSpPr>
+        <p:spPr>
+          <a:xfrm>
+            <a:off x="7101687" y="4023360"/>
+            <a:ext cx="4358487" cy="777240"/>
+          </a:xfrm>
+          <a:prstGeom prst="rect">
+            <a:avLst/>
+          </a:prstGeom>
+          <a:noFill/>
+        </p:spPr>
+        <p:txBody>
+          <a:bodyPr wrap="square" anchor="ctr" lIns="0" rIns="0" tIns="0" bIns="0">
+            <a:spAutoFit/>
+          </a:bodyPr>
+          <a:lstStyle/>
+          <a:p>
+            <a:pPr algn="l"/>
+            <a:r>
+              <a:rPr sz="1400" b="0">
+                <a:solidFill>
+                  <a:srgbClr val="222B33"/>
+                </a:solidFill>
+                <a:latin typeface="Microsoft YaHei"/>
+              </a:rPr>
+              <a:t>GB 38144-2025（以现行文本为准）《眼面部防护 应急喷淋和洗眼设备》</a:t>
+            </a:r>
+          </a:p>
+        </p:txBody>
+      </p:sp>
+      <p:sp>
+        <p:nvSpPr>
+          <p:cNvPr id="23" name="Rounded Rectangle 22"/>
+          <p:cNvSpPr/>
+          <p:nvPr/>
+        </p:nvSpPr>
+        <p:spPr>
+          <a:xfrm>
+            <a:off x="548640" y="5029200"/>
+            <a:ext cx="5364327" cy="960120"/>
+          </a:xfrm>
+          <a:prstGeom prst="roundRect">
+            <a:avLst>
+              <a:gd name="adj" fmla="val 8000"/>
+            </a:avLst>
+          </a:prstGeom>
+          <a:solidFill>
+            <a:srgbClr val="EEF4F7"/>
+          </a:solidFill>
+          <a:ln>
+            <a:noFill/>
+          </a:ln>
+          <a:effectLst/>
+        </p:spPr>
+        <p:style>
+          <a:lnRef idx="1">
+            <a:schemeClr val="accent1"/>
+          </a:lnRef>
+          <a:fillRef idx="3">
+            <a:schemeClr val="accent1"/>
+          </a:fillRef>
+          <a:effectRef idx="2">
+            <a:schemeClr val="accent1"/>
+          </a:effectRef>
+          <a:fontRef idx="minor">
+            <a:schemeClr val="lt1"/>
+          </a:fontRef>
+        </p:style>
+        <p:txBody>
+          <a:bodyPr rtlCol="0" anchor="ctr"/>
+          <a:lstStyle/>
+          <a:p>
+            <a:pPr algn="ctr"/>
+          </a:p>
+        </p:txBody>
+      </p:sp>
+      <p:sp>
+        <p:nvSpPr>
+          <p:cNvPr id="24" name="Oval 23"/>
+          <p:cNvSpPr/>
+          <p:nvPr/>
+        </p:nvSpPr>
+        <p:spPr>
+          <a:xfrm>
+            <a:off x="731520" y="5280660"/>
+            <a:ext cx="457200" cy="457200"/>
+          </a:xfrm>
+          <a:prstGeom prst="ellipse">
+            <a:avLst/>
+          </a:prstGeom>
+          <a:solidFill>
+            <a:srgbClr val="0B3C5D"/>
+          </a:solidFill>
+          <a:ln>
+            <a:noFill/>
+          </a:ln>
+          <a:effectLst/>
+        </p:spPr>
+        <p:style>
+          <a:lnRef idx="1">
+            <a:schemeClr val="accent1"/>
+          </a:lnRef>
+          <a:fillRef idx="3">
+            <a:schemeClr val="accent1"/>
+          </a:fillRef>
+          <a:effectRef idx="2">
+            <a:schemeClr val="accent1"/>
+          </a:effectRef>
+          <a:fontRef idx="minor">
+            <a:schemeClr val="lt1"/>
+          </a:fontRef>
+        </p:style>
+        <p:txBody>
+          <a:bodyPr rtlCol="0" anchor="ctr" lIns="0" rIns="0" tIns="0" bIns="0"/>
+          <a:lstStyle/>
+          <a:p>
+            <a:pPr algn="ctr"/>
+            <a:r>
+              <a:rPr sz="1600" b="1">
+                <a:solidFill>
+                  <a:srgbClr val="FFFFFF"/>
+                </a:solidFill>
+                <a:latin typeface="Microsoft YaHei"/>
+              </a:rPr>
+              <a:t>§</a:t>
+            </a:r>
+          </a:p>
+        </p:txBody>
+      </p:sp>
+      <p:sp>
+        <p:nvSpPr>
+          <p:cNvPr id="25" name="TextBox 24"/>
+          <p:cNvSpPr txBox="1"/>
+          <p:nvPr/>
+        </p:nvSpPr>
+        <p:spPr>
+          <a:xfrm>
+            <a:off x="1371600" y="5120640"/>
+            <a:ext cx="4358487" cy="777240"/>
+          </a:xfrm>
+          <a:prstGeom prst="rect">
+            <a:avLst/>
+          </a:prstGeom>
+          <a:noFill/>
+        </p:spPr>
+        <p:txBody>
+          <a:bodyPr wrap="square" anchor="ctr" lIns="0" rIns="0" tIns="0" bIns="0">
+            <a:spAutoFit/>
+          </a:bodyPr>
+          <a:lstStyle/>
+          <a:p>
+            <a:pPr algn="l"/>
+            <a:r>
+              <a:rPr sz="1400" b="0">
+                <a:solidFill>
+                  <a:srgbClr val="222B33"/>
+                </a:solidFill>
+                <a:latin typeface="Microsoft YaHei"/>
+              </a:rPr>
+              <a:t>本校实验室安全管理制度和实验服管理、清洗规定（以本校规定为准）</a:t>
+            </a:r>
+          </a:p>
+        </p:txBody>
+      </p:sp>
+    </p:spTree>
+  </p:cSld>
+  <p:clrMapOvr>
+    <a:masterClrMapping/>
+  </p:clrMapOvr>
+</p:sld>
+</file>
+
+<file path=ppt/slides/slide91.xml><?xml version="1.0" encoding="utf-8"?>
+<p:sld xmlns:a="http://schemas.openxmlformats.org/drawingml/2006/main" xmlns:p="http://schemas.openxmlformats.org/presentationml/2006/main" xmlns:r="http://schemas.openxmlformats.org/officeDocument/2006/relationships">
+  <p:cSld>
+    <p:bg>
+      <p:bgPr>
+        <a:solidFill>
+          <a:srgbClr val="FFFFFF"/>
+        </a:solidFill>
+        <a:effectLst/>
+      </p:bgPr>
+    </p:bg>
+    <p:spTree>
+      <p:nvGrpSpPr>
+        <p:cNvPr id="1" name=""/>
+        <p:cNvGrpSpPr/>
+        <p:nvPr/>
+      </p:nvGrpSpPr>
+      <p:grpSpPr/>
+      <p:sp>
+        <p:nvSpPr>
+          <p:cNvPr id="2" name="TextBox 1"/>
+          <p:cNvSpPr txBox="1"/>
+          <p:nvPr/>
+        </p:nvSpPr>
+        <p:spPr>
+          <a:xfrm>
+            <a:off x="548640" y="320040"/>
+            <a:ext cx="8229600" cy="320040"/>
+          </a:xfrm>
+          <a:prstGeom prst="rect">
+            <a:avLst/>
+          </a:prstGeom>
+          <a:noFill/>
+        </p:spPr>
+        <p:txBody>
+          <a:bodyPr wrap="square" anchor="t" lIns="0" rIns="0" tIns="0" bIns="0">
+            <a:spAutoFit/>
+          </a:bodyPr>
+          <a:lstStyle/>
+          <a:p>
+            <a:pPr algn="l"/>
+            <a:r>
+              <a:rPr sz="1200" b="1">
+                <a:solidFill>
+                  <a:srgbClr val="1D7A8C"/>
+                </a:solidFill>
+                <a:latin typeface="Microsoft YaHei"/>
+              </a:rPr>
+              <a:t>024 · 实验服与防护服</a:t>
+            </a:r>
+          </a:p>
+        </p:txBody>
+      </p:sp>
+      <p:sp>
+        <p:nvSpPr>
+          <p:cNvPr id="3" name="TextBox 2"/>
+          <p:cNvSpPr txBox="1"/>
+          <p:nvPr/>
+        </p:nvSpPr>
+        <p:spPr>
+          <a:xfrm>
+            <a:off x="548640" y="640080"/>
+            <a:ext cx="11094415" cy="731520"/>
+          </a:xfrm>
+          <a:prstGeom prst="rect">
+            <a:avLst/>
+          </a:prstGeom>
+          <a:noFill/>
+        </p:spPr>
+        <p:txBody>
+          <a:bodyPr wrap="square" anchor="t" lIns="0" rIns="0" tIns="0" bIns="0">
+            <a:spAutoFit/>
+          </a:bodyPr>
+          <a:lstStyle/>
+          <a:p>
+            <a:pPr algn="l"/>
+            <a:r>
+              <a:rPr sz="3000" b="1">
+                <a:solidFill>
+                  <a:srgbClr val="0B3C5D"/>
+                </a:solidFill>
+                <a:latin typeface="Microsoft YaHei"/>
+              </a:rPr>
+              <a:t>实验服是防护用品，进门就穿</a:t>
+            </a:r>
+          </a:p>
+        </p:txBody>
+      </p:sp>
+      <p:sp>
+        <p:nvSpPr>
+          <p:cNvPr id="4" name="TextBox 3"/>
+          <p:cNvSpPr txBox="1"/>
+          <p:nvPr/>
+        </p:nvSpPr>
+        <p:spPr>
+          <a:xfrm>
+            <a:off x="548640" y="6446520"/>
+            <a:ext cx="7315200" cy="274320"/>
+          </a:xfrm>
+          <a:prstGeom prst="rect">
+            <a:avLst/>
+          </a:prstGeom>
+          <a:noFill/>
+        </p:spPr>
+        <p:txBody>
+          <a:bodyPr wrap="square" anchor="t" lIns="0" rIns="0" tIns="0" bIns="0">
+            <a:spAutoFit/>
+          </a:bodyPr>
+          <a:lstStyle/>
+          <a:p>
+            <a:pPr algn="l"/>
+            <a:r>
+              <a:rPr sz="1000" b="0">
+                <a:solidFill>
+                  <a:srgbClr val="5F6B75"/>
+                </a:solidFill>
+                <a:latin typeface="Microsoft YaHei"/>
+              </a:rPr>
+              <a:t>《高校实验室安全》 024 实验服与防护服</a:t>
+            </a:r>
+          </a:p>
+        </p:txBody>
+      </p:sp>
+      <p:sp>
+        <p:nvSpPr>
+          <p:cNvPr id="5" name="Oval 4"/>
+          <p:cNvSpPr/>
+          <p:nvPr/>
+        </p:nvSpPr>
+        <p:spPr>
+          <a:xfrm>
+            <a:off x="10820095" y="411480"/>
+            <a:ext cx="822960" cy="822960"/>
+          </a:xfrm>
+          <a:prstGeom prst="ellipse">
+            <a:avLst/>
+          </a:prstGeom>
+          <a:solidFill>
+            <a:srgbClr val="F28C28"/>
+          </a:solidFill>
+          <a:ln>
+            <a:noFill/>
+          </a:ln>
+          <a:effectLst/>
+        </p:spPr>
+        <p:style>
+          <a:lnRef idx="1">
+            <a:schemeClr val="accent1"/>
+          </a:lnRef>
+          <a:fillRef idx="3">
+            <a:schemeClr val="accent1"/>
+          </a:fillRef>
+          <a:effectRef idx="2">
+            <a:schemeClr val="accent1"/>
+          </a:effectRef>
+          <a:fontRef idx="minor">
+            <a:schemeClr val="lt1"/>
+          </a:fontRef>
+        </p:style>
+        <p:txBody>
+          <a:bodyPr rtlCol="0" anchor="ctr" lIns="0" rIns="0" tIns="0" bIns="0"/>
+          <a:lstStyle/>
+          <a:p>
+            <a:pPr algn="ctr"/>
+            <a:r>
+              <a:rPr sz="1800" b="1">
+                <a:solidFill>
+                  <a:srgbClr val="FFFFFF"/>
+                </a:solidFill>
+                <a:latin typeface="Microsoft YaHei"/>
+              </a:rPr>
+              <a:t>K1</a:t>
+            </a:r>
+          </a:p>
+        </p:txBody>
+      </p:sp>
+      <p:sp>
+        <p:nvSpPr>
+          <p:cNvPr id="6" name="Rounded Rectangle 5"/>
+          <p:cNvSpPr/>
+          <p:nvPr/>
+        </p:nvSpPr>
+        <p:spPr>
+          <a:xfrm>
+            <a:off x="548640" y="1645920"/>
+            <a:ext cx="6656649" cy="4389120"/>
+          </a:xfrm>
+          <a:prstGeom prst="roundRect">
+            <a:avLst>
+              <a:gd name="adj" fmla="val 8000"/>
+            </a:avLst>
+          </a:prstGeom>
+          <a:solidFill>
+            <a:srgbClr val="EEF4F7"/>
+          </a:solidFill>
+          <a:ln>
+            <a:noFill/>
+          </a:ln>
+          <a:effectLst/>
+        </p:spPr>
+        <p:style>
+          <a:lnRef idx="1">
+            <a:schemeClr val="accent1"/>
+          </a:lnRef>
+          <a:fillRef idx="3">
+            <a:schemeClr val="accent1"/>
+          </a:fillRef>
+          <a:effectRef idx="2">
+            <a:schemeClr val="accent1"/>
+          </a:effectRef>
+          <a:fontRef idx="minor">
+            <a:schemeClr val="lt1"/>
+          </a:fontRef>
+        </p:style>
+        <p:txBody>
+          <a:bodyPr rtlCol="0" anchor="ctr"/>
+          <a:lstStyle/>
+          <a:p>
+            <a:pPr algn="ctr"/>
+          </a:p>
+        </p:txBody>
+      </p:sp>
+      <p:sp>
+        <p:nvSpPr>
+          <p:cNvPr id="7" name="TextBox 6"/>
+          <p:cNvSpPr txBox="1"/>
+          <p:nvPr/>
+        </p:nvSpPr>
+        <p:spPr>
+          <a:xfrm>
+            <a:off x="914400" y="1874519"/>
+            <a:ext cx="2743200" cy="365760"/>
+          </a:xfrm>
+          <a:prstGeom prst="rect">
+            <a:avLst/>
+          </a:prstGeom>
+          <a:noFill/>
+        </p:spPr>
+        <p:txBody>
+          <a:bodyPr wrap="square" anchor="t" lIns="0" rIns="0" tIns="0" bIns="0">
+            <a:spAutoFit/>
+          </a:bodyPr>
+          <a:lstStyle/>
+          <a:p>
+            <a:pPr algn="l"/>
+            <a:r>
+              <a:rPr sz="1600" b="1">
+                <a:solidFill>
+                  <a:srgbClr val="1D7A8C"/>
+                </a:solidFill>
+                <a:latin typeface="Microsoft YaHei"/>
+              </a:rPr>
+              <a:t>要点</a:t>
+            </a:r>
+          </a:p>
+        </p:txBody>
+      </p:sp>
+      <p:sp>
+        <p:nvSpPr>
+          <p:cNvPr id="8" name="TextBox 7"/>
+          <p:cNvSpPr txBox="1"/>
+          <p:nvPr/>
+        </p:nvSpPr>
+        <p:spPr>
+          <a:xfrm>
+            <a:off x="914400" y="2377440"/>
+            <a:ext cx="5925129" cy="2267712"/>
+          </a:xfrm>
+          <a:prstGeom prst="rect">
+            <a:avLst/>
+          </a:prstGeom>
+          <a:noFill/>
+        </p:spPr>
+        <p:txBody>
+          <a:bodyPr wrap="square" lIns="0" rIns="0" tIns="0" bIns="0">
+            <a:spAutoFit/>
+          </a:bodyPr>
+          <a:lstStyle/>
+          <a:p>
+            <a:pPr>
+              <a:spcAft>
+                <a:spcPts val="1000"/>
+              </a:spcAft>
+            </a:pPr>
+            <a:r>
+              <a:rPr sz="2000">
+                <a:solidFill>
+                  <a:srgbClr val="222B33"/>
+                </a:solidFill>
+                <a:latin typeface="Microsoft YaHei"/>
+              </a:rPr>
+              <a:t>▪ 实验服是个人防护用品，意外溅洒时替你挡一下</a:t>
+            </a:r>
+          </a:p>
+          <a:p>
+            <a:pPr>
+              <a:spcAft>
+                <a:spcPts val="1000"/>
+              </a:spcAft>
+            </a:pPr>
+            <a:r>
+              <a:rPr sz="2000">
+                <a:solidFill>
+                  <a:srgbClr val="222B33"/>
+                </a:solidFill>
+                <a:latin typeface="Microsoft YaHei"/>
+              </a:rPr>
+              <a:t>▪ 溅出的液滴，先落在实验服上</a:t>
+            </a:r>
+          </a:p>
+          <a:p>
+            <a:pPr>
+              <a:spcAft>
+                <a:spcPts val="1000"/>
+              </a:spcAft>
+            </a:pPr>
+            <a:r>
+              <a:rPr sz="2000">
+                <a:solidFill>
+                  <a:srgbClr val="222B33"/>
+                </a:solidFill>
+                <a:latin typeface="Microsoft YaHei"/>
+              </a:rPr>
+              <a:t>▪ 一进实验室，就穿上实验服</a:t>
+            </a:r>
+          </a:p>
+          <a:p>
+            <a:pPr>
+              <a:spcAft>
+                <a:spcPts val="1000"/>
+              </a:spcAft>
+            </a:pPr>
+            <a:r>
+              <a:rPr sz="2000">
+                <a:solidFill>
+                  <a:srgbClr val="222B33"/>
+                </a:solidFill>
+                <a:latin typeface="Microsoft YaHei"/>
+              </a:rPr>
+              <a:t>▪ 花钱不多，却能大大提高安全</a:t>
+            </a:r>
+          </a:p>
+        </p:txBody>
+      </p:sp>
+      <p:sp>
+        <p:nvSpPr>
+          <p:cNvPr id="9" name="TextBox 8"/>
+          <p:cNvSpPr txBox="1"/>
+          <p:nvPr/>
+        </p:nvSpPr>
+        <p:spPr>
+          <a:xfrm>
+            <a:off x="914400" y="4782312"/>
+            <a:ext cx="5925129" cy="320040"/>
+          </a:xfrm>
+          <a:prstGeom prst="rect">
+            <a:avLst/>
+          </a:prstGeom>
+          <a:noFill/>
+        </p:spPr>
+        <p:txBody>
+          <a:bodyPr wrap="square" anchor="t" lIns="0" rIns="0" tIns="0" bIns="0">
+            <a:spAutoFit/>
+          </a:bodyPr>
+          <a:lstStyle/>
+          <a:p>
+            <a:pPr algn="l"/>
+            <a:r>
+              <a:rPr sz="1300" b="1">
+                <a:solidFill>
+                  <a:srgbClr val="1D7A8C"/>
+                </a:solidFill>
+                <a:latin typeface="Microsoft YaHei"/>
+              </a:rPr>
+              <a:t>说明</a:t>
+            </a:r>
+          </a:p>
+        </p:txBody>
+      </p:sp>
+      <p:sp>
+        <p:nvSpPr>
+          <p:cNvPr id="10" name="TextBox 9"/>
+          <p:cNvSpPr txBox="1"/>
+          <p:nvPr/>
+        </p:nvSpPr>
+        <p:spPr>
+          <a:xfrm>
+            <a:off x="914400" y="5148072"/>
+            <a:ext cx="5925129" cy="612648"/>
+          </a:xfrm>
+          <a:prstGeom prst="rect">
+            <a:avLst/>
+          </a:prstGeom>
+          <a:noFill/>
+        </p:spPr>
+        <p:txBody>
+          <a:bodyPr wrap="square" anchor="t" lIns="0" rIns="0" tIns="0" bIns="0">
+            <a:spAutoFit/>
+          </a:bodyPr>
+          <a:lstStyle/>
+          <a:p>
+            <a:pPr algn="l"/>
+            <a:r>
+              <a:rPr sz="1400" b="0">
+                <a:solidFill>
+                  <a:srgbClr val="5F6B75"/>
+                </a:solidFill>
+                <a:latin typeface="Microsoft YaHei"/>
+              </a:rPr>
+              <a:t>实验服不是“工作制服”，而是个人防护用品：意外溅洒时，液滴、粉末先落在实验服上，而不是直接接触皮肤和自己的衣服，为脱下、冲洗争取时间。</a:t>
+            </a:r>
+          </a:p>
+        </p:txBody>
+      </p:sp>
+      <p:sp>
+        <p:nvSpPr>
+          <p:cNvPr id="11" name="Rounded Rectangle 10"/>
+          <p:cNvSpPr/>
+          <p:nvPr/>
+        </p:nvSpPr>
+        <p:spPr>
+          <a:xfrm>
+            <a:off x="7571049" y="1645920"/>
+            <a:ext cx="4072006" cy="4389120"/>
+          </a:xfrm>
+          <a:prstGeom prst="roundRect">
+            <a:avLst>
+              <a:gd name="adj" fmla="val 8000"/>
+            </a:avLst>
+          </a:prstGeom>
+          <a:solidFill>
+            <a:srgbClr val="FBECEA"/>
+          </a:solidFill>
+          <a:ln>
+            <a:noFill/>
+          </a:ln>
+          <a:effectLst/>
+        </p:spPr>
+        <p:style>
+          <a:lnRef idx="1">
+            <a:schemeClr val="accent1"/>
+          </a:lnRef>
+          <a:fillRef idx="3">
+            <a:schemeClr val="accent1"/>
+          </a:fillRef>
+          <a:effectRef idx="2">
+            <a:schemeClr val="accent1"/>
+          </a:effectRef>
+          <a:fontRef idx="minor">
+            <a:schemeClr val="lt1"/>
+          </a:fontRef>
+        </p:style>
+        <p:txBody>
+          <a:bodyPr rtlCol="0" anchor="ctr"/>
+          <a:lstStyle/>
+          <a:p>
+            <a:pPr algn="ctr"/>
+          </a:p>
+        </p:txBody>
+      </p:sp>
+      <p:sp>
+        <p:nvSpPr>
+          <p:cNvPr id="12" name="Oval 11"/>
+          <p:cNvSpPr/>
+          <p:nvPr/>
+        </p:nvSpPr>
+        <p:spPr>
+          <a:xfrm>
+            <a:off x="7936809" y="1828800"/>
+            <a:ext cx="457200" cy="457200"/>
+          </a:xfrm>
+          <a:prstGeom prst="ellipse">
+            <a:avLst/>
+          </a:prstGeom>
+          <a:solidFill>
+            <a:srgbClr val="C0392B"/>
+          </a:solidFill>
+          <a:ln>
+            <a:noFill/>
+          </a:ln>
+          <a:effectLst/>
+        </p:spPr>
+        <p:style>
+          <a:lnRef idx="1">
+            <a:schemeClr val="accent1"/>
+          </a:lnRef>
+          <a:fillRef idx="3">
+            <a:schemeClr val="accent1"/>
+          </a:fillRef>
+          <a:effectRef idx="2">
+            <a:schemeClr val="accent1"/>
+          </a:effectRef>
+          <a:fontRef idx="minor">
+            <a:schemeClr val="lt1"/>
+          </a:fontRef>
+        </p:style>
+        <p:txBody>
+          <a:bodyPr rtlCol="0" anchor="ctr" lIns="0" rIns="0" tIns="0" bIns="0"/>
+          <a:lstStyle/>
+          <a:p>
+            <a:pPr algn="ctr"/>
+            <a:r>
+              <a:rPr sz="1600" b="1">
+                <a:solidFill>
+                  <a:srgbClr val="FFFFFF"/>
+                </a:solidFill>
+                <a:latin typeface="Microsoft YaHei"/>
+              </a:rPr>
+              <a:t>✕</a:t>
+            </a:r>
+          </a:p>
+        </p:txBody>
+      </p:sp>
+      <p:sp>
+        <p:nvSpPr>
+          <p:cNvPr id="13" name="TextBox 12"/>
+          <p:cNvSpPr txBox="1"/>
+          <p:nvPr/>
+        </p:nvSpPr>
+        <p:spPr>
+          <a:xfrm>
+            <a:off x="8531169" y="1874519"/>
+            <a:ext cx="2791846" cy="365760"/>
+          </a:xfrm>
+          <a:prstGeom prst="rect">
+            <a:avLst/>
+          </a:prstGeom>
+          <a:noFill/>
+        </p:spPr>
+        <p:txBody>
+          <a:bodyPr wrap="square" anchor="t" lIns="0" rIns="0" tIns="0" bIns="0">
+            <a:spAutoFit/>
+          </a:bodyPr>
+          <a:lstStyle/>
+          <a:p>
+            <a:pPr algn="l"/>
+            <a:r>
+              <a:rPr sz="1600" b="1">
+                <a:solidFill>
+                  <a:srgbClr val="C0392B"/>
+                </a:solidFill>
+                <a:latin typeface="Microsoft YaHei"/>
+              </a:rPr>
+              <a:t>常见错误</a:t>
+            </a:r>
+          </a:p>
+        </p:txBody>
+      </p:sp>
+      <p:sp>
+        <p:nvSpPr>
+          <p:cNvPr id="14" name="TextBox 13"/>
+          <p:cNvSpPr txBox="1"/>
+          <p:nvPr/>
+        </p:nvSpPr>
+        <p:spPr>
+          <a:xfrm>
+            <a:off x="7936809" y="2514600"/>
+            <a:ext cx="3340486" cy="3291840"/>
+          </a:xfrm>
+          <a:prstGeom prst="rect">
+            <a:avLst/>
+          </a:prstGeom>
+          <a:noFill/>
+        </p:spPr>
+        <p:txBody>
+          <a:bodyPr wrap="square" lIns="0" rIns="0" tIns="0" bIns="0">
+            <a:spAutoFit/>
+          </a:bodyPr>
+          <a:lstStyle/>
+          <a:p>
+            <a:pPr>
+              <a:spcAft>
+                <a:spcPts val="1000"/>
+              </a:spcAft>
+            </a:pPr>
+            <a:r>
+              <a:rPr sz="1500">
+                <a:solidFill>
+                  <a:srgbClr val="222B33"/>
+                </a:solidFill>
+                <a:latin typeface="Microsoft YaHei"/>
+              </a:rPr>
+              <a:t>▪ 只做简单操作就不穿实验服</a:t>
+            </a:r>
+          </a:p>
+          <a:p>
+            <a:pPr>
+              <a:spcAft>
+                <a:spcPts val="1000"/>
+              </a:spcAft>
+            </a:pPr>
+            <a:r>
+              <a:rPr sz="1500">
+                <a:solidFill>
+                  <a:srgbClr val="222B33"/>
+                </a:solidFill>
+                <a:latin typeface="Microsoft YaHei"/>
+              </a:rPr>
+              <a:t>▪ 把实验服搭在椅背上，需要时才穿</a:t>
+            </a:r>
+          </a:p>
+        </p:txBody>
+      </p:sp>
+    </p:spTree>
+  </p:cSld>
+  <p:clrMapOvr>
+    <a:masterClrMapping/>
+  </p:clrMapOvr>
+</p:sld>
+</file>
+
+<file path=ppt/slides/slide92.xml><?xml version="1.0" encoding="utf-8"?>
+<p:sld xmlns:a="http://schemas.openxmlformats.org/drawingml/2006/main" xmlns:p="http://schemas.openxmlformats.org/presentationml/2006/main" xmlns:r="http://schemas.openxmlformats.org/officeDocument/2006/relationships">
+  <p:cSld>
+    <p:bg>
+      <p:bgPr>
+        <a:solidFill>
+          <a:srgbClr val="FFFFFF"/>
+        </a:solidFill>
+        <a:effectLst/>
+      </p:bgPr>
+    </p:bg>
+    <p:spTree>
+      <p:nvGrpSpPr>
+        <p:cNvPr id="1" name=""/>
+        <p:cNvGrpSpPr/>
+        <p:nvPr/>
+      </p:nvGrpSpPr>
+      <p:grpSpPr/>
+      <p:sp>
+        <p:nvSpPr>
+          <p:cNvPr id="2" name="TextBox 1"/>
+          <p:cNvSpPr txBox="1"/>
+          <p:nvPr/>
+        </p:nvSpPr>
+        <p:spPr>
+          <a:xfrm>
+            <a:off x="548640" y="320040"/>
+            <a:ext cx="8229600" cy="320040"/>
+          </a:xfrm>
+          <a:prstGeom prst="rect">
+            <a:avLst/>
+          </a:prstGeom>
+          <a:noFill/>
+        </p:spPr>
+        <p:txBody>
+          <a:bodyPr wrap="square" anchor="t" lIns="0" rIns="0" tIns="0" bIns="0">
+            <a:spAutoFit/>
+          </a:bodyPr>
+          <a:lstStyle/>
+          <a:p>
+            <a:pPr algn="l"/>
+            <a:r>
+              <a:rPr sz="1200" b="1">
+                <a:solidFill>
+                  <a:srgbClr val="1D7A8C"/>
+                </a:solidFill>
+                <a:latin typeface="Microsoft YaHei"/>
+              </a:rPr>
+              <a:t>024 · 实验服与防护服</a:t>
+            </a:r>
+          </a:p>
+        </p:txBody>
+      </p:sp>
+      <p:sp>
+        <p:nvSpPr>
+          <p:cNvPr id="3" name="TextBox 2"/>
+          <p:cNvSpPr txBox="1"/>
+          <p:nvPr/>
+        </p:nvSpPr>
+        <p:spPr>
+          <a:xfrm>
+            <a:off x="548640" y="640080"/>
+            <a:ext cx="11094415" cy="731520"/>
+          </a:xfrm>
+          <a:prstGeom prst="rect">
+            <a:avLst/>
+          </a:prstGeom>
+          <a:noFill/>
+        </p:spPr>
+        <p:txBody>
+          <a:bodyPr wrap="square" anchor="t" lIns="0" rIns="0" tIns="0" bIns="0">
+            <a:spAutoFit/>
+          </a:bodyPr>
+          <a:lstStyle/>
+          <a:p>
+            <a:pPr algn="l"/>
+            <a:r>
+              <a:rPr sz="3000" b="1">
+                <a:solidFill>
+                  <a:srgbClr val="0B3C5D"/>
+                </a:solidFill>
+                <a:latin typeface="Microsoft YaHei"/>
+              </a:rPr>
+              <a:t>实验服选棉质或阻燃材质</a:t>
+            </a:r>
+          </a:p>
+        </p:txBody>
+      </p:sp>
+      <p:sp>
+        <p:nvSpPr>
+          <p:cNvPr id="4" name="TextBox 3"/>
+          <p:cNvSpPr txBox="1"/>
+          <p:nvPr/>
+        </p:nvSpPr>
+        <p:spPr>
+          <a:xfrm>
+            <a:off x="548640" y="6446520"/>
+            <a:ext cx="7315200" cy="274320"/>
+          </a:xfrm>
+          <a:prstGeom prst="rect">
+            <a:avLst/>
+          </a:prstGeom>
+          <a:noFill/>
+        </p:spPr>
+        <p:txBody>
+          <a:bodyPr wrap="square" anchor="t" lIns="0" rIns="0" tIns="0" bIns="0">
+            <a:spAutoFit/>
+          </a:bodyPr>
+          <a:lstStyle/>
+          <a:p>
+            <a:pPr algn="l"/>
+            <a:r>
+              <a:rPr sz="1000" b="0">
+                <a:solidFill>
+                  <a:srgbClr val="5F6B75"/>
+                </a:solidFill>
+                <a:latin typeface="Microsoft YaHei"/>
+              </a:rPr>
+              <a:t>《高校实验室安全》 024 实验服与防护服</a:t>
+            </a:r>
+          </a:p>
+        </p:txBody>
+      </p:sp>
+      <p:sp>
+        <p:nvSpPr>
+          <p:cNvPr id="5" name="Oval 4"/>
+          <p:cNvSpPr/>
+          <p:nvPr/>
+        </p:nvSpPr>
+        <p:spPr>
+          <a:xfrm>
+            <a:off x="10820095" y="411480"/>
+            <a:ext cx="822960" cy="822960"/>
+          </a:xfrm>
+          <a:prstGeom prst="ellipse">
+            <a:avLst/>
+          </a:prstGeom>
+          <a:solidFill>
+            <a:srgbClr val="F28C28"/>
+          </a:solidFill>
+          <a:ln>
+            <a:noFill/>
+          </a:ln>
+          <a:effectLst/>
+        </p:spPr>
+        <p:style>
+          <a:lnRef idx="1">
+            <a:schemeClr val="accent1"/>
+          </a:lnRef>
+          <a:fillRef idx="3">
+            <a:schemeClr val="accent1"/>
+          </a:fillRef>
+          <a:effectRef idx="2">
+            <a:schemeClr val="accent1"/>
+          </a:effectRef>
+          <a:fontRef idx="minor">
+            <a:schemeClr val="lt1"/>
+          </a:fontRef>
+        </p:style>
+        <p:txBody>
+          <a:bodyPr rtlCol="0" anchor="ctr" lIns="0" rIns="0" tIns="0" bIns="0"/>
+          <a:lstStyle/>
+          <a:p>
+            <a:pPr algn="ctr"/>
+            <a:r>
+              <a:rPr sz="1800" b="1">
+                <a:solidFill>
+                  <a:srgbClr val="FFFFFF"/>
+                </a:solidFill>
+                <a:latin typeface="Microsoft YaHei"/>
+              </a:rPr>
+              <a:t>K2</a:t>
+            </a:r>
+          </a:p>
+        </p:txBody>
+      </p:sp>
+      <p:sp>
+        <p:nvSpPr>
+          <p:cNvPr id="6" name="Rounded Rectangle 5"/>
+          <p:cNvSpPr/>
+          <p:nvPr/>
+        </p:nvSpPr>
+        <p:spPr>
+          <a:xfrm>
+            <a:off x="548640" y="1645920"/>
+            <a:ext cx="6656649" cy="4389120"/>
+          </a:xfrm>
+          <a:prstGeom prst="roundRect">
+            <a:avLst>
+              <a:gd name="adj" fmla="val 8000"/>
+            </a:avLst>
+          </a:prstGeom>
+          <a:solidFill>
+            <a:srgbClr val="EEF4F7"/>
+          </a:solidFill>
+          <a:ln>
+            <a:noFill/>
+          </a:ln>
+          <a:effectLst/>
+        </p:spPr>
+        <p:style>
+          <a:lnRef idx="1">
+            <a:schemeClr val="accent1"/>
+          </a:lnRef>
+          <a:fillRef idx="3">
+            <a:schemeClr val="accent1"/>
+          </a:fillRef>
+          <a:effectRef idx="2">
+            <a:schemeClr val="accent1"/>
+          </a:effectRef>
+          <a:fontRef idx="minor">
+            <a:schemeClr val="lt1"/>
+          </a:fontRef>
+        </p:style>
+        <p:txBody>
+          <a:bodyPr rtlCol="0" anchor="ctr"/>
+          <a:lstStyle/>
+          <a:p>
+            <a:pPr algn="ctr"/>
+          </a:p>
+        </p:txBody>
+      </p:sp>
+      <p:sp>
+        <p:nvSpPr>
+          <p:cNvPr id="7" name="TextBox 6"/>
+          <p:cNvSpPr txBox="1"/>
+          <p:nvPr/>
+        </p:nvSpPr>
+        <p:spPr>
+          <a:xfrm>
+            <a:off x="914400" y="1874519"/>
+            <a:ext cx="2743200" cy="365760"/>
+          </a:xfrm>
+          <a:prstGeom prst="rect">
+            <a:avLst/>
+          </a:prstGeom>
+          <a:noFill/>
+        </p:spPr>
+        <p:txBody>
+          <a:bodyPr wrap="square" anchor="t" lIns="0" rIns="0" tIns="0" bIns="0">
+            <a:spAutoFit/>
+          </a:bodyPr>
+          <a:lstStyle/>
+          <a:p>
+            <a:pPr algn="l"/>
+            <a:r>
+              <a:rPr sz="1600" b="1">
+                <a:solidFill>
+                  <a:srgbClr val="1D7A8C"/>
+                </a:solidFill>
+                <a:latin typeface="Microsoft YaHei"/>
+              </a:rPr>
+              <a:t>要点</a:t>
+            </a:r>
+          </a:p>
+        </p:txBody>
+      </p:sp>
+      <p:sp>
+        <p:nvSpPr>
+          <p:cNvPr id="8" name="TextBox 7"/>
+          <p:cNvSpPr txBox="1"/>
+          <p:nvPr/>
+        </p:nvSpPr>
+        <p:spPr>
+          <a:xfrm>
+            <a:off x="914400" y="2377440"/>
+            <a:ext cx="5925129" cy="2267712"/>
+          </a:xfrm>
+          <a:prstGeom prst="rect">
+            <a:avLst/>
+          </a:prstGeom>
+          <a:noFill/>
+        </p:spPr>
+        <p:txBody>
+          <a:bodyPr wrap="square" lIns="0" rIns="0" tIns="0" bIns="0">
+            <a:spAutoFit/>
+          </a:bodyPr>
+          <a:lstStyle/>
+          <a:p>
+            <a:pPr>
+              <a:spcAft>
+                <a:spcPts val="1000"/>
+              </a:spcAft>
+            </a:pPr>
+            <a:r>
+              <a:rPr sz="2000">
+                <a:solidFill>
+                  <a:srgbClr val="222B33"/>
+                </a:solidFill>
+                <a:latin typeface="Microsoft YaHei"/>
+              </a:rPr>
+              <a:t>▪ 实验服选棉质或阻燃材质</a:t>
+            </a:r>
+          </a:p>
+          <a:p>
+            <a:pPr>
+              <a:spcAft>
+                <a:spcPts val="1000"/>
+              </a:spcAft>
+            </a:pPr>
+            <a:r>
+              <a:rPr sz="2000">
+                <a:solidFill>
+                  <a:srgbClr val="222B33"/>
+                </a:solidFill>
+                <a:latin typeface="Microsoft YaHei"/>
+              </a:rPr>
+              <a:t>▪ 化纤遇火会熔化，粘在皮肤上</a:t>
+            </a:r>
+          </a:p>
+          <a:p>
+            <a:pPr>
+              <a:spcAft>
+                <a:spcPts val="1000"/>
+              </a:spcAft>
+            </a:pPr>
+            <a:r>
+              <a:rPr sz="2000">
+                <a:solidFill>
+                  <a:srgbClr val="222B33"/>
+                </a:solidFill>
+                <a:latin typeface="Microsoft YaHei"/>
+              </a:rPr>
+              <a:t>▪ 实验服里面的衣服也别选化纤</a:t>
+            </a:r>
+          </a:p>
+          <a:p>
+            <a:pPr>
+              <a:spcAft>
+                <a:spcPts val="1000"/>
+              </a:spcAft>
+            </a:pPr>
+            <a:r>
+              <a:rPr sz="2000">
+                <a:solidFill>
+                  <a:srgbClr val="222B33"/>
+                </a:solidFill>
+                <a:latin typeface="Microsoft YaHei"/>
+              </a:rPr>
+              <a:t>▪ 长度过膝，长袖盖住手腕</a:t>
+            </a:r>
+          </a:p>
+        </p:txBody>
+      </p:sp>
+      <p:sp>
+        <p:nvSpPr>
+          <p:cNvPr id="9" name="TextBox 8"/>
+          <p:cNvSpPr txBox="1"/>
+          <p:nvPr/>
+        </p:nvSpPr>
+        <p:spPr>
+          <a:xfrm>
+            <a:off x="914400" y="4782312"/>
+            <a:ext cx="5925129" cy="320040"/>
+          </a:xfrm>
+          <a:prstGeom prst="rect">
+            <a:avLst/>
+          </a:prstGeom>
+          <a:noFill/>
+        </p:spPr>
+        <p:txBody>
+          <a:bodyPr wrap="square" anchor="t" lIns="0" rIns="0" tIns="0" bIns="0">
+            <a:spAutoFit/>
+          </a:bodyPr>
+          <a:lstStyle/>
+          <a:p>
+            <a:pPr algn="l"/>
+            <a:r>
+              <a:rPr sz="1300" b="1">
+                <a:solidFill>
+                  <a:srgbClr val="1D7A8C"/>
+                </a:solidFill>
+                <a:latin typeface="Microsoft YaHei"/>
+              </a:rPr>
+              <a:t>说明</a:t>
+            </a:r>
+          </a:p>
+        </p:txBody>
+      </p:sp>
+      <p:sp>
+        <p:nvSpPr>
+          <p:cNvPr id="10" name="TextBox 9"/>
+          <p:cNvSpPr txBox="1"/>
+          <p:nvPr/>
+        </p:nvSpPr>
+        <p:spPr>
+          <a:xfrm>
+            <a:off x="914400" y="5148072"/>
+            <a:ext cx="5925129" cy="612648"/>
+          </a:xfrm>
+          <a:prstGeom prst="rect">
+            <a:avLst/>
+          </a:prstGeom>
+          <a:noFill/>
+        </p:spPr>
+        <p:txBody>
+          <a:bodyPr wrap="square" anchor="t" lIns="0" rIns="0" tIns="0" bIns="0">
+            <a:spAutoFit/>
+          </a:bodyPr>
+          <a:lstStyle/>
+          <a:p>
+            <a:pPr algn="l"/>
+            <a:r>
+              <a:rPr sz="1400" b="0">
+                <a:solidFill>
+                  <a:srgbClr val="5F6B75"/>
+                </a:solidFill>
+                <a:latin typeface="Microsoft YaHei"/>
+              </a:rPr>
+              <a:t>实验服宜选棉质或阻燃材质。涤纶等化纤面料遇火、遇高温会熔化、滴落，粘在皮肤上造成严重烧伤，所以化学实验室不宜穿化纤实验服；实验服里面也尽量穿棉质衣服，不穿化纤毛衣、紧身化纤运动服。</a:t>
+            </a:r>
+          </a:p>
+        </p:txBody>
+      </p:sp>
+      <p:sp>
+        <p:nvSpPr>
+          <p:cNvPr id="11" name="Rounded Rectangle 10"/>
+          <p:cNvSpPr/>
+          <p:nvPr/>
+        </p:nvSpPr>
+        <p:spPr>
+          <a:xfrm>
+            <a:off x="7571049" y="1645920"/>
+            <a:ext cx="4072006" cy="4389120"/>
+          </a:xfrm>
+          <a:prstGeom prst="roundRect">
+            <a:avLst>
+              <a:gd name="adj" fmla="val 8000"/>
+            </a:avLst>
+          </a:prstGeom>
+          <a:solidFill>
+            <a:srgbClr val="FBECEA"/>
+          </a:solidFill>
+          <a:ln>
+            <a:noFill/>
+          </a:ln>
+          <a:effectLst/>
+        </p:spPr>
+        <p:style>
+          <a:lnRef idx="1">
+            <a:schemeClr val="accent1"/>
+          </a:lnRef>
+          <a:fillRef idx="3">
+            <a:schemeClr val="accent1"/>
+          </a:fillRef>
+          <a:effectRef idx="2">
+            <a:schemeClr val="accent1"/>
+          </a:effectRef>
+          <a:fontRef idx="minor">
+            <a:schemeClr val="lt1"/>
+          </a:fontRef>
+        </p:style>
+        <p:txBody>
+          <a:bodyPr rtlCol="0" anchor="ctr"/>
+          <a:lstStyle/>
+          <a:p>
+            <a:pPr algn="ctr"/>
+          </a:p>
+        </p:txBody>
+      </p:sp>
+      <p:sp>
+        <p:nvSpPr>
+          <p:cNvPr id="12" name="Oval 11"/>
+          <p:cNvSpPr/>
+          <p:nvPr/>
+        </p:nvSpPr>
+        <p:spPr>
+          <a:xfrm>
+            <a:off x="7936809" y="1828800"/>
+            <a:ext cx="457200" cy="457200"/>
+          </a:xfrm>
+          <a:prstGeom prst="ellipse">
+            <a:avLst/>
+          </a:prstGeom>
+          <a:solidFill>
+            <a:srgbClr val="C0392B"/>
+          </a:solidFill>
+          <a:ln>
+            <a:noFill/>
+          </a:ln>
+          <a:effectLst/>
+        </p:spPr>
+        <p:style>
+          <a:lnRef idx="1">
+            <a:schemeClr val="accent1"/>
+          </a:lnRef>
+          <a:fillRef idx="3">
+            <a:schemeClr val="accent1"/>
+          </a:fillRef>
+          <a:effectRef idx="2">
+            <a:schemeClr val="accent1"/>
+          </a:effectRef>
+          <a:fontRef idx="minor">
+            <a:schemeClr val="lt1"/>
+          </a:fontRef>
+        </p:style>
+        <p:txBody>
+          <a:bodyPr rtlCol="0" anchor="ctr" lIns="0" rIns="0" tIns="0" bIns="0"/>
+          <a:lstStyle/>
+          <a:p>
+            <a:pPr algn="ctr"/>
+            <a:r>
+              <a:rPr sz="1600" b="1">
+                <a:solidFill>
+                  <a:srgbClr val="FFFFFF"/>
+                </a:solidFill>
+                <a:latin typeface="Microsoft YaHei"/>
+              </a:rPr>
+              <a:t>✕</a:t>
+            </a:r>
+          </a:p>
+        </p:txBody>
+      </p:sp>
+      <p:sp>
+        <p:nvSpPr>
+          <p:cNvPr id="13" name="TextBox 12"/>
+          <p:cNvSpPr txBox="1"/>
+          <p:nvPr/>
+        </p:nvSpPr>
+        <p:spPr>
+          <a:xfrm>
+            <a:off x="8531169" y="1874519"/>
+            <a:ext cx="2791846" cy="365760"/>
+          </a:xfrm>
+          <a:prstGeom prst="rect">
+            <a:avLst/>
+          </a:prstGeom>
+          <a:noFill/>
+        </p:spPr>
+        <p:txBody>
+          <a:bodyPr wrap="square" anchor="t" lIns="0" rIns="0" tIns="0" bIns="0">
+            <a:spAutoFit/>
+          </a:bodyPr>
+          <a:lstStyle/>
+          <a:p>
+            <a:pPr algn="l"/>
+            <a:r>
+              <a:rPr sz="1600" b="1">
+                <a:solidFill>
+                  <a:srgbClr val="C0392B"/>
+                </a:solidFill>
+                <a:latin typeface="Microsoft YaHei"/>
+              </a:rPr>
+              <a:t>常见错误</a:t>
+            </a:r>
+          </a:p>
+        </p:txBody>
+      </p:sp>
+      <p:sp>
+        <p:nvSpPr>
+          <p:cNvPr id="14" name="TextBox 13"/>
+          <p:cNvSpPr txBox="1"/>
+          <p:nvPr/>
+        </p:nvSpPr>
+        <p:spPr>
+          <a:xfrm>
+            <a:off x="7936809" y="2514600"/>
+            <a:ext cx="3340486" cy="3291840"/>
+          </a:xfrm>
+          <a:prstGeom prst="rect">
+            <a:avLst/>
+          </a:prstGeom>
+          <a:noFill/>
+        </p:spPr>
+        <p:txBody>
+          <a:bodyPr wrap="square" lIns="0" rIns="0" tIns="0" bIns="0">
+            <a:spAutoFit/>
+          </a:bodyPr>
+          <a:lstStyle/>
+          <a:p>
+            <a:pPr>
+              <a:spcAft>
+                <a:spcPts val="1000"/>
+              </a:spcAft>
+            </a:pPr>
+            <a:r>
+              <a:rPr sz="1500">
+                <a:solidFill>
+                  <a:srgbClr val="222B33"/>
+                </a:solidFill>
+                <a:latin typeface="Microsoft YaHei"/>
+              </a:rPr>
+              <a:t>▪ 穿化纤材质的实验服做加热实验</a:t>
+            </a:r>
+          </a:p>
+          <a:p>
+            <a:pPr>
+              <a:spcAft>
+                <a:spcPts val="1000"/>
+              </a:spcAft>
+            </a:pPr>
+            <a:r>
+              <a:rPr sz="1500">
+                <a:solidFill>
+                  <a:srgbClr val="222B33"/>
+                </a:solidFill>
+                <a:latin typeface="Microsoft YaHei"/>
+              </a:rPr>
+              <a:t>▪ 实验服太短，遮不住大腿</a:t>
+            </a:r>
+          </a:p>
+        </p:txBody>
+      </p:sp>
+    </p:spTree>
+  </p:cSld>
+  <p:clrMapOvr>
+    <a:masterClrMapping/>
+  </p:clrMapOvr>
+</p:sld>
+</file>
+
+<file path=ppt/slides/slide93.xml><?xml version="1.0" encoding="utf-8"?>
+<p:sld xmlns:a="http://schemas.openxmlformats.org/drawingml/2006/main" xmlns:p="http://schemas.openxmlformats.org/presentationml/2006/main" xmlns:r="http://schemas.openxmlformats.org/officeDocument/2006/relationships">
+  <p:cSld>
+    <p:bg>
+      <p:bgPr>
+        <a:solidFill>
+          <a:srgbClr val="FFFFFF"/>
+        </a:solidFill>
+        <a:effectLst/>
+      </p:bgPr>
+    </p:bg>
+    <p:spTree>
+      <p:nvGrpSpPr>
+        <p:cNvPr id="1" name=""/>
+        <p:cNvGrpSpPr/>
+        <p:nvPr/>
+      </p:nvGrpSpPr>
+      <p:grpSpPr/>
+      <p:sp>
+        <p:nvSpPr>
+          <p:cNvPr id="2" name="TextBox 1"/>
+          <p:cNvSpPr txBox="1"/>
+          <p:nvPr/>
+        </p:nvSpPr>
+        <p:spPr>
+          <a:xfrm>
+            <a:off x="548640" y="320040"/>
+            <a:ext cx="8229600" cy="320040"/>
+          </a:xfrm>
+          <a:prstGeom prst="rect">
+            <a:avLst/>
+          </a:prstGeom>
+          <a:noFill/>
+        </p:spPr>
+        <p:txBody>
+          <a:bodyPr wrap="square" anchor="t" lIns="0" rIns="0" tIns="0" bIns="0">
+            <a:spAutoFit/>
+          </a:bodyPr>
+          <a:lstStyle/>
+          <a:p>
+            <a:pPr algn="l"/>
+            <a:r>
+              <a:rPr sz="1200" b="1">
+                <a:solidFill>
+                  <a:srgbClr val="1D7A8C"/>
+                </a:solidFill>
+                <a:latin typeface="Microsoft YaHei"/>
+              </a:rPr>
+              <a:t>024 · 实验服与防护服</a:t>
+            </a:r>
+          </a:p>
+        </p:txBody>
+      </p:sp>
+      <p:sp>
+        <p:nvSpPr>
+          <p:cNvPr id="3" name="TextBox 2"/>
+          <p:cNvSpPr txBox="1"/>
+          <p:nvPr/>
+        </p:nvSpPr>
+        <p:spPr>
+          <a:xfrm>
+            <a:off x="548640" y="640080"/>
+            <a:ext cx="11094415" cy="731520"/>
+          </a:xfrm>
+          <a:prstGeom prst="rect">
+            <a:avLst/>
+          </a:prstGeom>
+          <a:noFill/>
+        </p:spPr>
+        <p:txBody>
+          <a:bodyPr wrap="square" anchor="t" lIns="0" rIns="0" tIns="0" bIns="0">
+            <a:spAutoFit/>
+          </a:bodyPr>
+          <a:lstStyle/>
+          <a:p>
+            <a:pPr algn="l"/>
+            <a:r>
+              <a:rPr sz="3000" b="1">
+                <a:solidFill>
+                  <a:srgbClr val="0B3C5D"/>
+                </a:solidFill>
+                <a:latin typeface="Microsoft YaHei"/>
+              </a:rPr>
+              <a:t>明火、自燃试剂和火花：穿阻燃服</a:t>
+            </a:r>
+          </a:p>
+        </p:txBody>
+      </p:sp>
+      <p:sp>
+        <p:nvSpPr>
+          <p:cNvPr id="4" name="TextBox 3"/>
+          <p:cNvSpPr txBox="1"/>
+          <p:nvPr/>
+        </p:nvSpPr>
+        <p:spPr>
+          <a:xfrm>
+            <a:off x="548640" y="6446520"/>
+            <a:ext cx="7315200" cy="274320"/>
+          </a:xfrm>
+          <a:prstGeom prst="rect">
+            <a:avLst/>
+          </a:prstGeom>
+          <a:noFill/>
+        </p:spPr>
+        <p:txBody>
+          <a:bodyPr wrap="square" anchor="t" lIns="0" rIns="0" tIns="0" bIns="0">
+            <a:spAutoFit/>
+          </a:bodyPr>
+          <a:lstStyle/>
+          <a:p>
+            <a:pPr algn="l"/>
+            <a:r>
+              <a:rPr sz="1000" b="0">
+                <a:solidFill>
+                  <a:srgbClr val="5F6B75"/>
+                </a:solidFill>
+                <a:latin typeface="Microsoft YaHei"/>
+              </a:rPr>
+              <a:t>《高校实验室安全》 024 实验服与防护服</a:t>
+            </a:r>
+          </a:p>
+        </p:txBody>
+      </p:sp>
+      <p:sp>
+        <p:nvSpPr>
+          <p:cNvPr id="5" name="Oval 4"/>
+          <p:cNvSpPr/>
+          <p:nvPr/>
+        </p:nvSpPr>
+        <p:spPr>
+          <a:xfrm>
+            <a:off x="10820095" y="411480"/>
+            <a:ext cx="822960" cy="822960"/>
+          </a:xfrm>
+          <a:prstGeom prst="ellipse">
+            <a:avLst/>
+          </a:prstGeom>
+          <a:solidFill>
+            <a:srgbClr val="F28C28"/>
+          </a:solidFill>
+          <a:ln>
+            <a:noFill/>
+          </a:ln>
+          <a:effectLst/>
+        </p:spPr>
+        <p:style>
+          <a:lnRef idx="1">
+            <a:schemeClr val="accent1"/>
+          </a:lnRef>
+          <a:fillRef idx="3">
+            <a:schemeClr val="accent1"/>
+          </a:fillRef>
+          <a:effectRef idx="2">
+            <a:schemeClr val="accent1"/>
+          </a:effectRef>
+          <a:fontRef idx="minor">
+            <a:schemeClr val="lt1"/>
+          </a:fontRef>
+        </p:style>
+        <p:txBody>
+          <a:bodyPr rtlCol="0" anchor="ctr" lIns="0" rIns="0" tIns="0" bIns="0"/>
+          <a:lstStyle/>
+          <a:p>
+            <a:pPr algn="ctr"/>
+            <a:r>
+              <a:rPr sz="1800" b="1">
+                <a:solidFill>
+                  <a:srgbClr val="FFFFFF"/>
+                </a:solidFill>
+                <a:latin typeface="Microsoft YaHei"/>
+              </a:rPr>
+              <a:t>K3</a:t>
+            </a:r>
+          </a:p>
+        </p:txBody>
+      </p:sp>
+      <p:sp>
+        <p:nvSpPr>
+          <p:cNvPr id="6" name="Rounded Rectangle 5"/>
+          <p:cNvSpPr/>
+          <p:nvPr/>
+        </p:nvSpPr>
+        <p:spPr>
+          <a:xfrm>
+            <a:off x="548640" y="1645920"/>
+            <a:ext cx="6656649" cy="4389120"/>
+          </a:xfrm>
+          <a:prstGeom prst="roundRect">
+            <a:avLst>
+              <a:gd name="adj" fmla="val 8000"/>
+            </a:avLst>
+          </a:prstGeom>
+          <a:solidFill>
+            <a:srgbClr val="EEF4F7"/>
+          </a:solidFill>
+          <a:ln>
+            <a:noFill/>
+          </a:ln>
+          <a:effectLst/>
+        </p:spPr>
+        <p:style>
+          <a:lnRef idx="1">
+            <a:schemeClr val="accent1"/>
+          </a:lnRef>
+          <a:fillRef idx="3">
+            <a:schemeClr val="accent1"/>
+          </a:fillRef>
+          <a:effectRef idx="2">
+            <a:schemeClr val="accent1"/>
+          </a:effectRef>
+          <a:fontRef idx="minor">
+            <a:schemeClr val="lt1"/>
+          </a:fontRef>
+        </p:style>
+        <p:txBody>
+          <a:bodyPr rtlCol="0" anchor="ctr"/>
+          <a:lstStyle/>
+          <a:p>
+            <a:pPr algn="ctr"/>
+          </a:p>
+        </p:txBody>
+      </p:sp>
+      <p:sp>
+        <p:nvSpPr>
+          <p:cNvPr id="7" name="TextBox 6"/>
+          <p:cNvSpPr txBox="1"/>
+          <p:nvPr/>
+        </p:nvSpPr>
+        <p:spPr>
+          <a:xfrm>
+            <a:off x="914400" y="1874519"/>
+            <a:ext cx="2743200" cy="365760"/>
+          </a:xfrm>
+          <a:prstGeom prst="rect">
+            <a:avLst/>
+          </a:prstGeom>
+          <a:noFill/>
+        </p:spPr>
+        <p:txBody>
+          <a:bodyPr wrap="square" anchor="t" lIns="0" rIns="0" tIns="0" bIns="0">
+            <a:spAutoFit/>
+          </a:bodyPr>
+          <a:lstStyle/>
+          <a:p>
+            <a:pPr algn="l"/>
+            <a:r>
+              <a:rPr sz="1600" b="1">
+                <a:solidFill>
+                  <a:srgbClr val="1D7A8C"/>
+                </a:solidFill>
+                <a:latin typeface="Microsoft YaHei"/>
+              </a:rPr>
+              <a:t>要点</a:t>
+            </a:r>
+          </a:p>
+        </p:txBody>
+      </p:sp>
+      <p:sp>
+        <p:nvSpPr>
+          <p:cNvPr id="8" name="TextBox 7"/>
+          <p:cNvSpPr txBox="1"/>
+          <p:nvPr/>
+        </p:nvSpPr>
+        <p:spPr>
+          <a:xfrm>
+            <a:off x="914400" y="2377440"/>
+            <a:ext cx="5925129" cy="2267712"/>
+          </a:xfrm>
+          <a:prstGeom prst="rect">
+            <a:avLst/>
+          </a:prstGeom>
+          <a:noFill/>
+        </p:spPr>
+        <p:txBody>
+          <a:bodyPr wrap="square" lIns="0" rIns="0" tIns="0" bIns="0">
+            <a:spAutoFit/>
+          </a:bodyPr>
+          <a:lstStyle/>
+          <a:p>
+            <a:pPr>
+              <a:spcAft>
+                <a:spcPts val="1000"/>
+              </a:spcAft>
+            </a:pPr>
+            <a:r>
+              <a:rPr sz="2000">
+                <a:solidFill>
+                  <a:srgbClr val="222B33"/>
+                </a:solidFill>
+                <a:latin typeface="Microsoft YaHei"/>
+              </a:rPr>
+              <a:t>▪ 普通棉质实验服着火会持续燃烧</a:t>
+            </a:r>
+          </a:p>
+          <a:p>
+            <a:pPr>
+              <a:spcAft>
+                <a:spcPts val="1000"/>
+              </a:spcAft>
+            </a:pPr>
+            <a:r>
+              <a:rPr sz="2000">
+                <a:solidFill>
+                  <a:srgbClr val="222B33"/>
+                </a:solidFill>
+                <a:latin typeface="Microsoft YaHei"/>
+              </a:rPr>
+              <a:t>▪ 阻燃服离开火源能自熄</a:t>
+            </a:r>
+          </a:p>
+          <a:p>
+            <a:pPr>
+              <a:spcAft>
+                <a:spcPts val="1000"/>
+              </a:spcAft>
+            </a:pPr>
+            <a:r>
+              <a:rPr sz="2000">
+                <a:solidFill>
+                  <a:srgbClr val="222B33"/>
+                </a:solidFill>
+                <a:latin typeface="Microsoft YaHei"/>
+              </a:rPr>
+              <a:t>▪ 用自燃试剂、明火或高能反应，穿阻燃服</a:t>
+            </a:r>
+          </a:p>
+          <a:p>
+            <a:pPr>
+              <a:spcAft>
+                <a:spcPts val="1000"/>
+              </a:spcAft>
+            </a:pPr>
+            <a:r>
+              <a:rPr sz="2000">
+                <a:solidFill>
+                  <a:srgbClr val="222B33"/>
+                </a:solidFill>
+                <a:latin typeface="Microsoft YaHei"/>
+              </a:rPr>
+              <a:t>▪ 焊接、切割有火花，穿阻燃工作服并扣好领口</a:t>
+            </a:r>
+          </a:p>
+        </p:txBody>
+      </p:sp>
+      <p:sp>
+        <p:nvSpPr>
+          <p:cNvPr id="9" name="TextBox 8"/>
+          <p:cNvSpPr txBox="1"/>
+          <p:nvPr/>
+        </p:nvSpPr>
+        <p:spPr>
+          <a:xfrm>
+            <a:off x="914400" y="4782312"/>
+            <a:ext cx="5925129" cy="320040"/>
+          </a:xfrm>
+          <a:prstGeom prst="rect">
+            <a:avLst/>
+          </a:prstGeom>
+          <a:noFill/>
+        </p:spPr>
+        <p:txBody>
+          <a:bodyPr wrap="square" anchor="t" lIns="0" rIns="0" tIns="0" bIns="0">
+            <a:spAutoFit/>
+          </a:bodyPr>
+          <a:lstStyle/>
+          <a:p>
+            <a:pPr algn="l"/>
+            <a:r>
+              <a:rPr sz="1300" b="1">
+                <a:solidFill>
+                  <a:srgbClr val="1D7A8C"/>
+                </a:solidFill>
+                <a:latin typeface="Microsoft YaHei"/>
+              </a:rPr>
+              <a:t>说明</a:t>
+            </a:r>
+          </a:p>
+        </p:txBody>
+      </p:sp>
+      <p:sp>
+        <p:nvSpPr>
+          <p:cNvPr id="10" name="TextBox 9"/>
+          <p:cNvSpPr txBox="1"/>
+          <p:nvPr/>
+        </p:nvSpPr>
+        <p:spPr>
+          <a:xfrm>
+            <a:off x="914400" y="5148072"/>
+            <a:ext cx="5925129" cy="612648"/>
+          </a:xfrm>
+          <a:prstGeom prst="rect">
+            <a:avLst/>
+          </a:prstGeom>
+          <a:noFill/>
+        </p:spPr>
+        <p:txBody>
+          <a:bodyPr wrap="square" anchor="t" lIns="0" rIns="0" tIns="0" bIns="0">
+            <a:spAutoFit/>
+          </a:bodyPr>
+          <a:lstStyle/>
+          <a:p>
+            <a:pPr algn="l"/>
+            <a:r>
+              <a:rPr sz="1400" b="0">
+                <a:solidFill>
+                  <a:srgbClr val="5F6B75"/>
+                </a:solidFill>
+                <a:latin typeface="Microsoft YaHei"/>
+              </a:rPr>
+              <a:t>棉质实验服不会熔化，但一旦着火仍会持续燃烧。阻燃实验服离开火源后能自行熄灭，为脱下、灭火争取时间。使用自燃试剂（如遇空气自燃的金属有机试剂）、大量易燃溶剂、明火或进行高能反应时，必须穿阻燃实验服。曾有研究人员处理自燃……</a:t>
+            </a:r>
+          </a:p>
+        </p:txBody>
+      </p:sp>
+      <p:sp>
+        <p:nvSpPr>
+          <p:cNvPr id="11" name="Rounded Rectangle 10"/>
+          <p:cNvSpPr/>
+          <p:nvPr/>
+        </p:nvSpPr>
+        <p:spPr>
+          <a:xfrm>
+            <a:off x="7571049" y="1645920"/>
+            <a:ext cx="4072006" cy="4389120"/>
+          </a:xfrm>
+          <a:prstGeom prst="roundRect">
+            <a:avLst>
+              <a:gd name="adj" fmla="val 8000"/>
+            </a:avLst>
+          </a:prstGeom>
+          <a:solidFill>
+            <a:srgbClr val="FBECEA"/>
+          </a:solidFill>
+          <a:ln>
+            <a:noFill/>
+          </a:ln>
+          <a:effectLst/>
+        </p:spPr>
+        <p:style>
+          <a:lnRef idx="1">
+            <a:schemeClr val="accent1"/>
+          </a:lnRef>
+          <a:fillRef idx="3">
+            <a:schemeClr val="accent1"/>
+          </a:fillRef>
+          <a:effectRef idx="2">
+            <a:schemeClr val="accent1"/>
+          </a:effectRef>
+          <a:fontRef idx="minor">
+            <a:schemeClr val="lt1"/>
+          </a:fontRef>
+        </p:style>
+        <p:txBody>
+          <a:bodyPr rtlCol="0" anchor="ctr"/>
+          <a:lstStyle/>
+          <a:p>
+            <a:pPr algn="ctr"/>
+          </a:p>
+        </p:txBody>
+      </p:sp>
+      <p:sp>
+        <p:nvSpPr>
+          <p:cNvPr id="12" name="Oval 11"/>
+          <p:cNvSpPr/>
+          <p:nvPr/>
+        </p:nvSpPr>
+        <p:spPr>
+          <a:xfrm>
+            <a:off x="7936809" y="1828800"/>
+            <a:ext cx="457200" cy="457200"/>
+          </a:xfrm>
+          <a:prstGeom prst="ellipse">
+            <a:avLst/>
+          </a:prstGeom>
+          <a:solidFill>
+            <a:srgbClr val="C0392B"/>
+          </a:solidFill>
+          <a:ln>
+            <a:noFill/>
+          </a:ln>
+          <a:effectLst/>
+        </p:spPr>
+        <p:style>
+          <a:lnRef idx="1">
+            <a:schemeClr val="accent1"/>
+          </a:lnRef>
+          <a:fillRef idx="3">
+            <a:schemeClr val="accent1"/>
+          </a:fillRef>
+          <a:effectRef idx="2">
+            <a:schemeClr val="accent1"/>
+          </a:effectRef>
+          <a:fontRef idx="minor">
+            <a:schemeClr val="lt1"/>
+          </a:fontRef>
+        </p:style>
+        <p:txBody>
+          <a:bodyPr rtlCol="0" anchor="ctr" lIns="0" rIns="0" tIns="0" bIns="0"/>
+          <a:lstStyle/>
+          <a:p>
+            <a:pPr algn="ctr"/>
+            <a:r>
+              <a:rPr sz="1600" b="1">
+                <a:solidFill>
+                  <a:srgbClr val="FFFFFF"/>
+                </a:solidFill>
+                <a:latin typeface="Microsoft YaHei"/>
+              </a:rPr>
+              <a:t>✕</a:t>
+            </a:r>
+          </a:p>
+        </p:txBody>
+      </p:sp>
+      <p:sp>
+        <p:nvSpPr>
+          <p:cNvPr id="13" name="TextBox 12"/>
+          <p:cNvSpPr txBox="1"/>
+          <p:nvPr/>
+        </p:nvSpPr>
+        <p:spPr>
+          <a:xfrm>
+            <a:off x="8531169" y="1874519"/>
+            <a:ext cx="2791846" cy="365760"/>
+          </a:xfrm>
+          <a:prstGeom prst="rect">
+            <a:avLst/>
+          </a:prstGeom>
+          <a:noFill/>
+        </p:spPr>
+        <p:txBody>
+          <a:bodyPr wrap="square" anchor="t" lIns="0" rIns="0" tIns="0" bIns="0">
+            <a:spAutoFit/>
+          </a:bodyPr>
+          <a:lstStyle/>
+          <a:p>
+            <a:pPr algn="l"/>
+            <a:r>
+              <a:rPr sz="1600" b="1">
+                <a:solidFill>
+                  <a:srgbClr val="C0392B"/>
+                </a:solidFill>
+                <a:latin typeface="Microsoft YaHei"/>
+              </a:rPr>
+              <a:t>常见错误</a:t>
+            </a:r>
+          </a:p>
+        </p:txBody>
+      </p:sp>
+      <p:sp>
+        <p:nvSpPr>
+          <p:cNvPr id="14" name="TextBox 13"/>
+          <p:cNvSpPr txBox="1"/>
+          <p:nvPr/>
+        </p:nvSpPr>
+        <p:spPr>
+          <a:xfrm>
+            <a:off x="7936809" y="2514600"/>
+            <a:ext cx="3340486" cy="3291840"/>
+          </a:xfrm>
+          <a:prstGeom prst="rect">
+            <a:avLst/>
+          </a:prstGeom>
+          <a:noFill/>
+        </p:spPr>
+        <p:txBody>
+          <a:bodyPr wrap="square" lIns="0" rIns="0" tIns="0" bIns="0">
+            <a:spAutoFit/>
+          </a:bodyPr>
+          <a:lstStyle/>
+          <a:p>
+            <a:pPr>
+              <a:spcAft>
+                <a:spcPts val="1000"/>
+              </a:spcAft>
+            </a:pPr>
+            <a:r>
+              <a:rPr sz="1500">
+                <a:solidFill>
+                  <a:srgbClr val="222B33"/>
+                </a:solidFill>
+                <a:latin typeface="Microsoft YaHei"/>
+              </a:rPr>
+              <a:t>▪ 穿普通实验服操作自燃试剂</a:t>
+            </a:r>
+          </a:p>
+          <a:p>
+            <a:pPr>
+              <a:spcAft>
+                <a:spcPts val="1000"/>
+              </a:spcAft>
+            </a:pPr>
+            <a:r>
+              <a:rPr sz="1500">
+                <a:solidFill>
+                  <a:srgbClr val="222B33"/>
+                </a:solidFill>
+                <a:latin typeface="Microsoft YaHei"/>
+              </a:rPr>
+              <a:t>▪ 焊接时穿化纤衣服、敞着领口</a:t>
+            </a:r>
+          </a:p>
+        </p:txBody>
+      </p:sp>
+    </p:spTree>
+  </p:cSld>
+  <p:clrMapOvr>
+    <a:masterClrMapping/>
+  </p:clrMapOvr>
+</p:sld>
+</file>
+
+<file path=ppt/slides/slide94.xml><?xml version="1.0" encoding="utf-8"?>
+<p:sld xmlns:a="http://schemas.openxmlformats.org/drawingml/2006/main" xmlns:p="http://schemas.openxmlformats.org/presentationml/2006/main" xmlns:r="http://schemas.openxmlformats.org/officeDocument/2006/relationships">
+  <p:cSld>
+    <p:bg>
+      <p:bgPr>
+        <a:solidFill>
+          <a:srgbClr val="FFFFFF"/>
+        </a:solidFill>
+        <a:effectLst/>
+      </p:bgPr>
+    </p:bg>
+    <p:spTree>
+      <p:nvGrpSpPr>
+        <p:cNvPr id="1" name=""/>
+        <p:cNvGrpSpPr/>
+        <p:nvPr/>
+      </p:nvGrpSpPr>
+      <p:grpSpPr/>
+      <p:sp>
+        <p:nvSpPr>
+          <p:cNvPr id="2" name="TextBox 1"/>
+          <p:cNvSpPr txBox="1"/>
+          <p:nvPr/>
+        </p:nvSpPr>
+        <p:spPr>
+          <a:xfrm>
+            <a:off x="548640" y="320040"/>
+            <a:ext cx="8229600" cy="320040"/>
+          </a:xfrm>
+          <a:prstGeom prst="rect">
+            <a:avLst/>
+          </a:prstGeom>
+          <a:noFill/>
+        </p:spPr>
+        <p:txBody>
+          <a:bodyPr wrap="square" anchor="t" lIns="0" rIns="0" tIns="0" bIns="0">
+            <a:spAutoFit/>
+          </a:bodyPr>
+          <a:lstStyle/>
+          <a:p>
+            <a:pPr algn="l"/>
+            <a:r>
+              <a:rPr sz="1200" b="1">
+                <a:solidFill>
+                  <a:srgbClr val="1D7A8C"/>
+                </a:solidFill>
+                <a:latin typeface="Microsoft YaHei"/>
+              </a:rPr>
+              <a:t>024 · 实验服与防护服</a:t>
+            </a:r>
+          </a:p>
+        </p:txBody>
+      </p:sp>
+      <p:sp>
+        <p:nvSpPr>
+          <p:cNvPr id="3" name="TextBox 2"/>
+          <p:cNvSpPr txBox="1"/>
+          <p:nvPr/>
+        </p:nvSpPr>
+        <p:spPr>
+          <a:xfrm>
+            <a:off x="548640" y="640080"/>
+            <a:ext cx="11094415" cy="731520"/>
+          </a:xfrm>
+          <a:prstGeom prst="rect">
+            <a:avLst/>
+          </a:prstGeom>
+          <a:noFill/>
+        </p:spPr>
+        <p:txBody>
+          <a:bodyPr wrap="square" anchor="t" lIns="0" rIns="0" tIns="0" bIns="0">
+            <a:spAutoFit/>
+          </a:bodyPr>
+          <a:lstStyle/>
+          <a:p>
+            <a:pPr algn="l"/>
+            <a:r>
+              <a:rPr sz="3000" b="1">
+                <a:solidFill>
+                  <a:srgbClr val="0B3C5D"/>
+                </a:solidFill>
+                <a:latin typeface="Microsoft YaHei"/>
+              </a:rPr>
+              <a:t>扣子扣好，袖口塞进手套</a:t>
+            </a:r>
+          </a:p>
+        </p:txBody>
+      </p:sp>
+      <p:sp>
+        <p:nvSpPr>
+          <p:cNvPr id="4" name="TextBox 3"/>
+          <p:cNvSpPr txBox="1"/>
+          <p:nvPr/>
+        </p:nvSpPr>
+        <p:spPr>
+          <a:xfrm>
+            <a:off x="548640" y="6446520"/>
+            <a:ext cx="7315200" cy="274320"/>
+          </a:xfrm>
+          <a:prstGeom prst="rect">
+            <a:avLst/>
+          </a:prstGeom>
+          <a:noFill/>
+        </p:spPr>
+        <p:txBody>
+          <a:bodyPr wrap="square" anchor="t" lIns="0" rIns="0" tIns="0" bIns="0">
+            <a:spAutoFit/>
+          </a:bodyPr>
+          <a:lstStyle/>
+          <a:p>
+            <a:pPr algn="l"/>
+            <a:r>
+              <a:rPr sz="1000" b="0">
+                <a:solidFill>
+                  <a:srgbClr val="5F6B75"/>
+                </a:solidFill>
+                <a:latin typeface="Microsoft YaHei"/>
+              </a:rPr>
+              <a:t>《高校实验室安全》 024 实验服与防护服</a:t>
+            </a:r>
+          </a:p>
+        </p:txBody>
+      </p:sp>
+      <p:sp>
+        <p:nvSpPr>
+          <p:cNvPr id="5" name="Oval 4"/>
+          <p:cNvSpPr/>
+          <p:nvPr/>
+        </p:nvSpPr>
+        <p:spPr>
+          <a:xfrm>
+            <a:off x="10820095" y="411480"/>
+            <a:ext cx="822960" cy="822960"/>
+          </a:xfrm>
+          <a:prstGeom prst="ellipse">
+            <a:avLst/>
+          </a:prstGeom>
+          <a:solidFill>
+            <a:srgbClr val="F28C28"/>
+          </a:solidFill>
+          <a:ln>
+            <a:noFill/>
+          </a:ln>
+          <a:effectLst/>
+        </p:spPr>
+        <p:style>
+          <a:lnRef idx="1">
+            <a:schemeClr val="accent1"/>
+          </a:lnRef>
+          <a:fillRef idx="3">
+            <a:schemeClr val="accent1"/>
+          </a:fillRef>
+          <a:effectRef idx="2">
+            <a:schemeClr val="accent1"/>
+          </a:effectRef>
+          <a:fontRef idx="minor">
+            <a:schemeClr val="lt1"/>
+          </a:fontRef>
+        </p:style>
+        <p:txBody>
+          <a:bodyPr rtlCol="0" anchor="ctr" lIns="0" rIns="0" tIns="0" bIns="0"/>
+          <a:lstStyle/>
+          <a:p>
+            <a:pPr algn="ctr"/>
+            <a:r>
+              <a:rPr sz="1800" b="1">
+                <a:solidFill>
+                  <a:srgbClr val="FFFFFF"/>
+                </a:solidFill>
+                <a:latin typeface="Microsoft YaHei"/>
+              </a:rPr>
+              <a:t>K4</a:t>
+            </a:r>
+          </a:p>
+        </p:txBody>
+      </p:sp>
+      <p:sp>
+        <p:nvSpPr>
+          <p:cNvPr id="6" name="Rounded Rectangle 5"/>
+          <p:cNvSpPr/>
+          <p:nvPr/>
+        </p:nvSpPr>
+        <p:spPr>
+          <a:xfrm>
+            <a:off x="548640" y="1645920"/>
+            <a:ext cx="6656649" cy="4389120"/>
+          </a:xfrm>
+          <a:prstGeom prst="roundRect">
+            <a:avLst>
+              <a:gd name="adj" fmla="val 8000"/>
+            </a:avLst>
+          </a:prstGeom>
+          <a:solidFill>
+            <a:srgbClr val="EEF4F7"/>
+          </a:solidFill>
+          <a:ln>
+            <a:noFill/>
+          </a:ln>
+          <a:effectLst/>
+        </p:spPr>
+        <p:style>
+          <a:lnRef idx="1">
+            <a:schemeClr val="accent1"/>
+          </a:lnRef>
+          <a:fillRef idx="3">
+            <a:schemeClr val="accent1"/>
+          </a:fillRef>
+          <a:effectRef idx="2">
+            <a:schemeClr val="accent1"/>
+          </a:effectRef>
+          <a:fontRef idx="minor">
+            <a:schemeClr val="lt1"/>
+          </a:fontRef>
+        </p:style>
+        <p:txBody>
+          <a:bodyPr rtlCol="0" anchor="ctr"/>
+          <a:lstStyle/>
+          <a:p>
+            <a:pPr algn="ctr"/>
+          </a:p>
+        </p:txBody>
+      </p:sp>
+      <p:sp>
+        <p:nvSpPr>
+          <p:cNvPr id="7" name="TextBox 6"/>
+          <p:cNvSpPr txBox="1"/>
+          <p:nvPr/>
+        </p:nvSpPr>
+        <p:spPr>
+          <a:xfrm>
+            <a:off x="914400" y="1874519"/>
+            <a:ext cx="2743200" cy="365760"/>
+          </a:xfrm>
+          <a:prstGeom prst="rect">
+            <a:avLst/>
+          </a:prstGeom>
+          <a:noFill/>
+        </p:spPr>
+        <p:txBody>
+          <a:bodyPr wrap="square" anchor="t" lIns="0" rIns="0" tIns="0" bIns="0">
+            <a:spAutoFit/>
+          </a:bodyPr>
+          <a:lstStyle/>
+          <a:p>
+            <a:pPr algn="l"/>
+            <a:r>
+              <a:rPr sz="1600" b="1">
+                <a:solidFill>
+                  <a:srgbClr val="1D7A8C"/>
+                </a:solidFill>
+                <a:latin typeface="Microsoft YaHei"/>
+              </a:rPr>
+              <a:t>要点</a:t>
+            </a:r>
+          </a:p>
+        </p:txBody>
+      </p:sp>
+      <p:sp>
+        <p:nvSpPr>
+          <p:cNvPr id="8" name="TextBox 7"/>
+          <p:cNvSpPr txBox="1"/>
+          <p:nvPr/>
+        </p:nvSpPr>
+        <p:spPr>
+          <a:xfrm>
+            <a:off x="914400" y="2377440"/>
+            <a:ext cx="5925129" cy="2267712"/>
+          </a:xfrm>
+          <a:prstGeom prst="rect">
+            <a:avLst/>
+          </a:prstGeom>
+          <a:noFill/>
+        </p:spPr>
+        <p:txBody>
+          <a:bodyPr wrap="square" lIns="0" rIns="0" tIns="0" bIns="0">
+            <a:spAutoFit/>
+          </a:bodyPr>
+          <a:lstStyle/>
+          <a:p>
+            <a:pPr>
+              <a:spcAft>
+                <a:spcPts val="1000"/>
+              </a:spcAft>
+            </a:pPr>
+            <a:r>
+              <a:rPr sz="2000">
+                <a:solidFill>
+                  <a:srgbClr val="222B33"/>
+                </a:solidFill>
+                <a:latin typeface="Microsoft YaHei"/>
+              </a:rPr>
+              <a:t>▪ 实验服扣子全部扣好，敞着怀等于没穿</a:t>
+            </a:r>
+          </a:p>
+          <a:p>
+            <a:pPr>
+              <a:spcAft>
+                <a:spcPts val="1000"/>
+              </a:spcAft>
+            </a:pPr>
+            <a:r>
+              <a:rPr sz="2000">
+                <a:solidFill>
+                  <a:srgbClr val="222B33"/>
+                </a:solidFill>
+                <a:latin typeface="Microsoft YaHei"/>
+              </a:rPr>
+              <a:t>▪ 袖口尽量塞进手套里</a:t>
+            </a:r>
+          </a:p>
+          <a:p>
+            <a:pPr>
+              <a:spcAft>
+                <a:spcPts val="1000"/>
+              </a:spcAft>
+            </a:pPr>
+            <a:r>
+              <a:rPr sz="2000">
+                <a:solidFill>
+                  <a:srgbClr val="222B33"/>
+                </a:solidFill>
+                <a:latin typeface="Microsoft YaHei"/>
+              </a:rPr>
+              <a:t>▪ 袖子不卷起，手腕不外露</a:t>
+            </a:r>
+          </a:p>
+          <a:p>
+            <a:pPr>
+              <a:spcAft>
+                <a:spcPts val="1000"/>
+              </a:spcAft>
+            </a:pPr>
+            <a:r>
+              <a:rPr sz="2000">
+                <a:solidFill>
+                  <a:srgbClr val="222B33"/>
+                </a:solidFill>
+                <a:latin typeface="Microsoft YaHei"/>
+              </a:rPr>
+              <a:t>▪ 袖口不要松垮，免得勾倒器皿</a:t>
+            </a:r>
+          </a:p>
+        </p:txBody>
+      </p:sp>
+      <p:sp>
+        <p:nvSpPr>
+          <p:cNvPr id="9" name="TextBox 8"/>
+          <p:cNvSpPr txBox="1"/>
+          <p:nvPr/>
+        </p:nvSpPr>
+        <p:spPr>
+          <a:xfrm>
+            <a:off x="914400" y="4782312"/>
+            <a:ext cx="5925129" cy="320040"/>
+          </a:xfrm>
+          <a:prstGeom prst="rect">
+            <a:avLst/>
+          </a:prstGeom>
+          <a:noFill/>
+        </p:spPr>
+        <p:txBody>
+          <a:bodyPr wrap="square" anchor="t" lIns="0" rIns="0" tIns="0" bIns="0">
+            <a:spAutoFit/>
+          </a:bodyPr>
+          <a:lstStyle/>
+          <a:p>
+            <a:pPr algn="l"/>
+            <a:r>
+              <a:rPr sz="1300" b="1">
+                <a:solidFill>
+                  <a:srgbClr val="1D7A8C"/>
+                </a:solidFill>
+                <a:latin typeface="Microsoft YaHei"/>
+              </a:rPr>
+              <a:t>说明</a:t>
+            </a:r>
+          </a:p>
+        </p:txBody>
+      </p:sp>
+      <p:sp>
+        <p:nvSpPr>
+          <p:cNvPr id="10" name="TextBox 9"/>
+          <p:cNvSpPr txBox="1"/>
+          <p:nvPr/>
+        </p:nvSpPr>
+        <p:spPr>
+          <a:xfrm>
+            <a:off x="914400" y="5148072"/>
+            <a:ext cx="5925129" cy="612648"/>
+          </a:xfrm>
+          <a:prstGeom prst="rect">
+            <a:avLst/>
+          </a:prstGeom>
+          <a:noFill/>
+        </p:spPr>
+        <p:txBody>
+          <a:bodyPr wrap="square" anchor="t" lIns="0" rIns="0" tIns="0" bIns="0">
+            <a:spAutoFit/>
+          </a:bodyPr>
+          <a:lstStyle/>
+          <a:p>
+            <a:pPr algn="l"/>
+            <a:r>
+              <a:rPr sz="1400" b="0">
+                <a:solidFill>
+                  <a:srgbClr val="5F6B75"/>
+                </a:solidFill>
+                <a:latin typeface="Microsoft YaHei"/>
+              </a:rPr>
+              <a:t>敞开穿的实验服挡不住正面溅来的液体，等于没穿。穿实验服要把扣子从下到上全部扣好；袖口尽量塞进手套里（或手套口套住袖口），让手腕不外露。</a:t>
+            </a:r>
+          </a:p>
+        </p:txBody>
+      </p:sp>
+      <p:sp>
+        <p:nvSpPr>
+          <p:cNvPr id="11" name="Rounded Rectangle 10"/>
+          <p:cNvSpPr/>
+          <p:nvPr/>
+        </p:nvSpPr>
+        <p:spPr>
+          <a:xfrm>
+            <a:off x="7571049" y="1645920"/>
+            <a:ext cx="4072006" cy="4389120"/>
+          </a:xfrm>
+          <a:prstGeom prst="roundRect">
+            <a:avLst>
+              <a:gd name="adj" fmla="val 8000"/>
+            </a:avLst>
+          </a:prstGeom>
+          <a:solidFill>
+            <a:srgbClr val="FBECEA"/>
+          </a:solidFill>
+          <a:ln>
+            <a:noFill/>
+          </a:ln>
+          <a:effectLst/>
+        </p:spPr>
+        <p:style>
+          <a:lnRef idx="1">
+            <a:schemeClr val="accent1"/>
+          </a:lnRef>
+          <a:fillRef idx="3">
+            <a:schemeClr val="accent1"/>
+          </a:fillRef>
+          <a:effectRef idx="2">
+            <a:schemeClr val="accent1"/>
+          </a:effectRef>
+          <a:fontRef idx="minor">
+            <a:schemeClr val="lt1"/>
+          </a:fontRef>
+        </p:style>
+        <p:txBody>
+          <a:bodyPr rtlCol="0" anchor="ctr"/>
+          <a:lstStyle/>
+          <a:p>
+            <a:pPr algn="ctr"/>
+          </a:p>
+        </p:txBody>
+      </p:sp>
+      <p:sp>
+        <p:nvSpPr>
+          <p:cNvPr id="12" name="Oval 11"/>
+          <p:cNvSpPr/>
+          <p:nvPr/>
+        </p:nvSpPr>
+        <p:spPr>
+          <a:xfrm>
+            <a:off x="7936809" y="1828800"/>
+            <a:ext cx="457200" cy="457200"/>
+          </a:xfrm>
+          <a:prstGeom prst="ellipse">
+            <a:avLst/>
+          </a:prstGeom>
+          <a:solidFill>
+            <a:srgbClr val="C0392B"/>
+          </a:solidFill>
+          <a:ln>
+            <a:noFill/>
+          </a:ln>
+          <a:effectLst/>
+        </p:spPr>
+        <p:style>
+          <a:lnRef idx="1">
+            <a:schemeClr val="accent1"/>
+          </a:lnRef>
+          <a:fillRef idx="3">
+            <a:schemeClr val="accent1"/>
+          </a:fillRef>
+          <a:effectRef idx="2">
+            <a:schemeClr val="accent1"/>
+          </a:effectRef>
+          <a:fontRef idx="minor">
+            <a:schemeClr val="lt1"/>
+          </a:fontRef>
+        </p:style>
+        <p:txBody>
+          <a:bodyPr rtlCol="0" anchor="ctr" lIns="0" rIns="0" tIns="0" bIns="0"/>
+          <a:lstStyle/>
+          <a:p>
+            <a:pPr algn="ctr"/>
+            <a:r>
+              <a:rPr sz="1600" b="1">
+                <a:solidFill>
+                  <a:srgbClr val="FFFFFF"/>
+                </a:solidFill>
+                <a:latin typeface="Microsoft YaHei"/>
+              </a:rPr>
+              <a:t>✕</a:t>
+            </a:r>
+          </a:p>
+        </p:txBody>
+      </p:sp>
+      <p:sp>
+        <p:nvSpPr>
+          <p:cNvPr id="13" name="TextBox 12"/>
+          <p:cNvSpPr txBox="1"/>
+          <p:nvPr/>
+        </p:nvSpPr>
+        <p:spPr>
+          <a:xfrm>
+            <a:off x="8531169" y="1874519"/>
+            <a:ext cx="2791846" cy="365760"/>
+          </a:xfrm>
+          <a:prstGeom prst="rect">
+            <a:avLst/>
+          </a:prstGeom>
+          <a:noFill/>
+        </p:spPr>
+        <p:txBody>
+          <a:bodyPr wrap="square" anchor="t" lIns="0" rIns="0" tIns="0" bIns="0">
+            <a:spAutoFit/>
+          </a:bodyPr>
+          <a:lstStyle/>
+          <a:p>
+            <a:pPr algn="l"/>
+            <a:r>
+              <a:rPr sz="1600" b="1">
+                <a:solidFill>
+                  <a:srgbClr val="C0392B"/>
+                </a:solidFill>
+                <a:latin typeface="Microsoft YaHei"/>
+              </a:rPr>
+              <a:t>常见错误</a:t>
+            </a:r>
+          </a:p>
+        </p:txBody>
+      </p:sp>
+      <p:sp>
+        <p:nvSpPr>
+          <p:cNvPr id="14" name="TextBox 13"/>
+          <p:cNvSpPr txBox="1"/>
+          <p:nvPr/>
+        </p:nvSpPr>
+        <p:spPr>
+          <a:xfrm>
+            <a:off x="7936809" y="2514600"/>
+            <a:ext cx="3340486" cy="3291840"/>
+          </a:xfrm>
+          <a:prstGeom prst="rect">
+            <a:avLst/>
+          </a:prstGeom>
+          <a:noFill/>
+        </p:spPr>
+        <p:txBody>
+          <a:bodyPr wrap="square" lIns="0" rIns="0" tIns="0" bIns="0">
+            <a:spAutoFit/>
+          </a:bodyPr>
+          <a:lstStyle/>
+          <a:p>
+            <a:pPr>
+              <a:spcAft>
+                <a:spcPts val="1000"/>
+              </a:spcAft>
+            </a:pPr>
+            <a:r>
+              <a:rPr sz="1500">
+                <a:solidFill>
+                  <a:srgbClr val="222B33"/>
+                </a:solidFill>
+                <a:latin typeface="Microsoft YaHei"/>
+              </a:rPr>
+              <a:t>▪ 实验服敞着怀，或只扣一两颗扣子</a:t>
+            </a:r>
+          </a:p>
+          <a:p>
+            <a:pPr>
+              <a:spcAft>
+                <a:spcPts val="1000"/>
+              </a:spcAft>
+            </a:pPr>
+            <a:r>
+              <a:rPr sz="1500">
+                <a:solidFill>
+                  <a:srgbClr val="222B33"/>
+                </a:solidFill>
+                <a:latin typeface="Microsoft YaHei"/>
+              </a:rPr>
+              <a:t>▪ 嫌热把袖子卷到手肘</a:t>
+            </a:r>
+          </a:p>
+        </p:txBody>
+      </p:sp>
+    </p:spTree>
+  </p:cSld>
+  <p:clrMapOvr>
+    <a:masterClrMapping/>
+  </p:clrMapOvr>
+</p:sld>
+</file>
+
+<file path=ppt/slides/slide95.xml><?xml version="1.0" encoding="utf-8"?>
+<p:sld xmlns:a="http://schemas.openxmlformats.org/drawingml/2006/main" xmlns:p="http://schemas.openxmlformats.org/presentationml/2006/main" xmlns:r="http://schemas.openxmlformats.org/officeDocument/2006/relationships">
+  <p:cSld>
+    <p:bg>
+      <p:bgPr>
+        <a:solidFill>
+          <a:srgbClr val="FFFFFF"/>
+        </a:solidFill>
+        <a:effectLst/>
+      </p:bgPr>
+    </p:bg>
+    <p:spTree>
+      <p:nvGrpSpPr>
+        <p:cNvPr id="1" name=""/>
+        <p:cNvGrpSpPr/>
+        <p:nvPr/>
+      </p:nvGrpSpPr>
+      <p:grpSpPr/>
+      <p:sp>
+        <p:nvSpPr>
+          <p:cNvPr id="2" name="TextBox 1"/>
+          <p:cNvSpPr txBox="1"/>
+          <p:nvPr/>
+        </p:nvSpPr>
+        <p:spPr>
+          <a:xfrm>
+            <a:off x="548640" y="320040"/>
+            <a:ext cx="8229600" cy="320040"/>
+          </a:xfrm>
+          <a:prstGeom prst="rect">
+            <a:avLst/>
+          </a:prstGeom>
+          <a:noFill/>
+        </p:spPr>
+        <p:txBody>
+          <a:bodyPr wrap="square" anchor="t" lIns="0" rIns="0" tIns="0" bIns="0">
+            <a:spAutoFit/>
+          </a:bodyPr>
+          <a:lstStyle/>
+          <a:p>
+            <a:pPr algn="l"/>
+            <a:r>
+              <a:rPr sz="1200" b="1">
+                <a:solidFill>
+                  <a:srgbClr val="1D7A8C"/>
+                </a:solidFill>
+                <a:latin typeface="Microsoft YaHei"/>
+              </a:rPr>
+              <a:t>024 · 实验服与防护服</a:t>
+            </a:r>
+          </a:p>
+        </p:txBody>
+      </p:sp>
+      <p:sp>
+        <p:nvSpPr>
+          <p:cNvPr id="3" name="TextBox 2"/>
+          <p:cNvSpPr txBox="1"/>
+          <p:nvPr/>
+        </p:nvSpPr>
+        <p:spPr>
+          <a:xfrm>
+            <a:off x="548640" y="640080"/>
+            <a:ext cx="11094415" cy="731520"/>
+          </a:xfrm>
+          <a:prstGeom prst="rect">
+            <a:avLst/>
+          </a:prstGeom>
+          <a:noFill/>
+        </p:spPr>
+        <p:txBody>
+          <a:bodyPr wrap="square" anchor="t" lIns="0" rIns="0" tIns="0" bIns="0">
+            <a:spAutoFit/>
+          </a:bodyPr>
+          <a:lstStyle/>
+          <a:p>
+            <a:pPr algn="l"/>
+            <a:r>
+              <a:rPr sz="3000" b="1">
+                <a:solidFill>
+                  <a:srgbClr val="0B3C5D"/>
+                </a:solidFill>
+                <a:latin typeface="Microsoft YaHei"/>
+              </a:rPr>
+              <a:t>有喷溅，加穿耐化学品围裙</a:t>
+            </a:r>
+          </a:p>
+        </p:txBody>
+      </p:sp>
+      <p:sp>
+        <p:nvSpPr>
+          <p:cNvPr id="4" name="TextBox 3"/>
+          <p:cNvSpPr txBox="1"/>
+          <p:nvPr/>
+        </p:nvSpPr>
+        <p:spPr>
+          <a:xfrm>
+            <a:off x="548640" y="6446520"/>
+            <a:ext cx="7315200" cy="274320"/>
+          </a:xfrm>
+          <a:prstGeom prst="rect">
+            <a:avLst/>
+          </a:prstGeom>
+          <a:noFill/>
+        </p:spPr>
+        <p:txBody>
+          <a:bodyPr wrap="square" anchor="t" lIns="0" rIns="0" tIns="0" bIns="0">
+            <a:spAutoFit/>
+          </a:bodyPr>
+          <a:lstStyle/>
+          <a:p>
+            <a:pPr algn="l"/>
+            <a:r>
+              <a:rPr sz="1000" b="0">
+                <a:solidFill>
+                  <a:srgbClr val="5F6B75"/>
+                </a:solidFill>
+                <a:latin typeface="Microsoft YaHei"/>
+              </a:rPr>
+              <a:t>《高校实验室安全》 024 实验服与防护服</a:t>
+            </a:r>
+          </a:p>
+        </p:txBody>
+      </p:sp>
+      <p:sp>
+        <p:nvSpPr>
+          <p:cNvPr id="5" name="Oval 4"/>
+          <p:cNvSpPr/>
+          <p:nvPr/>
+        </p:nvSpPr>
+        <p:spPr>
+          <a:xfrm>
+            <a:off x="10820095" y="411480"/>
+            <a:ext cx="822960" cy="822960"/>
+          </a:xfrm>
+          <a:prstGeom prst="ellipse">
+            <a:avLst/>
+          </a:prstGeom>
+          <a:solidFill>
+            <a:srgbClr val="F28C28"/>
+          </a:solidFill>
+          <a:ln>
+            <a:noFill/>
+          </a:ln>
+          <a:effectLst/>
+        </p:spPr>
+        <p:style>
+          <a:lnRef idx="1">
+            <a:schemeClr val="accent1"/>
+          </a:lnRef>
+          <a:fillRef idx="3">
+            <a:schemeClr val="accent1"/>
+          </a:fillRef>
+          <a:effectRef idx="2">
+            <a:schemeClr val="accent1"/>
+          </a:effectRef>
+          <a:fontRef idx="minor">
+            <a:schemeClr val="lt1"/>
+          </a:fontRef>
+        </p:style>
+        <p:txBody>
+          <a:bodyPr rtlCol="0" anchor="ctr" lIns="0" rIns="0" tIns="0" bIns="0"/>
+          <a:lstStyle/>
+          <a:p>
+            <a:pPr algn="ctr"/>
+            <a:r>
+              <a:rPr sz="1800" b="1">
+                <a:solidFill>
+                  <a:srgbClr val="FFFFFF"/>
+                </a:solidFill>
+                <a:latin typeface="Microsoft YaHei"/>
+              </a:rPr>
+              <a:t>K5</a:t>
+            </a:r>
+          </a:p>
+        </p:txBody>
+      </p:sp>
+      <p:sp>
+        <p:nvSpPr>
+          <p:cNvPr id="6" name="Rounded Rectangle 5"/>
+          <p:cNvSpPr/>
+          <p:nvPr/>
+        </p:nvSpPr>
+        <p:spPr>
+          <a:xfrm>
+            <a:off x="548640" y="1645920"/>
+            <a:ext cx="6656649" cy="4389120"/>
+          </a:xfrm>
+          <a:prstGeom prst="roundRect">
+            <a:avLst>
+              <a:gd name="adj" fmla="val 8000"/>
+            </a:avLst>
+          </a:prstGeom>
+          <a:solidFill>
+            <a:srgbClr val="EEF4F7"/>
+          </a:solidFill>
+          <a:ln>
+            <a:noFill/>
+          </a:ln>
+          <a:effectLst/>
+        </p:spPr>
+        <p:style>
+          <a:lnRef idx="1">
+            <a:schemeClr val="accent1"/>
+          </a:lnRef>
+          <a:fillRef idx="3">
+            <a:schemeClr val="accent1"/>
+          </a:fillRef>
+          <a:effectRef idx="2">
+            <a:schemeClr val="accent1"/>
+          </a:effectRef>
+          <a:fontRef idx="minor">
+            <a:schemeClr val="lt1"/>
+          </a:fontRef>
+        </p:style>
+        <p:txBody>
+          <a:bodyPr rtlCol="0" anchor="ctr"/>
+          <a:lstStyle/>
+          <a:p>
+            <a:pPr algn="ctr"/>
+          </a:p>
+        </p:txBody>
+      </p:sp>
+      <p:sp>
+        <p:nvSpPr>
+          <p:cNvPr id="7" name="TextBox 6"/>
+          <p:cNvSpPr txBox="1"/>
+          <p:nvPr/>
+        </p:nvSpPr>
+        <p:spPr>
+          <a:xfrm>
+            <a:off x="914400" y="1874519"/>
+            <a:ext cx="2743200" cy="365760"/>
+          </a:xfrm>
+          <a:prstGeom prst="rect">
+            <a:avLst/>
+          </a:prstGeom>
+          <a:noFill/>
+        </p:spPr>
+        <p:txBody>
+          <a:bodyPr wrap="square" anchor="t" lIns="0" rIns="0" tIns="0" bIns="0">
+            <a:spAutoFit/>
+          </a:bodyPr>
+          <a:lstStyle/>
+          <a:p>
+            <a:pPr algn="l"/>
+            <a:r>
+              <a:rPr sz="1600" b="1">
+                <a:solidFill>
+                  <a:srgbClr val="1D7A8C"/>
+                </a:solidFill>
+                <a:latin typeface="Microsoft YaHei"/>
+              </a:rPr>
+              <a:t>要点</a:t>
+            </a:r>
+          </a:p>
+        </p:txBody>
+      </p:sp>
+      <p:sp>
+        <p:nvSpPr>
+          <p:cNvPr id="8" name="TextBox 7"/>
+          <p:cNvSpPr txBox="1"/>
+          <p:nvPr/>
+        </p:nvSpPr>
+        <p:spPr>
+          <a:xfrm>
+            <a:off x="914400" y="2377440"/>
+            <a:ext cx="5925129" cy="2267712"/>
+          </a:xfrm>
+          <a:prstGeom prst="rect">
+            <a:avLst/>
+          </a:prstGeom>
+          <a:noFill/>
+        </p:spPr>
+        <p:txBody>
+          <a:bodyPr wrap="square" lIns="0" rIns="0" tIns="0" bIns="0">
+            <a:spAutoFit/>
+          </a:bodyPr>
+          <a:lstStyle/>
+          <a:p>
+            <a:pPr>
+              <a:spcAft>
+                <a:spcPts val="1000"/>
+              </a:spcAft>
+            </a:pPr>
+            <a:r>
+              <a:rPr sz="2000">
+                <a:solidFill>
+                  <a:srgbClr val="222B33"/>
+                </a:solidFill>
+                <a:latin typeface="Microsoft YaHei"/>
+              </a:rPr>
+              <a:t>▪ 腐蚀品溅到皮肤会造成灼伤</a:t>
+            </a:r>
+          </a:p>
+          <a:p>
+            <a:pPr>
+              <a:spcAft>
+                <a:spcPts val="1000"/>
+              </a:spcAft>
+            </a:pPr>
+            <a:r>
+              <a:rPr sz="2000">
+                <a:solidFill>
+                  <a:srgbClr val="222B33"/>
+                </a:solidFill>
+                <a:latin typeface="Microsoft YaHei"/>
+              </a:rPr>
+              <a:t>▪ 飞溅风险大时，实验服外加耐化学品围裙</a:t>
+            </a:r>
+          </a:p>
+          <a:p>
+            <a:pPr>
+              <a:spcAft>
+                <a:spcPts val="1000"/>
+              </a:spcAft>
+            </a:pPr>
+            <a:r>
+              <a:rPr sz="2000">
+                <a:solidFill>
+                  <a:srgbClr val="222B33"/>
+                </a:solidFill>
+                <a:latin typeface="Microsoft YaHei"/>
+              </a:rPr>
+              <a:t>▪ 浓酸、易挥发或活泼溶液操作要加围裙</a:t>
+            </a:r>
+          </a:p>
+          <a:p>
+            <a:pPr>
+              <a:spcAft>
+                <a:spcPts val="1000"/>
+              </a:spcAft>
+            </a:pPr>
+            <a:r>
+              <a:rPr sz="2000">
+                <a:solidFill>
+                  <a:srgbClr val="222B33"/>
+                </a:solidFill>
+                <a:latin typeface="Microsoft YaHei"/>
+              </a:rPr>
+              <a:t>▪ 围裙溅上了，一解就能脱下</a:t>
+            </a:r>
+          </a:p>
+        </p:txBody>
+      </p:sp>
+      <p:sp>
+        <p:nvSpPr>
+          <p:cNvPr id="9" name="TextBox 8"/>
+          <p:cNvSpPr txBox="1"/>
+          <p:nvPr/>
+        </p:nvSpPr>
+        <p:spPr>
+          <a:xfrm>
+            <a:off x="914400" y="4782312"/>
+            <a:ext cx="5925129" cy="320040"/>
+          </a:xfrm>
+          <a:prstGeom prst="rect">
+            <a:avLst/>
+          </a:prstGeom>
+          <a:noFill/>
+        </p:spPr>
+        <p:txBody>
+          <a:bodyPr wrap="square" anchor="t" lIns="0" rIns="0" tIns="0" bIns="0">
+            <a:spAutoFit/>
+          </a:bodyPr>
+          <a:lstStyle/>
+          <a:p>
+            <a:pPr algn="l"/>
+            <a:r>
+              <a:rPr sz="1300" b="1">
+                <a:solidFill>
+                  <a:srgbClr val="1D7A8C"/>
+                </a:solidFill>
+                <a:latin typeface="Microsoft YaHei"/>
+              </a:rPr>
+              <a:t>说明</a:t>
+            </a:r>
+          </a:p>
+        </p:txBody>
+      </p:sp>
+      <p:sp>
+        <p:nvSpPr>
+          <p:cNvPr id="10" name="TextBox 9"/>
+          <p:cNvSpPr txBox="1"/>
+          <p:nvPr/>
+        </p:nvSpPr>
+        <p:spPr>
+          <a:xfrm>
+            <a:off x="914400" y="5148072"/>
+            <a:ext cx="5925129" cy="612648"/>
+          </a:xfrm>
+          <a:prstGeom prst="rect">
+            <a:avLst/>
+          </a:prstGeom>
+          <a:noFill/>
+        </p:spPr>
+        <p:txBody>
+          <a:bodyPr wrap="square" anchor="t" lIns="0" rIns="0" tIns="0" bIns="0">
+            <a:spAutoFit/>
+          </a:bodyPr>
+          <a:lstStyle/>
+          <a:p>
+            <a:pPr algn="l"/>
+            <a:r>
+              <a:rPr sz="1400" b="0">
+                <a:solidFill>
+                  <a:srgbClr val="5F6B75"/>
+                </a:solidFill>
+                <a:latin typeface="Microsoft YaHei"/>
+              </a:rPr>
+              <a:t>腐蚀品溅到皮肤上会造成化学灼伤，而实验服面料会被浸透。处理浓酸浓碱、易挥发或活泼的溶液，或者有较大喷溅风险时（如大量转移、稀释），要在实验服外面再加一条耐化学品围裙。</a:t>
+            </a:r>
+          </a:p>
+        </p:txBody>
+      </p:sp>
+      <p:sp>
+        <p:nvSpPr>
+          <p:cNvPr id="11" name="Rounded Rectangle 10"/>
+          <p:cNvSpPr/>
+          <p:nvPr/>
+        </p:nvSpPr>
+        <p:spPr>
+          <a:xfrm>
+            <a:off x="7571049" y="1645920"/>
+            <a:ext cx="4072006" cy="4389120"/>
+          </a:xfrm>
+          <a:prstGeom prst="roundRect">
+            <a:avLst>
+              <a:gd name="adj" fmla="val 8000"/>
+            </a:avLst>
+          </a:prstGeom>
+          <a:solidFill>
+            <a:srgbClr val="FBECEA"/>
+          </a:solidFill>
+          <a:ln>
+            <a:noFill/>
+          </a:ln>
+          <a:effectLst/>
+        </p:spPr>
+        <p:style>
+          <a:lnRef idx="1">
+            <a:schemeClr val="accent1"/>
+          </a:lnRef>
+          <a:fillRef idx="3">
+            <a:schemeClr val="accent1"/>
+          </a:fillRef>
+          <a:effectRef idx="2">
+            <a:schemeClr val="accent1"/>
+          </a:effectRef>
+          <a:fontRef idx="minor">
+            <a:schemeClr val="lt1"/>
+          </a:fontRef>
+        </p:style>
+        <p:txBody>
+          <a:bodyPr rtlCol="0" anchor="ctr"/>
+          <a:lstStyle/>
+          <a:p>
+            <a:pPr algn="ctr"/>
+          </a:p>
+        </p:txBody>
+      </p:sp>
+      <p:sp>
+        <p:nvSpPr>
+          <p:cNvPr id="12" name="Oval 11"/>
+          <p:cNvSpPr/>
+          <p:nvPr/>
+        </p:nvSpPr>
+        <p:spPr>
+          <a:xfrm>
+            <a:off x="7936809" y="1828800"/>
+            <a:ext cx="457200" cy="457200"/>
+          </a:xfrm>
+          <a:prstGeom prst="ellipse">
+            <a:avLst/>
+          </a:prstGeom>
+          <a:solidFill>
+            <a:srgbClr val="C0392B"/>
+          </a:solidFill>
+          <a:ln>
+            <a:noFill/>
+          </a:ln>
+          <a:effectLst/>
+        </p:spPr>
+        <p:style>
+          <a:lnRef idx="1">
+            <a:schemeClr val="accent1"/>
+          </a:lnRef>
+          <a:fillRef idx="3">
+            <a:schemeClr val="accent1"/>
+          </a:fillRef>
+          <a:effectRef idx="2">
+            <a:schemeClr val="accent1"/>
+          </a:effectRef>
+          <a:fontRef idx="minor">
+            <a:schemeClr val="lt1"/>
+          </a:fontRef>
+        </p:style>
+        <p:txBody>
+          <a:bodyPr rtlCol="0" anchor="ctr" lIns="0" rIns="0" tIns="0" bIns="0"/>
+          <a:lstStyle/>
+          <a:p>
+            <a:pPr algn="ctr"/>
+            <a:r>
+              <a:rPr sz="1600" b="1">
+                <a:solidFill>
+                  <a:srgbClr val="FFFFFF"/>
+                </a:solidFill>
+                <a:latin typeface="Microsoft YaHei"/>
+              </a:rPr>
+              <a:t>✕</a:t>
+            </a:r>
+          </a:p>
+        </p:txBody>
+      </p:sp>
+      <p:sp>
+        <p:nvSpPr>
+          <p:cNvPr id="13" name="TextBox 12"/>
+          <p:cNvSpPr txBox="1"/>
+          <p:nvPr/>
+        </p:nvSpPr>
+        <p:spPr>
+          <a:xfrm>
+            <a:off x="8531169" y="1874519"/>
+            <a:ext cx="2791846" cy="365760"/>
+          </a:xfrm>
+          <a:prstGeom prst="rect">
+            <a:avLst/>
+          </a:prstGeom>
+          <a:noFill/>
+        </p:spPr>
+        <p:txBody>
+          <a:bodyPr wrap="square" anchor="t" lIns="0" rIns="0" tIns="0" bIns="0">
+            <a:spAutoFit/>
+          </a:bodyPr>
+          <a:lstStyle/>
+          <a:p>
+            <a:pPr algn="l"/>
+            <a:r>
+              <a:rPr sz="1600" b="1">
+                <a:solidFill>
+                  <a:srgbClr val="C0392B"/>
+                </a:solidFill>
+                <a:latin typeface="Microsoft YaHei"/>
+              </a:rPr>
+              <a:t>常见错误</a:t>
+            </a:r>
+          </a:p>
+        </p:txBody>
+      </p:sp>
+      <p:sp>
+        <p:nvSpPr>
+          <p:cNvPr id="14" name="TextBox 13"/>
+          <p:cNvSpPr txBox="1"/>
+          <p:nvPr/>
+        </p:nvSpPr>
+        <p:spPr>
+          <a:xfrm>
+            <a:off x="7936809" y="2514600"/>
+            <a:ext cx="3340486" cy="3291840"/>
+          </a:xfrm>
+          <a:prstGeom prst="rect">
+            <a:avLst/>
+          </a:prstGeom>
+          <a:noFill/>
+        </p:spPr>
+        <p:txBody>
+          <a:bodyPr wrap="square" lIns="0" rIns="0" tIns="0" bIns="0">
+            <a:spAutoFit/>
+          </a:bodyPr>
+          <a:lstStyle/>
+          <a:p>
+            <a:pPr>
+              <a:spcAft>
+                <a:spcPts val="1000"/>
+              </a:spcAft>
+            </a:pPr>
+            <a:r>
+              <a:rPr sz="1500">
+                <a:solidFill>
+                  <a:srgbClr val="222B33"/>
+                </a:solidFill>
+                <a:latin typeface="Microsoft YaHei"/>
+              </a:rPr>
+              <a:t>▪ 大量转移浓酸时只穿普通实验服</a:t>
+            </a:r>
+          </a:p>
+          <a:p>
+            <a:pPr>
+              <a:spcAft>
+                <a:spcPts val="1000"/>
+              </a:spcAft>
+            </a:pPr>
+            <a:r>
+              <a:rPr sz="1500">
+                <a:solidFill>
+                  <a:srgbClr val="222B33"/>
+                </a:solidFill>
+                <a:latin typeface="Microsoft YaHei"/>
+              </a:rPr>
+              <a:t>▪ 用普通布围裙代替耐化学品围裙</a:t>
+            </a:r>
+          </a:p>
+        </p:txBody>
+      </p:sp>
+    </p:spTree>
+  </p:cSld>
+  <p:clrMapOvr>
+    <a:masterClrMapping/>
+  </p:clrMapOvr>
+</p:sld>
+</file>
+
+<file path=ppt/slides/slide96.xml><?xml version="1.0" encoding="utf-8"?>
+<p:sld xmlns:a="http://schemas.openxmlformats.org/drawingml/2006/main" xmlns:p="http://schemas.openxmlformats.org/presentationml/2006/main" xmlns:r="http://schemas.openxmlformats.org/officeDocument/2006/relationships">
+  <p:cSld>
+    <p:bg>
+      <p:bgPr>
+        <a:solidFill>
+          <a:srgbClr val="FFFFFF"/>
+        </a:solidFill>
+        <a:effectLst/>
+      </p:bgPr>
+    </p:bg>
+    <p:spTree>
+      <p:nvGrpSpPr>
+        <p:cNvPr id="1" name=""/>
+        <p:cNvGrpSpPr/>
+        <p:nvPr/>
+      </p:nvGrpSpPr>
+      <p:grpSpPr/>
+      <p:sp>
+        <p:nvSpPr>
+          <p:cNvPr id="2" name="TextBox 1"/>
+          <p:cNvSpPr txBox="1"/>
+          <p:nvPr/>
+        </p:nvSpPr>
+        <p:spPr>
+          <a:xfrm>
+            <a:off x="548640" y="320040"/>
+            <a:ext cx="8229600" cy="320040"/>
+          </a:xfrm>
+          <a:prstGeom prst="rect">
+            <a:avLst/>
+          </a:prstGeom>
+          <a:noFill/>
+        </p:spPr>
+        <p:txBody>
+          <a:bodyPr wrap="square" anchor="t" lIns="0" rIns="0" tIns="0" bIns="0">
+            <a:spAutoFit/>
+          </a:bodyPr>
+          <a:lstStyle/>
+          <a:p>
+            <a:pPr algn="l"/>
+            <a:r>
+              <a:rPr sz="1200" b="1">
+                <a:solidFill>
+                  <a:srgbClr val="1D7A8C"/>
+                </a:solidFill>
+                <a:latin typeface="Microsoft YaHei"/>
+              </a:rPr>
+              <a:t>024 · 实验服与防护服</a:t>
+            </a:r>
+          </a:p>
+        </p:txBody>
+      </p:sp>
+      <p:sp>
+        <p:nvSpPr>
+          <p:cNvPr id="3" name="TextBox 2"/>
+          <p:cNvSpPr txBox="1"/>
+          <p:nvPr/>
+        </p:nvSpPr>
+        <p:spPr>
+          <a:xfrm>
+            <a:off x="548640" y="640080"/>
+            <a:ext cx="11094415" cy="731520"/>
+          </a:xfrm>
+          <a:prstGeom prst="rect">
+            <a:avLst/>
+          </a:prstGeom>
+          <a:noFill/>
+        </p:spPr>
+        <p:txBody>
+          <a:bodyPr wrap="square" anchor="t" lIns="0" rIns="0" tIns="0" bIns="0">
+            <a:spAutoFit/>
+          </a:bodyPr>
+          <a:lstStyle/>
+          <a:p>
+            <a:pPr algn="l"/>
+            <a:r>
+              <a:rPr sz="3000" b="1">
+                <a:solidFill>
+                  <a:srgbClr val="0B3C5D"/>
+                </a:solidFill>
+                <a:latin typeface="Microsoft YaHei"/>
+              </a:rPr>
+              <a:t>防护服按危害选，沾污就换</a:t>
+            </a:r>
+          </a:p>
+        </p:txBody>
+      </p:sp>
+      <p:sp>
+        <p:nvSpPr>
+          <p:cNvPr id="4" name="TextBox 3"/>
+          <p:cNvSpPr txBox="1"/>
+          <p:nvPr/>
+        </p:nvSpPr>
+        <p:spPr>
+          <a:xfrm>
+            <a:off x="548640" y="6446520"/>
+            <a:ext cx="7315200" cy="274320"/>
+          </a:xfrm>
+          <a:prstGeom prst="rect">
+            <a:avLst/>
+          </a:prstGeom>
+          <a:noFill/>
+        </p:spPr>
+        <p:txBody>
+          <a:bodyPr wrap="square" anchor="t" lIns="0" rIns="0" tIns="0" bIns="0">
+            <a:spAutoFit/>
+          </a:bodyPr>
+          <a:lstStyle/>
+          <a:p>
+            <a:pPr algn="l"/>
+            <a:r>
+              <a:rPr sz="1000" b="0">
+                <a:solidFill>
+                  <a:srgbClr val="5F6B75"/>
+                </a:solidFill>
+                <a:latin typeface="Microsoft YaHei"/>
+              </a:rPr>
+              <a:t>《高校实验室安全》 024 实验服与防护服</a:t>
+            </a:r>
+          </a:p>
+        </p:txBody>
+      </p:sp>
+      <p:sp>
+        <p:nvSpPr>
+          <p:cNvPr id="5" name="Oval 4"/>
+          <p:cNvSpPr/>
+          <p:nvPr/>
+        </p:nvSpPr>
+        <p:spPr>
+          <a:xfrm>
+            <a:off x="10820095" y="411480"/>
+            <a:ext cx="822960" cy="822960"/>
+          </a:xfrm>
+          <a:prstGeom prst="ellipse">
+            <a:avLst/>
+          </a:prstGeom>
+          <a:solidFill>
+            <a:srgbClr val="F28C28"/>
+          </a:solidFill>
+          <a:ln>
+            <a:noFill/>
+          </a:ln>
+          <a:effectLst/>
+        </p:spPr>
+        <p:style>
+          <a:lnRef idx="1">
+            <a:schemeClr val="accent1"/>
+          </a:lnRef>
+          <a:fillRef idx="3">
+            <a:schemeClr val="accent1"/>
+          </a:fillRef>
+          <a:effectRef idx="2">
+            <a:schemeClr val="accent1"/>
+          </a:effectRef>
+          <a:fontRef idx="minor">
+            <a:schemeClr val="lt1"/>
+          </a:fontRef>
+        </p:style>
+        <p:txBody>
+          <a:bodyPr rtlCol="0" anchor="ctr" lIns="0" rIns="0" tIns="0" bIns="0"/>
+          <a:lstStyle/>
+          <a:p>
+            <a:pPr algn="ctr"/>
+            <a:r>
+              <a:rPr sz="1800" b="1">
+                <a:solidFill>
+                  <a:srgbClr val="FFFFFF"/>
+                </a:solidFill>
+                <a:latin typeface="Microsoft YaHei"/>
+              </a:rPr>
+              <a:t>K6</a:t>
+            </a:r>
+          </a:p>
+        </p:txBody>
+      </p:sp>
+      <p:sp>
+        <p:nvSpPr>
+          <p:cNvPr id="6" name="Rounded Rectangle 5"/>
+          <p:cNvSpPr/>
+          <p:nvPr/>
+        </p:nvSpPr>
+        <p:spPr>
+          <a:xfrm>
+            <a:off x="548640" y="1645920"/>
+            <a:ext cx="6656649" cy="4389120"/>
+          </a:xfrm>
+          <a:prstGeom prst="roundRect">
+            <a:avLst>
+              <a:gd name="adj" fmla="val 8000"/>
+            </a:avLst>
+          </a:prstGeom>
+          <a:solidFill>
+            <a:srgbClr val="EEF4F7"/>
+          </a:solidFill>
+          <a:ln>
+            <a:noFill/>
+          </a:ln>
+          <a:effectLst/>
+        </p:spPr>
+        <p:style>
+          <a:lnRef idx="1">
+            <a:schemeClr val="accent1"/>
+          </a:lnRef>
+          <a:fillRef idx="3">
+            <a:schemeClr val="accent1"/>
+          </a:fillRef>
+          <a:effectRef idx="2">
+            <a:schemeClr val="accent1"/>
+          </a:effectRef>
+          <a:fontRef idx="minor">
+            <a:schemeClr val="lt1"/>
+          </a:fontRef>
+        </p:style>
+        <p:txBody>
+          <a:bodyPr rtlCol="0" anchor="ctr"/>
+          <a:lstStyle/>
+          <a:p>
+            <a:pPr algn="ctr"/>
+          </a:p>
+        </p:txBody>
+      </p:sp>
+      <p:sp>
+        <p:nvSpPr>
+          <p:cNvPr id="7" name="TextBox 6"/>
+          <p:cNvSpPr txBox="1"/>
+          <p:nvPr/>
+        </p:nvSpPr>
+        <p:spPr>
+          <a:xfrm>
+            <a:off x="914400" y="1874519"/>
+            <a:ext cx="2743200" cy="365760"/>
+          </a:xfrm>
+          <a:prstGeom prst="rect">
+            <a:avLst/>
+          </a:prstGeom>
+          <a:noFill/>
+        </p:spPr>
+        <p:txBody>
+          <a:bodyPr wrap="square" anchor="t" lIns="0" rIns="0" tIns="0" bIns="0">
+            <a:spAutoFit/>
+          </a:bodyPr>
+          <a:lstStyle/>
+          <a:p>
+            <a:pPr algn="l"/>
+            <a:r>
+              <a:rPr sz="1600" b="1">
+                <a:solidFill>
+                  <a:srgbClr val="1D7A8C"/>
+                </a:solidFill>
+                <a:latin typeface="Microsoft YaHei"/>
+              </a:rPr>
+              <a:t>要点</a:t>
+            </a:r>
+          </a:p>
+        </p:txBody>
+      </p:sp>
+      <p:sp>
+        <p:nvSpPr>
+          <p:cNvPr id="8" name="TextBox 7"/>
+          <p:cNvSpPr txBox="1"/>
+          <p:nvPr/>
+        </p:nvSpPr>
+        <p:spPr>
+          <a:xfrm>
+            <a:off x="914400" y="2377440"/>
+            <a:ext cx="5925129" cy="2267712"/>
+          </a:xfrm>
+          <a:prstGeom prst="rect">
+            <a:avLst/>
+          </a:prstGeom>
+          <a:noFill/>
+        </p:spPr>
+        <p:txBody>
+          <a:bodyPr wrap="square" lIns="0" rIns="0" tIns="0" bIns="0">
+            <a:spAutoFit/>
+          </a:bodyPr>
+          <a:lstStyle/>
+          <a:p>
+            <a:pPr>
+              <a:spcAft>
+                <a:spcPts val="1000"/>
+              </a:spcAft>
+            </a:pPr>
+            <a:r>
+              <a:rPr sz="2000">
+                <a:solidFill>
+                  <a:srgbClr val="222B33"/>
+                </a:solidFill>
+                <a:latin typeface="Microsoft YaHei"/>
+              </a:rPr>
+              <a:t>▪ 挡飞溅的防护服要能防水</a:t>
+            </a:r>
+          </a:p>
+          <a:p>
+            <a:pPr>
+              <a:spcAft>
+                <a:spcPts val="1000"/>
+              </a:spcAft>
+            </a:pPr>
+            <a:r>
+              <a:rPr sz="2000">
+                <a:solidFill>
+                  <a:srgbClr val="222B33"/>
+                </a:solidFill>
+                <a:latin typeface="Microsoft YaHei"/>
+              </a:rPr>
+              <a:t>▪ 高温、化学品、近水作业，各有对应防护服</a:t>
+            </a:r>
+          </a:p>
+          <a:p>
+            <a:pPr>
+              <a:spcAft>
+                <a:spcPts val="1000"/>
+              </a:spcAft>
+            </a:pPr>
+            <a:r>
+              <a:rPr sz="2000">
+                <a:solidFill>
+                  <a:srgbClr val="222B33"/>
+                </a:solidFill>
+                <a:latin typeface="Microsoft YaHei"/>
+              </a:rPr>
+              <a:t>▪ 道路旁、光线暗处作业，穿反光衣</a:t>
+            </a:r>
+          </a:p>
+          <a:p>
+            <a:pPr>
+              <a:spcAft>
+                <a:spcPts val="1000"/>
+              </a:spcAft>
+            </a:pPr>
+            <a:r>
+              <a:rPr sz="2000">
+                <a:solidFill>
+                  <a:srgbClr val="222B33"/>
+                </a:solidFill>
+                <a:latin typeface="Microsoft YaHei"/>
+              </a:rPr>
+              <a:t>▪ 防护服沾污，立即放到指定地点，换干净的</a:t>
+            </a:r>
+          </a:p>
+        </p:txBody>
+      </p:sp>
+      <p:sp>
+        <p:nvSpPr>
+          <p:cNvPr id="9" name="TextBox 8"/>
+          <p:cNvSpPr txBox="1"/>
+          <p:nvPr/>
+        </p:nvSpPr>
+        <p:spPr>
+          <a:xfrm>
+            <a:off x="914400" y="4782312"/>
+            <a:ext cx="5925129" cy="320040"/>
+          </a:xfrm>
+          <a:prstGeom prst="rect">
+            <a:avLst/>
+          </a:prstGeom>
+          <a:noFill/>
+        </p:spPr>
+        <p:txBody>
+          <a:bodyPr wrap="square" anchor="t" lIns="0" rIns="0" tIns="0" bIns="0">
+            <a:spAutoFit/>
+          </a:bodyPr>
+          <a:lstStyle/>
+          <a:p>
+            <a:pPr algn="l"/>
+            <a:r>
+              <a:rPr sz="1300" b="1">
+                <a:solidFill>
+                  <a:srgbClr val="1D7A8C"/>
+                </a:solidFill>
+                <a:latin typeface="Microsoft YaHei"/>
+              </a:rPr>
+              <a:t>说明</a:t>
+            </a:r>
+          </a:p>
+        </p:txBody>
+      </p:sp>
+      <p:sp>
+        <p:nvSpPr>
+          <p:cNvPr id="10" name="TextBox 9"/>
+          <p:cNvSpPr txBox="1"/>
+          <p:nvPr/>
+        </p:nvSpPr>
+        <p:spPr>
+          <a:xfrm>
+            <a:off x="914400" y="5148072"/>
+            <a:ext cx="5925129" cy="612648"/>
+          </a:xfrm>
+          <a:prstGeom prst="rect">
+            <a:avLst/>
+          </a:prstGeom>
+          <a:noFill/>
+        </p:spPr>
+        <p:txBody>
+          <a:bodyPr wrap="square" anchor="t" lIns="0" rIns="0" tIns="0" bIns="0">
+            <a:spAutoFit/>
+          </a:bodyPr>
+          <a:lstStyle/>
+          <a:p>
+            <a:pPr algn="l"/>
+            <a:r>
+              <a:rPr sz="1400" b="0">
+                <a:solidFill>
+                  <a:srgbClr val="5F6B75"/>
+                </a:solidFill>
+                <a:latin typeface="Microsoft YaHei"/>
+              </a:rPr>
+              <a:t>实验服之外，有些工作需要专门的防护服：用于阻挡化学品飞溅的防护服要能防水（防液体渗透），才能真正挡住；高温作业、化学品作业、近水作业各有对应的防护服，按风险评估和 GB 39800.1-2020（以现行文本为准）的配……</a:t>
+            </a:r>
+          </a:p>
+        </p:txBody>
+      </p:sp>
+      <p:sp>
+        <p:nvSpPr>
+          <p:cNvPr id="11" name="Rounded Rectangle 10"/>
+          <p:cNvSpPr/>
+          <p:nvPr/>
+        </p:nvSpPr>
+        <p:spPr>
+          <a:xfrm>
+            <a:off x="7571049" y="1645920"/>
+            <a:ext cx="4072006" cy="4389120"/>
+          </a:xfrm>
+          <a:prstGeom prst="roundRect">
+            <a:avLst>
+              <a:gd name="adj" fmla="val 8000"/>
+            </a:avLst>
+          </a:prstGeom>
+          <a:solidFill>
+            <a:srgbClr val="FBECEA"/>
+          </a:solidFill>
+          <a:ln>
+            <a:noFill/>
+          </a:ln>
+          <a:effectLst/>
+        </p:spPr>
+        <p:style>
+          <a:lnRef idx="1">
+            <a:schemeClr val="accent1"/>
+          </a:lnRef>
+          <a:fillRef idx="3">
+            <a:schemeClr val="accent1"/>
+          </a:fillRef>
+          <a:effectRef idx="2">
+            <a:schemeClr val="accent1"/>
+          </a:effectRef>
+          <a:fontRef idx="minor">
+            <a:schemeClr val="lt1"/>
+          </a:fontRef>
+        </p:style>
+        <p:txBody>
+          <a:bodyPr rtlCol="0" anchor="ctr"/>
+          <a:lstStyle/>
+          <a:p>
+            <a:pPr algn="ctr"/>
+          </a:p>
+        </p:txBody>
+      </p:sp>
+      <p:sp>
+        <p:nvSpPr>
+          <p:cNvPr id="12" name="Oval 11"/>
+          <p:cNvSpPr/>
+          <p:nvPr/>
+        </p:nvSpPr>
+        <p:spPr>
+          <a:xfrm>
+            <a:off x="7936809" y="1828800"/>
+            <a:ext cx="457200" cy="457200"/>
+          </a:xfrm>
+          <a:prstGeom prst="ellipse">
+            <a:avLst/>
+          </a:prstGeom>
+          <a:solidFill>
+            <a:srgbClr val="C0392B"/>
+          </a:solidFill>
+          <a:ln>
+            <a:noFill/>
+          </a:ln>
+          <a:effectLst/>
+        </p:spPr>
+        <p:style>
+          <a:lnRef idx="1">
+            <a:schemeClr val="accent1"/>
+          </a:lnRef>
+          <a:fillRef idx="3">
+            <a:schemeClr val="accent1"/>
+          </a:fillRef>
+          <a:effectRef idx="2">
+            <a:schemeClr val="accent1"/>
+          </a:effectRef>
+          <a:fontRef idx="minor">
+            <a:schemeClr val="lt1"/>
+          </a:fontRef>
+        </p:style>
+        <p:txBody>
+          <a:bodyPr rtlCol="0" anchor="ctr" lIns="0" rIns="0" tIns="0" bIns="0"/>
+          <a:lstStyle/>
+          <a:p>
+            <a:pPr algn="ctr"/>
+            <a:r>
+              <a:rPr sz="1600" b="1">
+                <a:solidFill>
+                  <a:srgbClr val="FFFFFF"/>
+                </a:solidFill>
+                <a:latin typeface="Microsoft YaHei"/>
+              </a:rPr>
+              <a:t>✕</a:t>
+            </a:r>
+          </a:p>
+        </p:txBody>
+      </p:sp>
+      <p:sp>
+        <p:nvSpPr>
+          <p:cNvPr id="13" name="TextBox 12"/>
+          <p:cNvSpPr txBox="1"/>
+          <p:nvPr/>
+        </p:nvSpPr>
+        <p:spPr>
+          <a:xfrm>
+            <a:off x="8531169" y="1874519"/>
+            <a:ext cx="2791846" cy="365760"/>
+          </a:xfrm>
+          <a:prstGeom prst="rect">
+            <a:avLst/>
+          </a:prstGeom>
+          <a:noFill/>
+        </p:spPr>
+        <p:txBody>
+          <a:bodyPr wrap="square" anchor="t" lIns="0" rIns="0" tIns="0" bIns="0">
+            <a:spAutoFit/>
+          </a:bodyPr>
+          <a:lstStyle/>
+          <a:p>
+            <a:pPr algn="l"/>
+            <a:r>
+              <a:rPr sz="1600" b="1">
+                <a:solidFill>
+                  <a:srgbClr val="C0392B"/>
+                </a:solidFill>
+                <a:latin typeface="Microsoft YaHei"/>
+              </a:rPr>
+              <a:t>常见错误</a:t>
+            </a:r>
+          </a:p>
+        </p:txBody>
+      </p:sp>
+      <p:sp>
+        <p:nvSpPr>
+          <p:cNvPr id="14" name="TextBox 13"/>
+          <p:cNvSpPr txBox="1"/>
+          <p:nvPr/>
+        </p:nvSpPr>
+        <p:spPr>
+          <a:xfrm>
+            <a:off x="7936809" y="2514600"/>
+            <a:ext cx="3340486" cy="3291840"/>
+          </a:xfrm>
+          <a:prstGeom prst="rect">
+            <a:avLst/>
+          </a:prstGeom>
+          <a:noFill/>
+        </p:spPr>
+        <p:txBody>
+          <a:bodyPr wrap="square" lIns="0" rIns="0" tIns="0" bIns="0">
+            <a:spAutoFit/>
+          </a:bodyPr>
+          <a:lstStyle/>
+          <a:p>
+            <a:pPr>
+              <a:spcAft>
+                <a:spcPts val="1000"/>
+              </a:spcAft>
+            </a:pPr>
+            <a:r>
+              <a:rPr sz="1500">
+                <a:solidFill>
+                  <a:srgbClr val="222B33"/>
+                </a:solidFill>
+                <a:latin typeface="Microsoft YaHei"/>
+              </a:rPr>
+              <a:t>▪ 用不防水的普通工作服挡化学品飞溅</a:t>
+            </a:r>
+          </a:p>
+          <a:p>
+            <a:pPr>
+              <a:spcAft>
+                <a:spcPts val="1000"/>
+              </a:spcAft>
+            </a:pPr>
+            <a:r>
+              <a:rPr sz="1500">
+                <a:solidFill>
+                  <a:srgbClr val="222B33"/>
+                </a:solidFill>
+                <a:latin typeface="Microsoft YaHei"/>
+              </a:rPr>
+              <a:t>▪ 防护服沾污了还继续穿</a:t>
+            </a:r>
+          </a:p>
+        </p:txBody>
+      </p:sp>
+    </p:spTree>
+  </p:cSld>
+  <p:clrMapOvr>
+    <a:masterClrMapping/>
+  </p:clrMapOvr>
+</p:sld>
+</file>
+
+<file path=ppt/slides/slide97.xml><?xml version="1.0" encoding="utf-8"?>
+<p:sld xmlns:a="http://schemas.openxmlformats.org/drawingml/2006/main" xmlns:p="http://schemas.openxmlformats.org/presentationml/2006/main" xmlns:r="http://schemas.openxmlformats.org/officeDocument/2006/relationships">
+  <p:cSld>
+    <p:bg>
+      <p:bgPr>
+        <a:solidFill>
+          <a:srgbClr val="FFFFFF"/>
+        </a:solidFill>
+        <a:effectLst/>
+      </p:bgPr>
+    </p:bg>
+    <p:spTree>
+      <p:nvGrpSpPr>
+        <p:cNvPr id="1" name=""/>
+        <p:cNvGrpSpPr/>
+        <p:nvPr/>
+      </p:nvGrpSpPr>
+      <p:grpSpPr/>
+      <p:sp>
+        <p:nvSpPr>
+          <p:cNvPr id="2" name="TextBox 1"/>
+          <p:cNvSpPr txBox="1"/>
+          <p:nvPr/>
+        </p:nvSpPr>
+        <p:spPr>
+          <a:xfrm>
+            <a:off x="548640" y="320040"/>
+            <a:ext cx="8229600" cy="320040"/>
+          </a:xfrm>
+          <a:prstGeom prst="rect">
+            <a:avLst/>
+          </a:prstGeom>
+          <a:noFill/>
+        </p:spPr>
+        <p:txBody>
+          <a:bodyPr wrap="square" anchor="t" lIns="0" rIns="0" tIns="0" bIns="0">
+            <a:spAutoFit/>
+          </a:bodyPr>
+          <a:lstStyle/>
+          <a:p>
+            <a:pPr algn="l"/>
+            <a:r>
+              <a:rPr sz="1200" b="1">
+                <a:solidFill>
+                  <a:srgbClr val="1D7A8C"/>
+                </a:solidFill>
+                <a:latin typeface="Microsoft YaHei"/>
+              </a:rPr>
+              <a:t>024 · 实验服与防护服</a:t>
+            </a:r>
+          </a:p>
+        </p:txBody>
+      </p:sp>
+      <p:sp>
+        <p:nvSpPr>
+          <p:cNvPr id="3" name="TextBox 2"/>
+          <p:cNvSpPr txBox="1"/>
+          <p:nvPr/>
+        </p:nvSpPr>
+        <p:spPr>
+          <a:xfrm>
+            <a:off x="548640" y="640080"/>
+            <a:ext cx="11094415" cy="731520"/>
+          </a:xfrm>
+          <a:prstGeom prst="rect">
+            <a:avLst/>
+          </a:prstGeom>
+          <a:noFill/>
+        </p:spPr>
+        <p:txBody>
+          <a:bodyPr wrap="square" anchor="t" lIns="0" rIns="0" tIns="0" bIns="0">
+            <a:spAutoFit/>
+          </a:bodyPr>
+          <a:lstStyle/>
+          <a:p>
+            <a:pPr algn="l"/>
+            <a:r>
+              <a:rPr sz="3000" b="1">
+                <a:solidFill>
+                  <a:srgbClr val="0B3C5D"/>
+                </a:solidFill>
+                <a:latin typeface="Microsoft YaHei"/>
+              </a:rPr>
+              <a:t>实验服不出实验室，不带回家洗</a:t>
+            </a:r>
+          </a:p>
+        </p:txBody>
+      </p:sp>
+      <p:sp>
+        <p:nvSpPr>
+          <p:cNvPr id="4" name="TextBox 3"/>
+          <p:cNvSpPr txBox="1"/>
+          <p:nvPr/>
+        </p:nvSpPr>
+        <p:spPr>
+          <a:xfrm>
+            <a:off x="548640" y="6446520"/>
+            <a:ext cx="7315200" cy="274320"/>
+          </a:xfrm>
+          <a:prstGeom prst="rect">
+            <a:avLst/>
+          </a:prstGeom>
+          <a:noFill/>
+        </p:spPr>
+        <p:txBody>
+          <a:bodyPr wrap="square" anchor="t" lIns="0" rIns="0" tIns="0" bIns="0">
+            <a:spAutoFit/>
+          </a:bodyPr>
+          <a:lstStyle/>
+          <a:p>
+            <a:pPr algn="l"/>
+            <a:r>
+              <a:rPr sz="1000" b="0">
+                <a:solidFill>
+                  <a:srgbClr val="5F6B75"/>
+                </a:solidFill>
+                <a:latin typeface="Microsoft YaHei"/>
+              </a:rPr>
+              <a:t>《高校实验室安全》 024 实验服与防护服</a:t>
+            </a:r>
+          </a:p>
+        </p:txBody>
+      </p:sp>
+      <p:sp>
+        <p:nvSpPr>
+          <p:cNvPr id="5" name="Oval 4"/>
+          <p:cNvSpPr/>
+          <p:nvPr/>
+        </p:nvSpPr>
+        <p:spPr>
+          <a:xfrm>
+            <a:off x="10820095" y="411480"/>
+            <a:ext cx="822960" cy="822960"/>
+          </a:xfrm>
+          <a:prstGeom prst="ellipse">
+            <a:avLst/>
+          </a:prstGeom>
+          <a:solidFill>
+            <a:srgbClr val="F28C28"/>
+          </a:solidFill>
+          <a:ln>
+            <a:noFill/>
+          </a:ln>
+          <a:effectLst/>
+        </p:spPr>
+        <p:style>
+          <a:lnRef idx="1">
+            <a:schemeClr val="accent1"/>
+          </a:lnRef>
+          <a:fillRef idx="3">
+            <a:schemeClr val="accent1"/>
+          </a:fillRef>
+          <a:effectRef idx="2">
+            <a:schemeClr val="accent1"/>
+          </a:effectRef>
+          <a:fontRef idx="minor">
+            <a:schemeClr val="lt1"/>
+          </a:fontRef>
+        </p:style>
+        <p:txBody>
+          <a:bodyPr rtlCol="0" anchor="ctr" lIns="0" rIns="0" tIns="0" bIns="0"/>
+          <a:lstStyle/>
+          <a:p>
+            <a:pPr algn="ctr"/>
+            <a:r>
+              <a:rPr sz="1800" b="1">
+                <a:solidFill>
+                  <a:srgbClr val="FFFFFF"/>
+                </a:solidFill>
+                <a:latin typeface="Microsoft YaHei"/>
+              </a:rPr>
+              <a:t>K7</a:t>
+            </a:r>
+          </a:p>
+        </p:txBody>
+      </p:sp>
+      <p:sp>
+        <p:nvSpPr>
+          <p:cNvPr id="6" name="Rounded Rectangle 5"/>
+          <p:cNvSpPr/>
+          <p:nvPr/>
+        </p:nvSpPr>
+        <p:spPr>
+          <a:xfrm>
+            <a:off x="548640" y="1645920"/>
+            <a:ext cx="6656649" cy="4389120"/>
+          </a:xfrm>
+          <a:prstGeom prst="roundRect">
+            <a:avLst>
+              <a:gd name="adj" fmla="val 8000"/>
+            </a:avLst>
+          </a:prstGeom>
+          <a:solidFill>
+            <a:srgbClr val="EEF4F7"/>
+          </a:solidFill>
+          <a:ln>
+            <a:noFill/>
+          </a:ln>
+          <a:effectLst/>
+        </p:spPr>
+        <p:style>
+          <a:lnRef idx="1">
+            <a:schemeClr val="accent1"/>
+          </a:lnRef>
+          <a:fillRef idx="3">
+            <a:schemeClr val="accent1"/>
+          </a:fillRef>
+          <a:effectRef idx="2">
+            <a:schemeClr val="accent1"/>
+          </a:effectRef>
+          <a:fontRef idx="minor">
+            <a:schemeClr val="lt1"/>
+          </a:fontRef>
+        </p:style>
+        <p:txBody>
+          <a:bodyPr rtlCol="0" anchor="ctr"/>
+          <a:lstStyle/>
+          <a:p>
+            <a:pPr algn="ctr"/>
+          </a:p>
+        </p:txBody>
+      </p:sp>
+      <p:sp>
+        <p:nvSpPr>
+          <p:cNvPr id="7" name="TextBox 6"/>
+          <p:cNvSpPr txBox="1"/>
+          <p:nvPr/>
+        </p:nvSpPr>
+        <p:spPr>
+          <a:xfrm>
+            <a:off x="914400" y="1874519"/>
+            <a:ext cx="2743200" cy="365760"/>
+          </a:xfrm>
+          <a:prstGeom prst="rect">
+            <a:avLst/>
+          </a:prstGeom>
+          <a:noFill/>
+        </p:spPr>
+        <p:txBody>
+          <a:bodyPr wrap="square" anchor="t" lIns="0" rIns="0" tIns="0" bIns="0">
+            <a:spAutoFit/>
+          </a:bodyPr>
+          <a:lstStyle/>
+          <a:p>
+            <a:pPr algn="l"/>
+            <a:r>
+              <a:rPr sz="1600" b="1">
+                <a:solidFill>
+                  <a:srgbClr val="1D7A8C"/>
+                </a:solidFill>
+                <a:latin typeface="Microsoft YaHei"/>
+              </a:rPr>
+              <a:t>要点</a:t>
+            </a:r>
+          </a:p>
+        </p:txBody>
+      </p:sp>
+      <p:sp>
+        <p:nvSpPr>
+          <p:cNvPr id="8" name="TextBox 7"/>
+          <p:cNvSpPr txBox="1"/>
+          <p:nvPr/>
+        </p:nvSpPr>
+        <p:spPr>
+          <a:xfrm>
+            <a:off x="914400" y="2377440"/>
+            <a:ext cx="5925129" cy="2267712"/>
+          </a:xfrm>
+          <a:prstGeom prst="rect">
+            <a:avLst/>
+          </a:prstGeom>
+          <a:noFill/>
+        </p:spPr>
+        <p:txBody>
+          <a:bodyPr wrap="square" lIns="0" rIns="0" tIns="0" bIns="0">
+            <a:spAutoFit/>
+          </a:bodyPr>
+          <a:lstStyle/>
+          <a:p>
+            <a:pPr>
+              <a:spcAft>
+                <a:spcPts val="1000"/>
+              </a:spcAft>
+            </a:pPr>
+            <a:r>
+              <a:rPr sz="2000">
+                <a:solidFill>
+                  <a:srgbClr val="222B33"/>
+                </a:solidFill>
+                <a:latin typeface="Microsoft YaHei"/>
+              </a:rPr>
+              <a:t>▪ 不穿实验服去食堂、宿舍、办公室</a:t>
+            </a:r>
+          </a:p>
+          <a:p>
+            <a:pPr>
+              <a:spcAft>
+                <a:spcPts val="1000"/>
+              </a:spcAft>
+            </a:pPr>
+            <a:r>
+              <a:rPr sz="2000">
+                <a:solidFill>
+                  <a:srgbClr val="222B33"/>
+                </a:solidFill>
+                <a:latin typeface="Microsoft YaHei"/>
+              </a:rPr>
+              <a:t>▪ 实验服挂在实验室专区，不和便服混放</a:t>
+            </a:r>
+          </a:p>
+          <a:p>
+            <a:pPr>
+              <a:spcAft>
+                <a:spcPts val="1000"/>
+              </a:spcAft>
+            </a:pPr>
+            <a:r>
+              <a:rPr sz="2000">
+                <a:solidFill>
+                  <a:srgbClr val="222B33"/>
+                </a:solidFill>
+                <a:latin typeface="Microsoft YaHei"/>
+              </a:rPr>
+              <a:t>▪ 不带回家、不带回宿舍洗，由单位统一清洗</a:t>
+            </a:r>
+          </a:p>
+          <a:p>
+            <a:pPr>
+              <a:spcAft>
+                <a:spcPts val="1000"/>
+              </a:spcAft>
+            </a:pPr>
+            <a:r>
+              <a:rPr sz="2000">
+                <a:solidFill>
+                  <a:srgbClr val="222B33"/>
+                </a:solidFill>
+                <a:latin typeface="Microsoft YaHei"/>
+              </a:rPr>
+              <a:t>▪ 沾了菌液等污染，先消毒再统一清洗</a:t>
+            </a:r>
+          </a:p>
+        </p:txBody>
+      </p:sp>
+      <p:sp>
+        <p:nvSpPr>
+          <p:cNvPr id="9" name="TextBox 8"/>
+          <p:cNvSpPr txBox="1"/>
+          <p:nvPr/>
+        </p:nvSpPr>
+        <p:spPr>
+          <a:xfrm>
+            <a:off x="914400" y="4782312"/>
+            <a:ext cx="5925129" cy="320040"/>
+          </a:xfrm>
+          <a:prstGeom prst="rect">
+            <a:avLst/>
+          </a:prstGeom>
+          <a:noFill/>
+        </p:spPr>
+        <p:txBody>
+          <a:bodyPr wrap="square" anchor="t" lIns="0" rIns="0" tIns="0" bIns="0">
+            <a:spAutoFit/>
+          </a:bodyPr>
+          <a:lstStyle/>
+          <a:p>
+            <a:pPr algn="l"/>
+            <a:r>
+              <a:rPr sz="1300" b="1">
+                <a:solidFill>
+                  <a:srgbClr val="1D7A8C"/>
+                </a:solidFill>
+                <a:latin typeface="Microsoft YaHei"/>
+              </a:rPr>
+              <a:t>说明</a:t>
+            </a:r>
+          </a:p>
+        </p:txBody>
+      </p:sp>
+      <p:sp>
+        <p:nvSpPr>
+          <p:cNvPr id="10" name="TextBox 9"/>
+          <p:cNvSpPr txBox="1"/>
+          <p:nvPr/>
+        </p:nvSpPr>
+        <p:spPr>
+          <a:xfrm>
+            <a:off x="914400" y="5148072"/>
+            <a:ext cx="5925129" cy="612648"/>
+          </a:xfrm>
+          <a:prstGeom prst="rect">
+            <a:avLst/>
+          </a:prstGeom>
+          <a:noFill/>
+        </p:spPr>
+        <p:txBody>
+          <a:bodyPr wrap="square" anchor="t" lIns="0" rIns="0" tIns="0" bIns="0">
+            <a:spAutoFit/>
+          </a:bodyPr>
+          <a:lstStyle/>
+          <a:p>
+            <a:pPr algn="l"/>
+            <a:r>
+              <a:rPr sz="1400" b="0">
+                <a:solidFill>
+                  <a:srgbClr val="5F6B75"/>
+                </a:solidFill>
+                <a:latin typeface="Microsoft YaHei"/>
+              </a:rPr>
+              <a:t>实验服上可能沾有化学品和微生物，穿出实验室会把污染带到食堂、宿舍、办公室和会议室。离开实验区时脱下实验服，挂在实验室的专用区域，不和便服混放。</a:t>
+            </a:r>
+          </a:p>
+        </p:txBody>
+      </p:sp>
+      <p:sp>
+        <p:nvSpPr>
+          <p:cNvPr id="11" name="Rounded Rectangle 10"/>
+          <p:cNvSpPr/>
+          <p:nvPr/>
+        </p:nvSpPr>
+        <p:spPr>
+          <a:xfrm>
+            <a:off x="7571049" y="1645920"/>
+            <a:ext cx="4072006" cy="4389120"/>
+          </a:xfrm>
+          <a:prstGeom prst="roundRect">
+            <a:avLst>
+              <a:gd name="adj" fmla="val 8000"/>
+            </a:avLst>
+          </a:prstGeom>
+          <a:solidFill>
+            <a:srgbClr val="FBECEA"/>
+          </a:solidFill>
+          <a:ln>
+            <a:noFill/>
+          </a:ln>
+          <a:effectLst/>
+        </p:spPr>
+        <p:style>
+          <a:lnRef idx="1">
+            <a:schemeClr val="accent1"/>
+          </a:lnRef>
+          <a:fillRef idx="3">
+            <a:schemeClr val="accent1"/>
+          </a:fillRef>
+          <a:effectRef idx="2">
+            <a:schemeClr val="accent1"/>
+          </a:effectRef>
+          <a:fontRef idx="minor">
+            <a:schemeClr val="lt1"/>
+          </a:fontRef>
+        </p:style>
+        <p:txBody>
+          <a:bodyPr rtlCol="0" anchor="ctr"/>
+          <a:lstStyle/>
+          <a:p>
+            <a:pPr algn="ctr"/>
+          </a:p>
+        </p:txBody>
+      </p:sp>
+      <p:sp>
+        <p:nvSpPr>
+          <p:cNvPr id="12" name="Oval 11"/>
+          <p:cNvSpPr/>
+          <p:nvPr/>
+        </p:nvSpPr>
+        <p:spPr>
+          <a:xfrm>
+            <a:off x="7936809" y="1828800"/>
+            <a:ext cx="457200" cy="457200"/>
+          </a:xfrm>
+          <a:prstGeom prst="ellipse">
+            <a:avLst/>
+          </a:prstGeom>
+          <a:solidFill>
+            <a:srgbClr val="C0392B"/>
+          </a:solidFill>
+          <a:ln>
+            <a:noFill/>
+          </a:ln>
+          <a:effectLst/>
+        </p:spPr>
+        <p:style>
+          <a:lnRef idx="1">
+            <a:schemeClr val="accent1"/>
+          </a:lnRef>
+          <a:fillRef idx="3">
+            <a:schemeClr val="accent1"/>
+          </a:fillRef>
+          <a:effectRef idx="2">
+            <a:schemeClr val="accent1"/>
+          </a:effectRef>
+          <a:fontRef idx="minor">
+            <a:schemeClr val="lt1"/>
+          </a:fontRef>
+        </p:style>
+        <p:txBody>
+          <a:bodyPr rtlCol="0" anchor="ctr" lIns="0" rIns="0" tIns="0" bIns="0"/>
+          <a:lstStyle/>
+          <a:p>
+            <a:pPr algn="ctr"/>
+            <a:r>
+              <a:rPr sz="1600" b="1">
+                <a:solidFill>
+                  <a:srgbClr val="FFFFFF"/>
+                </a:solidFill>
+                <a:latin typeface="Microsoft YaHei"/>
+              </a:rPr>
+              <a:t>✕</a:t>
+            </a:r>
+          </a:p>
+        </p:txBody>
+      </p:sp>
+      <p:sp>
+        <p:nvSpPr>
+          <p:cNvPr id="13" name="TextBox 12"/>
+          <p:cNvSpPr txBox="1"/>
+          <p:nvPr/>
+        </p:nvSpPr>
+        <p:spPr>
+          <a:xfrm>
+            <a:off x="8531169" y="1874519"/>
+            <a:ext cx="2791846" cy="365760"/>
+          </a:xfrm>
+          <a:prstGeom prst="rect">
+            <a:avLst/>
+          </a:prstGeom>
+          <a:noFill/>
+        </p:spPr>
+        <p:txBody>
+          <a:bodyPr wrap="square" anchor="t" lIns="0" rIns="0" tIns="0" bIns="0">
+            <a:spAutoFit/>
+          </a:bodyPr>
+          <a:lstStyle/>
+          <a:p>
+            <a:pPr algn="l"/>
+            <a:r>
+              <a:rPr sz="1600" b="1">
+                <a:solidFill>
+                  <a:srgbClr val="C0392B"/>
+                </a:solidFill>
+                <a:latin typeface="Microsoft YaHei"/>
+              </a:rPr>
+              <a:t>常见错误</a:t>
+            </a:r>
+          </a:p>
+        </p:txBody>
+      </p:sp>
+      <p:sp>
+        <p:nvSpPr>
+          <p:cNvPr id="14" name="TextBox 13"/>
+          <p:cNvSpPr txBox="1"/>
+          <p:nvPr/>
+        </p:nvSpPr>
+        <p:spPr>
+          <a:xfrm>
+            <a:off x="7936809" y="2514600"/>
+            <a:ext cx="3340486" cy="3291840"/>
+          </a:xfrm>
+          <a:prstGeom prst="rect">
+            <a:avLst/>
+          </a:prstGeom>
+          <a:noFill/>
+        </p:spPr>
+        <p:txBody>
+          <a:bodyPr wrap="square" lIns="0" rIns="0" tIns="0" bIns="0">
+            <a:spAutoFit/>
+          </a:bodyPr>
+          <a:lstStyle/>
+          <a:p>
+            <a:pPr>
+              <a:spcAft>
+                <a:spcPts val="1000"/>
+              </a:spcAft>
+            </a:pPr>
+            <a:r>
+              <a:rPr sz="1500">
+                <a:solidFill>
+                  <a:srgbClr val="222B33"/>
+                </a:solidFill>
+                <a:latin typeface="Microsoft YaHei"/>
+              </a:rPr>
+              <a:t>▪ 穿着实验服去食堂吃饭</a:t>
+            </a:r>
+          </a:p>
+          <a:p>
+            <a:pPr>
+              <a:spcAft>
+                <a:spcPts val="1000"/>
+              </a:spcAft>
+            </a:pPr>
+            <a:r>
+              <a:rPr sz="1500">
+                <a:solidFill>
+                  <a:srgbClr val="222B33"/>
+                </a:solidFill>
+                <a:latin typeface="Microsoft YaHei"/>
+              </a:rPr>
+              <a:t>▪ 把实验服带回宿舍和便服一起洗</a:t>
+            </a:r>
+          </a:p>
+        </p:txBody>
+      </p:sp>
+    </p:spTree>
+  </p:cSld>
+  <p:clrMapOvr>
+    <a:masterClrMapping/>
+  </p:clrMapOvr>
+</p:sld>
+</file>
+
+<file path=ppt/slides/slide98.xml><?xml version="1.0" encoding="utf-8"?>
+<p:sld xmlns:a="http://schemas.openxmlformats.org/drawingml/2006/main" xmlns:p="http://schemas.openxmlformats.org/presentationml/2006/main" xmlns:r="http://schemas.openxmlformats.org/officeDocument/2006/relationships">
+  <p:cSld>
+    <p:bg>
+      <p:bgPr>
+        <a:solidFill>
+          <a:srgbClr val="FFFFFF"/>
+        </a:solidFill>
+        <a:effectLst/>
+      </p:bgPr>
+    </p:bg>
+    <p:spTree>
+      <p:nvGrpSpPr>
+        <p:cNvPr id="1" name=""/>
+        <p:cNvGrpSpPr/>
+        <p:nvPr/>
+      </p:nvGrpSpPr>
+      <p:grpSpPr/>
+      <p:sp>
+        <p:nvSpPr>
+          <p:cNvPr id="2" name="TextBox 1"/>
+          <p:cNvSpPr txBox="1"/>
+          <p:nvPr/>
+        </p:nvSpPr>
+        <p:spPr>
+          <a:xfrm>
+            <a:off x="548640" y="320040"/>
+            <a:ext cx="8229600" cy="320040"/>
+          </a:xfrm>
+          <a:prstGeom prst="rect">
+            <a:avLst/>
+          </a:prstGeom>
+          <a:noFill/>
+        </p:spPr>
+        <p:txBody>
+          <a:bodyPr wrap="square" anchor="t" lIns="0" rIns="0" tIns="0" bIns="0">
+            <a:spAutoFit/>
+          </a:bodyPr>
+          <a:lstStyle/>
+          <a:p>
+            <a:pPr algn="l"/>
+            <a:r>
+              <a:rPr sz="1200" b="1">
+                <a:solidFill>
+                  <a:srgbClr val="1D7A8C"/>
+                </a:solidFill>
+                <a:latin typeface="Microsoft YaHei"/>
+              </a:rPr>
+              <a:t>024 · 实验服与防护服</a:t>
+            </a:r>
+          </a:p>
+        </p:txBody>
+      </p:sp>
+      <p:sp>
+        <p:nvSpPr>
+          <p:cNvPr id="3" name="TextBox 2"/>
+          <p:cNvSpPr txBox="1"/>
+          <p:nvPr/>
+        </p:nvSpPr>
+        <p:spPr>
+          <a:xfrm>
+            <a:off x="548640" y="640080"/>
+            <a:ext cx="11094415" cy="731520"/>
+          </a:xfrm>
+          <a:prstGeom prst="rect">
+            <a:avLst/>
+          </a:prstGeom>
+          <a:noFill/>
+        </p:spPr>
+        <p:txBody>
+          <a:bodyPr wrap="square" anchor="t" lIns="0" rIns="0" tIns="0" bIns="0">
+            <a:spAutoFit/>
+          </a:bodyPr>
+          <a:lstStyle/>
+          <a:p>
+            <a:pPr algn="l"/>
+            <a:r>
+              <a:rPr sz="3000" b="1">
+                <a:solidFill>
+                  <a:srgbClr val="0B3C5D"/>
+                </a:solidFill>
+                <a:latin typeface="Microsoft YaHei"/>
+              </a:rPr>
+              <a:t>大量沾染，立即脱下冲洗</a:t>
+            </a:r>
+          </a:p>
+        </p:txBody>
+      </p:sp>
+      <p:sp>
+        <p:nvSpPr>
+          <p:cNvPr id="4" name="TextBox 3"/>
+          <p:cNvSpPr txBox="1"/>
+          <p:nvPr/>
+        </p:nvSpPr>
+        <p:spPr>
+          <a:xfrm>
+            <a:off x="548640" y="6446520"/>
+            <a:ext cx="7315200" cy="274320"/>
+          </a:xfrm>
+          <a:prstGeom prst="rect">
+            <a:avLst/>
+          </a:prstGeom>
+          <a:noFill/>
+        </p:spPr>
+        <p:txBody>
+          <a:bodyPr wrap="square" anchor="t" lIns="0" rIns="0" tIns="0" bIns="0">
+            <a:spAutoFit/>
+          </a:bodyPr>
+          <a:lstStyle/>
+          <a:p>
+            <a:pPr algn="l"/>
+            <a:r>
+              <a:rPr sz="1000" b="0">
+                <a:solidFill>
+                  <a:srgbClr val="5F6B75"/>
+                </a:solidFill>
+                <a:latin typeface="Microsoft YaHei"/>
+              </a:rPr>
+              <a:t>《高校实验室安全》 024 实验服与防护服</a:t>
+            </a:r>
+          </a:p>
+        </p:txBody>
+      </p:sp>
+      <p:sp>
+        <p:nvSpPr>
+          <p:cNvPr id="5" name="Oval 4"/>
+          <p:cNvSpPr/>
+          <p:nvPr/>
+        </p:nvSpPr>
+        <p:spPr>
+          <a:xfrm>
+            <a:off x="10820095" y="411480"/>
+            <a:ext cx="822960" cy="822960"/>
+          </a:xfrm>
+          <a:prstGeom prst="ellipse">
+            <a:avLst/>
+          </a:prstGeom>
+          <a:solidFill>
+            <a:srgbClr val="F28C28"/>
+          </a:solidFill>
+          <a:ln>
+            <a:noFill/>
+          </a:ln>
+          <a:effectLst/>
+        </p:spPr>
+        <p:style>
+          <a:lnRef idx="1">
+            <a:schemeClr val="accent1"/>
+          </a:lnRef>
+          <a:fillRef idx="3">
+            <a:schemeClr val="accent1"/>
+          </a:fillRef>
+          <a:effectRef idx="2">
+            <a:schemeClr val="accent1"/>
+          </a:effectRef>
+          <a:fontRef idx="minor">
+            <a:schemeClr val="lt1"/>
+          </a:fontRef>
+        </p:style>
+        <p:txBody>
+          <a:bodyPr rtlCol="0" anchor="ctr" lIns="0" rIns="0" tIns="0" bIns="0"/>
+          <a:lstStyle/>
+          <a:p>
+            <a:pPr algn="ctr"/>
+            <a:r>
+              <a:rPr sz="1800" b="1">
+                <a:solidFill>
+                  <a:srgbClr val="FFFFFF"/>
+                </a:solidFill>
+                <a:latin typeface="Microsoft YaHei"/>
+              </a:rPr>
+              <a:t>S1</a:t>
+            </a:r>
+          </a:p>
+        </p:txBody>
+      </p:sp>
+      <p:sp>
+        <p:nvSpPr>
+          <p:cNvPr id="6" name="Rounded Rectangle 5"/>
+          <p:cNvSpPr/>
+          <p:nvPr/>
+        </p:nvSpPr>
+        <p:spPr>
+          <a:xfrm>
+            <a:off x="548640" y="1645920"/>
+            <a:ext cx="6656649" cy="4389120"/>
+          </a:xfrm>
+          <a:prstGeom prst="roundRect">
+            <a:avLst>
+              <a:gd name="adj" fmla="val 8000"/>
+            </a:avLst>
+          </a:prstGeom>
+          <a:solidFill>
+            <a:srgbClr val="EEF4F7"/>
+          </a:solidFill>
+          <a:ln>
+            <a:noFill/>
+          </a:ln>
+          <a:effectLst/>
+        </p:spPr>
+        <p:style>
+          <a:lnRef idx="1">
+            <a:schemeClr val="accent1"/>
+          </a:lnRef>
+          <a:fillRef idx="3">
+            <a:schemeClr val="accent1"/>
+          </a:fillRef>
+          <a:effectRef idx="2">
+            <a:schemeClr val="accent1"/>
+          </a:effectRef>
+          <a:fontRef idx="minor">
+            <a:schemeClr val="lt1"/>
+          </a:fontRef>
+        </p:style>
+        <p:txBody>
+          <a:bodyPr rtlCol="0" anchor="ctr"/>
+          <a:lstStyle/>
+          <a:p>
+            <a:pPr algn="ctr"/>
+          </a:p>
+        </p:txBody>
+      </p:sp>
+      <p:sp>
+        <p:nvSpPr>
+          <p:cNvPr id="7" name="TextBox 6"/>
+          <p:cNvSpPr txBox="1"/>
+          <p:nvPr/>
+        </p:nvSpPr>
+        <p:spPr>
+          <a:xfrm>
+            <a:off x="914400" y="1874519"/>
+            <a:ext cx="2743200" cy="365760"/>
+          </a:xfrm>
+          <a:prstGeom prst="rect">
+            <a:avLst/>
+          </a:prstGeom>
+          <a:noFill/>
+        </p:spPr>
+        <p:txBody>
+          <a:bodyPr wrap="square" anchor="t" lIns="0" rIns="0" tIns="0" bIns="0">
+            <a:spAutoFit/>
+          </a:bodyPr>
+          <a:lstStyle/>
+          <a:p>
+            <a:pPr algn="l"/>
+            <a:r>
+              <a:rPr sz="1600" b="1">
+                <a:solidFill>
+                  <a:srgbClr val="1D7A8C"/>
+                </a:solidFill>
+                <a:latin typeface="Microsoft YaHei"/>
+              </a:rPr>
+              <a:t>要点</a:t>
+            </a:r>
+          </a:p>
+        </p:txBody>
+      </p:sp>
+      <p:sp>
+        <p:nvSpPr>
+          <p:cNvPr id="8" name="TextBox 7"/>
+          <p:cNvSpPr txBox="1"/>
+          <p:nvPr/>
+        </p:nvSpPr>
+        <p:spPr>
+          <a:xfrm>
+            <a:off x="914400" y="2377440"/>
+            <a:ext cx="5925129" cy="1700784"/>
+          </a:xfrm>
+          <a:prstGeom prst="rect">
+            <a:avLst/>
+          </a:prstGeom>
+          <a:noFill/>
+        </p:spPr>
+        <p:txBody>
+          <a:bodyPr wrap="square" lIns="0" rIns="0" tIns="0" bIns="0">
+            <a:spAutoFit/>
+          </a:bodyPr>
+          <a:lstStyle/>
+          <a:p>
+            <a:pPr>
+              <a:spcAft>
+                <a:spcPts val="1000"/>
+              </a:spcAft>
+            </a:pPr>
+            <a:r>
+              <a:rPr sz="2000">
+                <a:solidFill>
+                  <a:srgbClr val="222B33"/>
+                </a:solidFill>
+                <a:latin typeface="Microsoft YaHei"/>
+              </a:rPr>
+              <a:t>▪ 大量化学品泼到身上，立即脱下污染衣物</a:t>
+            </a:r>
+          </a:p>
+          <a:p>
+            <a:pPr>
+              <a:spcAft>
+                <a:spcPts val="1000"/>
+              </a:spcAft>
+            </a:pPr>
+            <a:r>
+              <a:rPr sz="2000">
+                <a:solidFill>
+                  <a:srgbClr val="222B33"/>
+                </a:solidFill>
+                <a:latin typeface="Microsoft YaHei"/>
+              </a:rPr>
+              <a:t>▪ 到紧急喷淋下持续冲洗</a:t>
+            </a:r>
+          </a:p>
+          <a:p>
+            <a:pPr>
+              <a:spcAft>
+                <a:spcPts val="1000"/>
+              </a:spcAft>
+            </a:pPr>
+            <a:r>
+              <a:rPr sz="2000">
+                <a:solidFill>
+                  <a:srgbClr val="222B33"/>
+                </a:solidFill>
+                <a:latin typeface="Microsoft YaHei"/>
+              </a:rPr>
+              <a:t>▪ 报告实验室负责人，及时就医</a:t>
+            </a:r>
+          </a:p>
+        </p:txBody>
+      </p:sp>
+      <p:sp>
+        <p:nvSpPr>
+          <p:cNvPr id="9" name="TextBox 8"/>
+          <p:cNvSpPr txBox="1"/>
+          <p:nvPr/>
+        </p:nvSpPr>
+        <p:spPr>
+          <a:xfrm>
+            <a:off x="914400" y="4215384"/>
+            <a:ext cx="5925129" cy="320040"/>
+          </a:xfrm>
+          <a:prstGeom prst="rect">
+            <a:avLst/>
+          </a:prstGeom>
+          <a:noFill/>
+        </p:spPr>
+        <p:txBody>
+          <a:bodyPr wrap="square" anchor="t" lIns="0" rIns="0" tIns="0" bIns="0">
+            <a:spAutoFit/>
+          </a:bodyPr>
+          <a:lstStyle/>
+          <a:p>
+            <a:pPr algn="l"/>
+            <a:r>
+              <a:rPr sz="1300" b="1">
+                <a:solidFill>
+                  <a:srgbClr val="1D7A8C"/>
+                </a:solidFill>
+                <a:latin typeface="Microsoft YaHei"/>
+              </a:rPr>
+              <a:t>说明</a:t>
+            </a:r>
+          </a:p>
+        </p:txBody>
+      </p:sp>
+      <p:sp>
+        <p:nvSpPr>
+          <p:cNvPr id="10" name="TextBox 9"/>
+          <p:cNvSpPr txBox="1"/>
+          <p:nvPr/>
+        </p:nvSpPr>
+        <p:spPr>
+          <a:xfrm>
+            <a:off x="914400" y="4581144"/>
+            <a:ext cx="5925129" cy="1179576"/>
+          </a:xfrm>
+          <a:prstGeom prst="rect">
+            <a:avLst/>
+          </a:prstGeom>
+          <a:noFill/>
+        </p:spPr>
+        <p:txBody>
+          <a:bodyPr wrap="square" anchor="t" lIns="0" rIns="0" tIns="0" bIns="0">
+            <a:spAutoFit/>
+          </a:bodyPr>
+          <a:lstStyle/>
+          <a:p>
+            <a:pPr algn="l"/>
+            <a:r>
+              <a:rPr sz="1400" b="0">
+                <a:solidFill>
+                  <a:srgbClr val="5F6B75"/>
+                </a:solidFill>
+                <a:latin typeface="Microsoft YaHei"/>
+              </a:rPr>
+              <a:t>大量化学品泼到实验服上时，面料会很快被浸透，化学品接触皮肤。要立即脱下被污染的实验服和衣物（不要从头上套脱，避免沾到脸和眼睛），到紧急喷淋下持续冲洗，冲洗时间按本校应急规定和化学品安全技术说明书执行。</a:t>
+            </a:r>
+          </a:p>
+        </p:txBody>
+      </p:sp>
+      <p:sp>
+        <p:nvSpPr>
+          <p:cNvPr id="11" name="Rounded Rectangle 10"/>
+          <p:cNvSpPr/>
+          <p:nvPr/>
+        </p:nvSpPr>
+        <p:spPr>
+          <a:xfrm>
+            <a:off x="7571049" y="1645920"/>
+            <a:ext cx="4072006" cy="4389120"/>
+          </a:xfrm>
+          <a:prstGeom prst="roundRect">
+            <a:avLst>
+              <a:gd name="adj" fmla="val 8000"/>
+            </a:avLst>
+          </a:prstGeom>
+          <a:solidFill>
+            <a:srgbClr val="FBECEA"/>
+          </a:solidFill>
+          <a:ln>
+            <a:noFill/>
+          </a:ln>
+          <a:effectLst/>
+        </p:spPr>
+        <p:style>
+          <a:lnRef idx="1">
+            <a:schemeClr val="accent1"/>
+          </a:lnRef>
+          <a:fillRef idx="3">
+            <a:schemeClr val="accent1"/>
+          </a:fillRef>
+          <a:effectRef idx="2">
+            <a:schemeClr val="accent1"/>
+          </a:effectRef>
+          <a:fontRef idx="minor">
+            <a:schemeClr val="lt1"/>
+          </a:fontRef>
+        </p:style>
+        <p:txBody>
+          <a:bodyPr rtlCol="0" anchor="ctr"/>
+          <a:lstStyle/>
+          <a:p>
+            <a:pPr algn="ctr"/>
+          </a:p>
+        </p:txBody>
+      </p:sp>
+      <p:sp>
+        <p:nvSpPr>
+          <p:cNvPr id="12" name="Oval 11"/>
+          <p:cNvSpPr/>
+          <p:nvPr/>
+        </p:nvSpPr>
+        <p:spPr>
+          <a:xfrm>
+            <a:off x="7936809" y="1828800"/>
+            <a:ext cx="457200" cy="457200"/>
+          </a:xfrm>
+          <a:prstGeom prst="ellipse">
+            <a:avLst/>
+          </a:prstGeom>
+          <a:solidFill>
+            <a:srgbClr val="C0392B"/>
+          </a:solidFill>
+          <a:ln>
+            <a:noFill/>
+          </a:ln>
+          <a:effectLst/>
+        </p:spPr>
+        <p:style>
+          <a:lnRef idx="1">
+            <a:schemeClr val="accent1"/>
+          </a:lnRef>
+          <a:fillRef idx="3">
+            <a:schemeClr val="accent1"/>
+          </a:fillRef>
+          <a:effectRef idx="2">
+            <a:schemeClr val="accent1"/>
+          </a:effectRef>
+          <a:fontRef idx="minor">
+            <a:schemeClr val="lt1"/>
+          </a:fontRef>
+        </p:style>
+        <p:txBody>
+          <a:bodyPr rtlCol="0" anchor="ctr" lIns="0" rIns="0" tIns="0" bIns="0"/>
+          <a:lstStyle/>
+          <a:p>
+            <a:pPr algn="ctr"/>
+            <a:r>
+              <a:rPr sz="1600" b="1">
+                <a:solidFill>
+                  <a:srgbClr val="FFFFFF"/>
+                </a:solidFill>
+                <a:latin typeface="Microsoft YaHei"/>
+              </a:rPr>
+              <a:t>✕</a:t>
+            </a:r>
+          </a:p>
+        </p:txBody>
+      </p:sp>
+      <p:sp>
+        <p:nvSpPr>
+          <p:cNvPr id="13" name="TextBox 12"/>
+          <p:cNvSpPr txBox="1"/>
+          <p:nvPr/>
+        </p:nvSpPr>
+        <p:spPr>
+          <a:xfrm>
+            <a:off x="8531169" y="1874519"/>
+            <a:ext cx="2791846" cy="365760"/>
+          </a:xfrm>
+          <a:prstGeom prst="rect">
+            <a:avLst/>
+          </a:prstGeom>
+          <a:noFill/>
+        </p:spPr>
+        <p:txBody>
+          <a:bodyPr wrap="square" anchor="t" lIns="0" rIns="0" tIns="0" bIns="0">
+            <a:spAutoFit/>
+          </a:bodyPr>
+          <a:lstStyle/>
+          <a:p>
+            <a:pPr algn="l"/>
+            <a:r>
+              <a:rPr sz="1600" b="1">
+                <a:solidFill>
+                  <a:srgbClr val="C0392B"/>
+                </a:solidFill>
+                <a:latin typeface="Microsoft YaHei"/>
+              </a:rPr>
+              <a:t>常见错误</a:t>
+            </a:r>
+          </a:p>
+        </p:txBody>
+      </p:sp>
+      <p:sp>
+        <p:nvSpPr>
+          <p:cNvPr id="14" name="TextBox 13"/>
+          <p:cNvSpPr txBox="1"/>
+          <p:nvPr/>
+        </p:nvSpPr>
+        <p:spPr>
+          <a:xfrm>
+            <a:off x="7936809" y="2514600"/>
+            <a:ext cx="3340486" cy="3291840"/>
+          </a:xfrm>
+          <a:prstGeom prst="rect">
+            <a:avLst/>
+          </a:prstGeom>
+          <a:noFill/>
+        </p:spPr>
+        <p:txBody>
+          <a:bodyPr wrap="square" lIns="0" rIns="0" tIns="0" bIns="0">
+            <a:spAutoFit/>
+          </a:bodyPr>
+          <a:lstStyle/>
+          <a:p>
+            <a:pPr>
+              <a:spcAft>
+                <a:spcPts val="1000"/>
+              </a:spcAft>
+            </a:pPr>
+            <a:r>
+              <a:rPr sz="1500">
+                <a:solidFill>
+                  <a:srgbClr val="222B33"/>
+                </a:solidFill>
+                <a:latin typeface="Microsoft YaHei"/>
+              </a:rPr>
+              <a:t>▪ 怕难为情，不脱污染衣物就冲洗</a:t>
+            </a:r>
+          </a:p>
+          <a:p>
+            <a:pPr>
+              <a:spcAft>
+                <a:spcPts val="1000"/>
+              </a:spcAft>
+            </a:pPr>
+            <a:r>
+              <a:rPr sz="1500">
+                <a:solidFill>
+                  <a:srgbClr val="222B33"/>
+                </a:solidFill>
+                <a:latin typeface="Microsoft YaHei"/>
+              </a:rPr>
+              <a:t>▪ 擦一擦继续穿着被浸透的实验服</a:t>
+            </a:r>
+          </a:p>
+        </p:txBody>
+      </p:sp>
+    </p:spTree>
+  </p:cSld>
+  <p:clrMapOvr>
+    <a:masterClrMapping/>
+  </p:clrMapOvr>
+</p:sld>
+</file>
+
+<file path=ppt/slides/slide99.xml><?xml version="1.0" encoding="utf-8"?>
+<p:sld xmlns:a="http://schemas.openxmlformats.org/drawingml/2006/main" xmlns:p="http://schemas.openxmlformats.org/presentationml/2006/main" xmlns:r="http://schemas.openxmlformats.org/officeDocument/2006/relationships">
+  <p:cSld>
+    <p:bg>
+      <p:bgPr>
+        <a:solidFill>
+          <a:srgbClr val="FFFFFF"/>
+        </a:solidFill>
+        <a:effectLst/>
+      </p:bgPr>
+    </p:bg>
+    <p:spTree>
+      <p:nvGrpSpPr>
+        <p:cNvPr id="1" name=""/>
+        <p:cNvGrpSpPr/>
+        <p:nvPr/>
+      </p:nvGrpSpPr>
+      <p:grpSpPr/>
+      <p:sp>
+        <p:nvSpPr>
+          <p:cNvPr id="2" name="TextBox 1"/>
+          <p:cNvSpPr txBox="1"/>
+          <p:nvPr/>
+        </p:nvSpPr>
+        <p:spPr>
+          <a:xfrm>
+            <a:off x="548640" y="320040"/>
+            <a:ext cx="8229600" cy="320040"/>
+          </a:xfrm>
+          <a:prstGeom prst="rect">
+            <a:avLst/>
+          </a:prstGeom>
+          <a:noFill/>
+        </p:spPr>
+        <p:txBody>
+          <a:bodyPr wrap="square" anchor="t" lIns="0" rIns="0" tIns="0" bIns="0">
+            <a:spAutoFit/>
+          </a:bodyPr>
+          <a:lstStyle/>
+          <a:p>
+            <a:pPr algn="l"/>
+            <a:r>
+              <a:rPr sz="1200" b="1">
+                <a:solidFill>
+                  <a:srgbClr val="1D7A8C"/>
+                </a:solidFill>
+                <a:latin typeface="Microsoft YaHei"/>
+              </a:rPr>
+              <a:t>024 · 实验服与防护服</a:t>
+            </a:r>
+          </a:p>
+        </p:txBody>
+      </p:sp>
+      <p:sp>
+        <p:nvSpPr>
+          <p:cNvPr id="3" name="TextBox 2"/>
+          <p:cNvSpPr txBox="1"/>
+          <p:nvPr/>
+        </p:nvSpPr>
+        <p:spPr>
+          <a:xfrm>
+            <a:off x="548640" y="640080"/>
+            <a:ext cx="11094415" cy="731520"/>
+          </a:xfrm>
+          <a:prstGeom prst="rect">
+            <a:avLst/>
+          </a:prstGeom>
+          <a:noFill/>
+        </p:spPr>
+        <p:txBody>
+          <a:bodyPr wrap="square" anchor="t" lIns="0" rIns="0" tIns="0" bIns="0">
+            <a:spAutoFit/>
+          </a:bodyPr>
+          <a:lstStyle/>
+          <a:p>
+            <a:pPr algn="l"/>
+            <a:r>
+              <a:rPr sz="3000" b="1">
+                <a:solidFill>
+                  <a:srgbClr val="0B3C5D"/>
+                </a:solidFill>
+                <a:latin typeface="Microsoft YaHei"/>
+              </a:rPr>
+              <a:t>课后练习</a:t>
+            </a:r>
+          </a:p>
+        </p:txBody>
+      </p:sp>
+      <p:sp>
+        <p:nvSpPr>
+          <p:cNvPr id="4" name="TextBox 3"/>
+          <p:cNvSpPr txBox="1"/>
+          <p:nvPr/>
+        </p:nvSpPr>
+        <p:spPr>
+          <a:xfrm>
+            <a:off x="548640" y="6446520"/>
+            <a:ext cx="7315200" cy="274320"/>
+          </a:xfrm>
+          <a:prstGeom prst="rect">
+            <a:avLst/>
+          </a:prstGeom>
+          <a:noFill/>
+        </p:spPr>
+        <p:txBody>
+          <a:bodyPr wrap="square" anchor="t" lIns="0" rIns="0" tIns="0" bIns="0">
+            <a:spAutoFit/>
+          </a:bodyPr>
+          <a:lstStyle/>
+          <a:p>
+            <a:pPr algn="l"/>
+            <a:r>
+              <a:rPr sz="1000" b="0">
+                <a:solidFill>
+                  <a:srgbClr val="5F6B75"/>
+                </a:solidFill>
+                <a:latin typeface="Microsoft YaHei"/>
+              </a:rPr>
+              <a:t>《高校实验室安全》 024 实验服与防护服</a:t>
+            </a:r>
+          </a:p>
+        </p:txBody>
+      </p:sp>
+      <p:sp>
+        <p:nvSpPr>
+          <p:cNvPr id="5" name="Rounded Rectangle 4"/>
+          <p:cNvSpPr/>
+          <p:nvPr/>
+        </p:nvSpPr>
+        <p:spPr>
+          <a:xfrm>
+            <a:off x="548640" y="1645920"/>
+            <a:ext cx="5364327" cy="4389120"/>
+          </a:xfrm>
+          <a:prstGeom prst="roundRect">
+            <a:avLst>
+              <a:gd name="adj" fmla="val 8000"/>
+            </a:avLst>
+          </a:prstGeom>
+          <a:solidFill>
+            <a:srgbClr val="EEF4F7"/>
+          </a:solidFill>
+          <a:ln>
+            <a:noFill/>
+          </a:ln>
+          <a:effectLst/>
+        </p:spPr>
+        <p:style>
+          <a:lnRef idx="1">
+            <a:schemeClr val="accent1"/>
+          </a:lnRef>
+          <a:fillRef idx="3">
+            <a:schemeClr val="accent1"/>
+          </a:fillRef>
+          <a:effectRef idx="2">
+            <a:schemeClr val="accent1"/>
+          </a:effectRef>
+          <a:fontRef idx="minor">
+            <a:schemeClr val="lt1"/>
+          </a:fontRef>
+        </p:style>
+        <p:txBody>
+          <a:bodyPr rtlCol="0" anchor="ctr"/>
+          <a:lstStyle/>
+          <a:p>
+            <a:pPr algn="ctr"/>
+          </a:p>
+        </p:txBody>
+      </p:sp>
+      <p:sp>
+        <p:nvSpPr>
+          <p:cNvPr id="6" name="Oval 5"/>
+          <p:cNvSpPr/>
+          <p:nvPr/>
+        </p:nvSpPr>
+        <p:spPr>
+          <a:xfrm>
+            <a:off x="868680" y="1874519"/>
+            <a:ext cx="548640" cy="548640"/>
+          </a:xfrm>
+          <a:prstGeom prst="ellipse">
+            <a:avLst/>
+          </a:prstGeom>
+          <a:solidFill>
+            <a:srgbClr val="0B3C5D"/>
+          </a:solidFill>
+          <a:ln>
+            <a:noFill/>
+          </a:ln>
+          <a:effectLst/>
+        </p:spPr>
+        <p:style>
+          <a:lnRef idx="1">
+            <a:schemeClr val="accent1"/>
+          </a:lnRef>
+          <a:fillRef idx="3">
+            <a:schemeClr val="accent1"/>
+          </a:fillRef>
+          <a:effectRef idx="2">
+            <a:schemeClr val="accent1"/>
+          </a:effectRef>
+          <a:fontRef idx="minor">
+            <a:schemeClr val="lt1"/>
+          </a:fontRef>
+        </p:style>
+        <p:txBody>
+          <a:bodyPr rtlCol="0" anchor="ctr" lIns="0" rIns="0" tIns="0" bIns="0"/>
+          <a:lstStyle/>
+          <a:p>
+            <a:pPr algn="ctr"/>
+            <a:r>
+              <a:rPr sz="1600" b="1">
+                <a:solidFill>
+                  <a:srgbClr val="FFFFFF"/>
+                </a:solidFill>
+                <a:latin typeface="Microsoft YaHei"/>
+              </a:rPr>
+              <a:t>1</a:t>
+            </a:r>
+          </a:p>
+        </p:txBody>
+      </p:sp>
+      <p:sp>
+        <p:nvSpPr>
+          <p:cNvPr id="7" name="TextBox 6"/>
+          <p:cNvSpPr txBox="1"/>
+          <p:nvPr/>
+        </p:nvSpPr>
+        <p:spPr>
+          <a:xfrm>
+            <a:off x="1600200" y="1920240"/>
+            <a:ext cx="3992727" cy="1280160"/>
+          </a:xfrm>
+          <a:prstGeom prst="rect">
+            <a:avLst/>
+          </a:prstGeom>
+          <a:noFill/>
+        </p:spPr>
+        <p:txBody>
+          <a:bodyPr wrap="square" anchor="t" lIns="0" rIns="0" tIns="0" bIns="0">
+            <a:spAutoFit/>
+          </a:bodyPr>
+          <a:lstStyle/>
+          <a:p>
+            <a:pPr algn="l"/>
+            <a:r>
+              <a:rPr sz="1700" b="1">
+                <a:solidFill>
+                  <a:srgbClr val="222B33"/>
+                </a:solidFill>
+                <a:latin typeface="Microsoft YaHei"/>
+              </a:rPr>
+              <a:t>使用自燃试剂进行实验时，应穿：</a:t>
+            </a:r>
+          </a:p>
+        </p:txBody>
+      </p:sp>
+      <p:sp>
+        <p:nvSpPr>
+          <p:cNvPr id="8" name="TextBox 7"/>
+          <p:cNvSpPr txBox="1"/>
+          <p:nvPr/>
+        </p:nvSpPr>
+        <p:spPr>
+          <a:xfrm>
+            <a:off x="1600200" y="3291840"/>
+            <a:ext cx="3992727" cy="2560320"/>
+          </a:xfrm>
+          <a:prstGeom prst="rect">
+            <a:avLst/>
+          </a:prstGeom>
+          <a:noFill/>
+        </p:spPr>
+        <p:txBody>
+          <a:bodyPr wrap="square" anchor="t" lIns="0" rIns="0" tIns="0" bIns="0">
+            <a:spAutoFit/>
+          </a:bodyPr>
+          <a:lstStyle/>
+          <a:p>
+            <a:pPr algn="l"/>
+            <a:r>
+              <a:rPr sz="1500" b="0">
+                <a:solidFill>
+                  <a:srgbClr val="222B33"/>
+                </a:solidFill>
+                <a:latin typeface="Microsoft YaHei"/>
+              </a:rPr>
+              <a:t>A. 化纤实验服</a:t>
+            </a:r>
+          </a:p>
+          <a:p>
+            <a:pPr algn="l"/>
+            <a:r>
+              <a:rPr sz="1500" b="0">
+                <a:solidFill>
+                  <a:srgbClr val="222B33"/>
+                </a:solidFill>
+                <a:latin typeface="Microsoft YaHei"/>
+              </a:rPr>
+              <a:t>B. 普通棉质实验服</a:t>
+            </a:r>
+          </a:p>
+          <a:p>
+            <a:pPr algn="l"/>
+            <a:r>
+              <a:rPr sz="1500" b="0">
+                <a:solidFill>
+                  <a:srgbClr val="222B33"/>
+                </a:solidFill>
+                <a:latin typeface="Microsoft YaHei"/>
+              </a:rPr>
+              <a:t>C. 阻燃实验服</a:t>
+            </a:r>
+          </a:p>
+          <a:p>
+            <a:pPr algn="l"/>
+            <a:r>
+              <a:rPr sz="1500" b="0">
+                <a:solidFill>
+                  <a:srgbClr val="222B33"/>
+                </a:solidFill>
+                <a:latin typeface="Microsoft YaHei"/>
+              </a:rPr>
+              <a:t>D. 不穿实验服</a:t>
+            </a:r>
+          </a:p>
+        </p:txBody>
+      </p:sp>
+      <p:sp>
+        <p:nvSpPr>
+          <p:cNvPr id="9" name="Rounded Rectangle 8"/>
+          <p:cNvSpPr/>
+          <p:nvPr/>
+        </p:nvSpPr>
+        <p:spPr>
+          <a:xfrm>
+            <a:off x="6278727" y="1645920"/>
+            <a:ext cx="5364327" cy="4389120"/>
+          </a:xfrm>
+          <a:prstGeom prst="roundRect">
+            <a:avLst>
+              <a:gd name="adj" fmla="val 8000"/>
+            </a:avLst>
+          </a:prstGeom>
+          <a:solidFill>
+            <a:srgbClr val="EEF4F7"/>
+          </a:solidFill>
+          <a:ln>
+            <a:noFill/>
+          </a:ln>
+          <a:effectLst/>
+        </p:spPr>
+        <p:style>
+          <a:lnRef idx="1">
+            <a:schemeClr val="accent1"/>
+          </a:lnRef>
+          <a:fillRef idx="3">
+            <a:schemeClr val="accent1"/>
+          </a:fillRef>
+          <a:effectRef idx="2">
+            <a:schemeClr val="accent1"/>
+          </a:effectRef>
+          <a:fontRef idx="minor">
+            <a:schemeClr val="lt1"/>
+          </a:fontRef>
+        </p:style>
+        <p:txBody>
+          <a:bodyPr rtlCol="0" anchor="ctr"/>
+          <a:lstStyle/>
+          <a:p>
+            <a:pPr algn="ctr"/>
+          </a:p>
+        </p:txBody>
+      </p:sp>
+      <p:sp>
+        <p:nvSpPr>
+          <p:cNvPr id="10" name="Oval 9"/>
+          <p:cNvSpPr/>
+          <p:nvPr/>
+        </p:nvSpPr>
+        <p:spPr>
+          <a:xfrm>
+            <a:off x="6598767" y="1874519"/>
+            <a:ext cx="548640" cy="548640"/>
+          </a:xfrm>
+          <a:prstGeom prst="ellipse">
+            <a:avLst/>
+          </a:prstGeom>
+          <a:solidFill>
+            <a:srgbClr val="0B3C5D"/>
+          </a:solidFill>
+          <a:ln>
+            <a:noFill/>
+          </a:ln>
+          <a:effectLst/>
+        </p:spPr>
+        <p:style>
+          <a:lnRef idx="1">
+            <a:schemeClr val="accent1"/>
+          </a:lnRef>
+          <a:fillRef idx="3">
+            <a:schemeClr val="accent1"/>
+          </a:fillRef>
+          <a:effectRef idx="2">
+            <a:schemeClr val="accent1"/>
+          </a:effectRef>
+          <a:fontRef idx="minor">
+            <a:schemeClr val="lt1"/>
+          </a:fontRef>
+        </p:style>
+        <p:txBody>
+          <a:bodyPr rtlCol="0" anchor="ctr" lIns="0" rIns="0" tIns="0" bIns="0"/>
+          <a:lstStyle/>
+          <a:p>
+            <a:pPr algn="ctr"/>
+            <a:r>
+              <a:rPr sz="1600" b="1">
+                <a:solidFill>
+                  <a:srgbClr val="FFFFFF"/>
+                </a:solidFill>
+                <a:latin typeface="Microsoft YaHei"/>
+              </a:rPr>
+              <a:t>2</a:t>
+            </a:r>
+          </a:p>
+        </p:txBody>
+      </p:sp>
+      <p:sp>
+        <p:nvSpPr>
+          <p:cNvPr id="11" name="TextBox 10"/>
+          <p:cNvSpPr txBox="1"/>
+          <p:nvPr/>
+        </p:nvSpPr>
+        <p:spPr>
+          <a:xfrm>
+            <a:off x="7330287" y="1920240"/>
+            <a:ext cx="3992727" cy="1280160"/>
+          </a:xfrm>
+          <a:prstGeom prst="rect">
+            <a:avLst/>
+          </a:prstGeom>
+          <a:noFill/>
+        </p:spPr>
+        <p:txBody>
+          <a:bodyPr wrap="square" anchor="t" lIns="0" rIns="0" tIns="0" bIns="0">
+            <a:spAutoFit/>
+          </a:bodyPr>
+          <a:lstStyle/>
+          <a:p>
+            <a:pPr algn="l"/>
+            <a:r>
+              <a:rPr sz="1700" b="1">
+                <a:solidFill>
+                  <a:srgbClr val="222B33"/>
+                </a:solidFill>
+                <a:latin typeface="Microsoft YaHei"/>
+              </a:rPr>
+              <a:t>判断：实验服可以带回宿舍和便服一起洗，比较方便。</a:t>
+            </a:r>
+          </a:p>
+        </p:txBody>
+      </p:sp>
+      <p:sp>
+        <p:nvSpPr>
+          <p:cNvPr id="12" name="TextBox 11"/>
+          <p:cNvSpPr txBox="1"/>
+          <p:nvPr/>
+        </p:nvSpPr>
+        <p:spPr>
+          <a:xfrm>
+            <a:off x="7330287" y="3291840"/>
+            <a:ext cx="3992727" cy="2560320"/>
+          </a:xfrm>
+          <a:prstGeom prst="rect">
+            <a:avLst/>
+          </a:prstGeom>
+          <a:noFill/>
+        </p:spPr>
+        <p:txBody>
+          <a:bodyPr wrap="square" anchor="t" lIns="0" rIns="0" tIns="0" bIns="0">
+            <a:spAutoFit/>
+          </a:bodyPr>
+          <a:lstStyle/>
+          <a:p>
+            <a:pPr algn="l"/>
+            <a:r>
+              <a:rPr sz="1500" b="0">
+                <a:solidFill>
+                  <a:srgbClr val="222B33"/>
+                </a:solidFill>
+                <a:latin typeface="Microsoft YaHei"/>
+              </a:rPr>
+              <a:t>A. 正确</a:t>
+            </a:r>
+          </a:p>
+          <a:p>
+            <a:pPr algn="l"/>
+            <a:r>
+              <a:rPr sz="1500" b="0">
+                <a:solidFill>
+                  <a:srgbClr val="222B33"/>
+                </a:solidFill>
+                <a:latin typeface="Microsoft YaHei"/>
+              </a:rPr>
+              <a:t>B. 错误</a:t>
             </a:r>
           </a:p>
         </p:txBody>
